--- a/report/finansal_ag_analizi_sunum.pptx
+++ b/report/finansal_ag_analizi_sunum.pptx
@@ -11,6 +11,8 @@
     <p:sldId id="259" r:id="rId10"/>
     <p:sldId id="260" r:id="rId11"/>
     <p:sldId id="261" r:id="rId12"/>
+    <p:sldId id="262" r:id="rId13"/>
+    <p:sldId id="263" r:id="rId14"/>
   </p:sldIdLst>
   <p:sldSz cx="12191695" cy="6858000" type="screen4x3"/>
   <p:notesSz cx="6858000" cy="9144000"/>
@@ -3089,7 +3091,7 @@
     <p:bg>
       <p:bgPr>
         <a:solidFill>
-          <a:srgbClr val="F8FAFC"/>
+          <a:srgbClr val="142434"/>
         </a:solidFill>
         <a:effectLst/>
       </p:bgPr>
@@ -3116,7 +3118,7 @@
             <a:avLst/>
           </a:prstGeom>
           <a:solidFill>
-            <a:srgbClr val="195E94"/>
+            <a:srgbClr val="007E80"/>
           </a:solidFill>
           <a:ln>
             <a:noFill/>
@@ -3152,60 +3154,8 @@
         </p:nvSpPr>
         <p:spPr>
           <a:xfrm>
-            <a:off x="640080" y="868680"/>
-            <a:ext cx="7498079" cy="1554480"/>
-          </a:xfrm>
-          <a:prstGeom prst="rect">
-            <a:avLst/>
-          </a:prstGeom>
-          <a:noFill/>
-        </p:spPr>
-        <p:txBody>
-          <a:bodyPr wrap="none">
-            <a:spAutoFit/>
-          </a:bodyPr>
-          <a:lstStyle/>
-          <a:p>
-            <a:pPr>
-              <a:defRPr sz="3400" b="1">
-                <a:solidFill>
-                  <a:srgbClr val="1C2126"/>
-                </a:solidFill>
-                <a:latin typeface="Aptos Display"/>
-              </a:defRPr>
-            </a:pPr>
-            <a:r>
-              <a:t>Finansal Varl?klar Aras?ndaki ?li?kilerin Sosyal A? Analizi</a:t>
-            </a:r>
-          </a:p>
-          <a:p>
-            <a:pPr>
-              <a:spcBef>
-                <a:spcPts val="800"/>
-              </a:spcBef>
-              <a:defRPr sz="1700">
-                <a:solidFill>
-                  <a:srgbClr val="5C6570"/>
-                </a:solidFill>
-                <a:latin typeface="Aptos"/>
-              </a:defRPr>
-            </a:pPr>
-            <a:r>
-              <a:t>2014-2024 d?nemi k?resel finansal varl?klar ?zerine korelasyon tabanl? a? analizi</a:t>
-            </a:r>
-          </a:p>
-        </p:txBody>
-      </p:sp>
-      <p:sp>
-        <p:nvSpPr>
-          <p:cNvPr id="4" name="TextBox 3"/>
-          <p:cNvSpPr txBox="1"/>
-          <p:nvPr/>
-        </p:nvSpPr>
-        <p:spPr>
-          <a:xfrm>
-            <a:off x="685800" y="2788920"/>
-            <a:ext cx="5303520" cy="1280160"/>
+            <a:off x="594360" y="658368"/>
+            <a:ext cx="6400800" cy="1097280"/>
           </a:xfrm>
           <a:prstGeom prst="rect">
             <a:avLst/>
@@ -3218,58 +3168,99 @@
           </a:bodyPr>
           <a:lstStyle/>
           <a:p>
-            <a:pPr>
-              <a:spcAft>
-                <a:spcPts val="900"/>
-              </a:spcAft>
-              <a:defRPr sz="1500">
-                <a:solidFill>
-                  <a:srgbClr val="1C2126"/>
-                </a:solidFill>
-                <a:latin typeface="Aptos"/>
-              </a:defRPr>
-            </a:pPr>
-            <a:r>
-              <a:t>? Haz?rlayan: Emir Can G?ney</a:t>
-            </a:r>
-          </a:p>
-          <a:p>
-            <a:pPr>
-              <a:spcAft>
-                <a:spcPts val="900"/>
-              </a:spcAft>
-              <a:defRPr sz="1500">
-                <a:solidFill>
-                  <a:srgbClr val="1C2126"/>
-                </a:solidFill>
-                <a:latin typeface="Aptos"/>
-              </a:defRPr>
-            </a:pPr>
-            <a:r>
-              <a:t>? Ders: Sosyal A? Analizi</a:t>
-            </a:r>
-          </a:p>
-          <a:p>
-            <a:pPr>
-              <a:spcAft>
-                <a:spcPts val="900"/>
-              </a:spcAft>
-              <a:defRPr sz="1500">
-                <a:solidFill>
-                  <a:srgbClr val="1C2126"/>
-                </a:solidFill>
-                <a:latin typeface="Aptos"/>
-              </a:defRPr>
-            </a:pPr>
-            <a:r>
-              <a:t>? Veri kayna??: Yahoo Finance / yfinance</a:t>
+            <a:pPr algn="l">
+              <a:defRPr sz="3200" b="1">
+                <a:solidFill>
+                  <a:srgbClr val="FFFFFF"/>
+                </a:solidFill>
+                <a:latin typeface="Aptos"/>
+              </a:defRPr>
+            </a:pPr>
+            <a:r>
+              <a:t>Finansal Varlıklar Arasındaki İlişkilerin Sosyal Ağ Analizi</a:t>
+            </a:r>
+          </a:p>
+        </p:txBody>
+      </p:sp>
+      <p:sp>
+        <p:nvSpPr>
+          <p:cNvPr id="4" name="TextBox 3"/>
+          <p:cNvSpPr txBox="1"/>
+          <p:nvPr/>
+        </p:nvSpPr>
+        <p:spPr>
+          <a:xfrm>
+            <a:off x="621792" y="1828800"/>
+            <a:ext cx="6217920" cy="411480"/>
+          </a:xfrm>
+          <a:prstGeom prst="rect">
+            <a:avLst/>
+          </a:prstGeom>
+          <a:noFill/>
+        </p:spPr>
+        <p:txBody>
+          <a:bodyPr wrap="square">
+            <a:normAutofit/>
+          </a:bodyPr>
+          <a:lstStyle/>
+          <a:p>
+            <a:pPr algn="l">
+              <a:defRPr sz="1600" b="0">
+                <a:solidFill>
+                  <a:srgbClr val="D2DEE8"/>
+                </a:solidFill>
+                <a:latin typeface="Aptos"/>
+              </a:defRPr>
+            </a:pPr>
+            <a:r>
+              <a:t>2014-2024 dönemi için korelasyon tabanlı finansal ağ modeli</a:t>
+            </a:r>
+          </a:p>
+        </p:txBody>
+      </p:sp>
+      <p:sp>
+        <p:nvSpPr>
+          <p:cNvPr id="5" name="TextBox 4"/>
+          <p:cNvSpPr txBox="1"/>
+          <p:nvPr/>
+        </p:nvSpPr>
+        <p:spPr>
+          <a:xfrm>
+            <a:off x="640080" y="5349240"/>
+            <a:ext cx="3840480" cy="731520"/>
+          </a:xfrm>
+          <a:prstGeom prst="rect">
+            <a:avLst/>
+          </a:prstGeom>
+          <a:noFill/>
+        </p:spPr>
+        <p:txBody>
+          <a:bodyPr wrap="square">
+            <a:normAutofit/>
+          </a:bodyPr>
+          <a:lstStyle/>
+          <a:p>
+            <a:pPr algn="l">
+              <a:defRPr sz="1300" b="0">
+                <a:solidFill>
+                  <a:srgbClr val="DAE5ED"/>
+                </a:solidFill>
+                <a:latin typeface="Aptos"/>
+              </a:defRPr>
+            </a:pPr>
+            <a:r>
+              <a:t>Emir Can Güney</a:t>
+            </a:r>
+            <a:br/>
+            <a:r>
+              <a:t>Sosyal Ağ Analizi Projesi</a:t>
             </a:r>
           </a:p>
         </p:txBody>
       </p:sp>
       <p:pic>
         <p:nvPicPr>
-          <p:cNvPr id="5" name="Picture 4" descr="network_graph_enhanced.png"/>
+          <p:cNvPr id="6" name="Picture 5" descr="network_graph_enhanced.png"/>
           <p:cNvPicPr>
             <a:picLocks noChangeAspect="1"/>
           </p:cNvPicPr>
@@ -3283,8 +3274,8 @@
         </p:blipFill>
         <p:spPr>
           <a:xfrm>
-            <a:off x="6400800" y="960120"/>
-            <a:ext cx="5212080" cy="4800600"/>
+            <a:off x="6812280" y="594360"/>
+            <a:ext cx="4800600" cy="5440680"/>
           </a:xfrm>
           <a:prstGeom prst="rect">
             <a:avLst/>
@@ -3293,14 +3284,14 @@
       </p:pic>
       <p:sp>
         <p:nvSpPr>
-          <p:cNvPr id="6" name="TextBox 5"/>
+          <p:cNvPr id="7" name="TextBox 6"/>
           <p:cNvSpPr txBox="1"/>
           <p:nvPr/>
         </p:nvSpPr>
         <p:spPr>
           <a:xfrm>
-            <a:off x="10881360" y="6446520"/>
-            <a:ext cx="822960" cy="228600"/>
+            <a:off x="11155680" y="6446520"/>
+            <a:ext cx="548640" cy="228600"/>
           </a:xfrm>
           <a:prstGeom prst="rect">
             <a:avLst/>
@@ -3308,16 +3299,17 @@
           <a:noFill/>
         </p:spPr>
         <p:txBody>
-          <a:bodyPr wrap="none">
-            <a:spAutoFit/>
+          <a:bodyPr wrap="square">
+            <a:normAutofit/>
           </a:bodyPr>
           <a:lstStyle/>
           <a:p>
             <a:pPr algn="r">
-              <a:defRPr sz="900">
-                <a:solidFill>
-                  <a:srgbClr val="5C6570"/>
-                </a:solidFill>
+              <a:defRPr sz="900" b="0">
+                <a:solidFill>
+                  <a:srgbClr val="5E6670"/>
+                </a:solidFill>
+                <a:latin typeface="Aptos"/>
               </a:defRPr>
             </a:pPr>
             <a:r>
@@ -3360,8 +3352,8 @@
         </p:nvSpPr>
         <p:spPr>
           <a:xfrm>
-            <a:off x="502920" y="320040"/>
-            <a:ext cx="11155680" cy="594360"/>
+            <a:off x="502920" y="292608"/>
+            <a:ext cx="11155680" cy="502920"/>
           </a:xfrm>
           <a:prstGeom prst="rect">
             <a:avLst/>
@@ -3369,21 +3361,21 @@
           <a:noFill/>
         </p:spPr>
         <p:txBody>
-          <a:bodyPr wrap="none">
-            <a:spAutoFit/>
+          <a:bodyPr wrap="square">
+            <a:normAutofit/>
           </a:bodyPr>
           <a:lstStyle/>
           <a:p>
-            <a:pPr>
-              <a:defRPr sz="2700" b="1">
-                <a:solidFill>
-                  <a:srgbClr val="1C2126"/>
-                </a:solidFill>
-                <a:latin typeface="Aptos Display"/>
-              </a:defRPr>
-            </a:pPr>
-            <a:r>
-              <a:t>Problem Tan?m? ve Veri Seti</a:t>
+            <a:pPr algn="l">
+              <a:defRPr sz="2400" b="1">
+                <a:solidFill>
+                  <a:srgbClr val="1F2328"/>
+                </a:solidFill>
+                <a:latin typeface="Aptos"/>
+              </a:defRPr>
+            </a:pPr>
+            <a:r>
+              <a:t>Amaç ve Ağ Mantığı</a:t>
             </a:r>
           </a:p>
         </p:txBody>
@@ -3396,14 +3388,14 @@
         </p:nvSpPr>
         <p:spPr>
           <a:xfrm>
-            <a:off x="530352" y="1170432"/>
-            <a:ext cx="11109960" cy="18288"/>
+            <a:off x="530352" y="1143000"/>
+            <a:ext cx="11109960" cy="13716"/>
           </a:xfrm>
           <a:prstGeom prst="rect">
             <a:avLst/>
           </a:prstGeom>
           <a:solidFill>
-            <a:srgbClr val="D6DCE2"/>
+            <a:srgbClr val="DCE1E6"/>
           </a:solidFill>
           <a:ln>
             <a:noFill/>
@@ -3440,7 +3432,7 @@
         <p:spPr>
           <a:xfrm>
             <a:off x="685800" y="1508760"/>
-            <a:ext cx="5669280" cy="4114800"/>
+            <a:ext cx="5486400" cy="822960"/>
           </a:xfrm>
           <a:prstGeom prst="rect">
             <a:avLst/>
@@ -3453,97 +3445,117 @@
           </a:bodyPr>
           <a:lstStyle/>
           <a:p>
+            <a:pPr algn="l">
+              <a:defRPr sz="2000" b="1">
+                <a:solidFill>
+                  <a:srgbClr val="1F2328"/>
+                </a:solidFill>
+                <a:latin typeface="Aptos"/>
+              </a:defRPr>
+            </a:pPr>
+            <a:r>
+              <a:t>Bu çalışmada finansal varlıkları tek tek değil, birbirleriyle kurdukları ilişkiler üzerinden inceledim.</a:t>
+            </a:r>
+          </a:p>
+        </p:txBody>
+      </p:sp>
+      <p:sp>
+        <p:nvSpPr>
+          <p:cNvPr id="5" name="TextBox 4"/>
+          <p:cNvSpPr txBox="1"/>
+          <p:nvPr/>
+        </p:nvSpPr>
+        <p:spPr>
+          <a:xfrm>
+            <a:off x="749808" y="2606040"/>
+            <a:ext cx="5486400" cy="2834640"/>
+          </a:xfrm>
+          <a:prstGeom prst="rect">
+            <a:avLst/>
+          </a:prstGeom>
+          <a:noFill/>
+        </p:spPr>
+        <p:txBody>
+          <a:bodyPr wrap="square">
+            <a:normAutofit/>
+          </a:bodyPr>
+          <a:lstStyle/>
+          <a:p>
             <a:pPr>
               <a:spcAft>
-                <a:spcPts val="900"/>
+                <a:spcPts val="800"/>
               </a:spcAft>
               <a:defRPr sz="1700">
                 <a:solidFill>
-                  <a:srgbClr val="1C2126"/>
-                </a:solidFill>
-                <a:latin typeface="Aptos"/>
-              </a:defRPr>
-            </a:pPr>
-            <a:r>
-              <a:t>? D???mler: 18 finansal varl?k ve piyasa g?stergesi</a:t>
+                  <a:srgbClr val="1F2328"/>
+                </a:solidFill>
+                <a:latin typeface="Aptos"/>
+              </a:defRPr>
+            </a:pPr>
+            <a:r>
+              <a:t>- Düğümler finansal varlıkları temsil eder.</a:t>
             </a:r>
           </a:p>
           <a:p>
             <a:pPr>
               <a:spcAft>
-                <a:spcPts val="900"/>
+                <a:spcPts val="800"/>
               </a:spcAft>
               <a:defRPr sz="1700">
                 <a:solidFill>
-                  <a:srgbClr val="1C2126"/>
-                </a:solidFill>
-                <a:latin typeface="Aptos"/>
-              </a:defRPr>
-            </a:pPr>
-            <a:r>
-              <a:t>? Kenarlar: g?nl?k getiriler aras?ndaki g??l? Pearson korelasyon ili?kileri</a:t>
+                  <a:srgbClr val="1F2328"/>
+                </a:solidFill>
+                <a:latin typeface="Aptos"/>
+              </a:defRPr>
+            </a:pPr>
+            <a:r>
+              <a:t>- Kenarlar güçlü korelasyon ilişkilerini temsil eder.</a:t>
             </a:r>
           </a:p>
           <a:p>
             <a:pPr>
               <a:spcAft>
-                <a:spcPts val="900"/>
+                <a:spcPts val="800"/>
               </a:spcAft>
               <a:defRPr sz="1700">
                 <a:solidFill>
-                  <a:srgbClr val="1C2126"/>
-                </a:solidFill>
-                <a:latin typeface="Aptos"/>
-              </a:defRPr>
-            </a:pPr>
-            <a:r>
-              <a:t>? A? tipi: y?ns?z, a??rl?kl? ve korelasyon tabanl? a?</a:t>
+                  <a:srgbClr val="1F2328"/>
+                </a:solidFill>
+                <a:latin typeface="Aptos"/>
+              </a:defRPr>
+            </a:pPr>
+            <a:r>
+              <a:t>- Ağ yönsüz ve ağırlıklı olarak kuruldu.</a:t>
             </a:r>
           </a:p>
           <a:p>
             <a:pPr>
               <a:spcAft>
-                <a:spcPts val="900"/>
+                <a:spcPts val="800"/>
               </a:spcAft>
               <a:defRPr sz="1700">
                 <a:solidFill>
-                  <a:srgbClr val="1C2126"/>
-                </a:solidFill>
-                <a:latin typeface="Aptos"/>
-              </a:defRPr>
-            </a:pPr>
-            <a:r>
-              <a:t>? E?ik de?er: |correlation| &gt;= 0.40</a:t>
-            </a:r>
-          </a:p>
-          <a:p>
-            <a:pPr>
-              <a:spcAft>
-                <a:spcPts val="900"/>
-              </a:spcAft>
-              <a:defRPr sz="1700">
-                <a:solidFill>
-                  <a:srgbClr val="1C2126"/>
-                </a:solidFill>
-                <a:latin typeface="Aptos"/>
-              </a:defRPr>
-            </a:pPr>
-            <a:r>
-              <a:t>? Ham fiyatlar haz?r a? verisi de?ildir; proje i?inde temizlenip a? veri setine d?n??t?r?lm??t?r.</a:t>
-            </a:r>
-          </a:p>
-        </p:txBody>
-      </p:sp>
-      <p:sp>
-        <p:nvSpPr>
-          <p:cNvPr id="5" name="Rounded Rectangle 4"/>
+                  <a:srgbClr val="1F2328"/>
+                </a:solidFill>
+                <a:latin typeface="Aptos"/>
+              </a:defRPr>
+            </a:pPr>
+            <a:r>
+              <a:t>- Temel soru: Piyasa varlıkları hangi merkezler ve gruplar etrafında toplanıyor.</a:t>
+            </a:r>
+          </a:p>
+        </p:txBody>
+      </p:sp>
+      <p:sp>
+        <p:nvSpPr>
+          <p:cNvPr id="6" name="Rounded Rectangle 5"/>
           <p:cNvSpPr/>
           <p:nvPr/>
         </p:nvSpPr>
         <p:spPr>
           <a:xfrm>
-            <a:off x="6629400" y="1508760"/>
-            <a:ext cx="2103120" cy="914400"/>
+            <a:off x="6812280" y="1600200"/>
+            <a:ext cx="1920240" cy="868680"/>
           </a:xfrm>
           <a:prstGeom prst="roundRect">
             <a:avLst/>
@@ -3551,9 +3563,9 @@
           <a:solidFill>
             <a:srgbClr val="FFFFFF"/>
           </a:solidFill>
-          <a:ln w="12700">
+          <a:ln>
             <a:solidFill>
-              <a:srgbClr val="D6DCE2"/>
+              <a:srgbClr val="DCE1E6"/>
             </a:solidFill>
           </a:ln>
         </p:spPr>
@@ -3572,13 +3584,13 @@
           </a:fontRef>
         </p:style>
         <p:txBody>
-          <a:bodyPr rtlCol="0" anchor="ctr" lIns="164592" rIns="109728" tIns="73152"/>
+          <a:bodyPr rtlCol="0" anchor="ctr" lIns="164592" tIns="64008"/>
           <a:lstStyle/>
           <a:p>
             <a:pPr algn="ctr">
-              <a:defRPr sz="2300" b="1">
-                <a:solidFill>
-                  <a:srgbClr val="195E94"/>
+              <a:defRPr sz="1900" b="1">
+                <a:solidFill>
+                  <a:srgbClr val="1C5691"/>
                 </a:solidFill>
                 <a:latin typeface="Aptos Display"/>
               </a:defRPr>
@@ -3589,35 +3601,35 @@
           </a:p>
           <a:p>
             <a:pPr>
-              <a:defRPr sz="1050">
-                <a:solidFill>
-                  <a:srgbClr val="5C6570"/>
-                </a:solidFill>
-                <a:latin typeface="Aptos"/>
-              </a:defRPr>
-            </a:pPr>
-            <a:r>
-              <a:t>Varl?k say?s?</a:t>
-            </a:r>
-          </a:p>
-        </p:txBody>
-      </p:sp>
-      <p:sp>
-        <p:nvSpPr>
-          <p:cNvPr id="6" name="Rectangle 5"/>
+              <a:defRPr sz="1000">
+                <a:solidFill>
+                  <a:srgbClr val="5E6670"/>
+                </a:solidFill>
+                <a:latin typeface="Aptos"/>
+              </a:defRPr>
+            </a:pPr>
+            <a:r>
+              <a:t>Düğüm</a:t>
+            </a:r>
+          </a:p>
+        </p:txBody>
+      </p:sp>
+      <p:sp>
+        <p:nvSpPr>
+          <p:cNvPr id="7" name="Rectangle 6"/>
           <p:cNvSpPr/>
           <p:nvPr/>
         </p:nvSpPr>
         <p:spPr>
           <a:xfrm>
-            <a:off x="6629400" y="1508760"/>
-            <a:ext cx="73152" cy="914400"/>
+            <a:off x="6812280" y="1600200"/>
+            <a:ext cx="64008" cy="868680"/>
           </a:xfrm>
           <a:prstGeom prst="rect">
             <a:avLst/>
           </a:prstGeom>
           <a:solidFill>
-            <a:srgbClr val="195E94"/>
+            <a:srgbClr val="1C5691"/>
           </a:solidFill>
           <a:ln>
             <a:noFill/>
@@ -3647,14 +3659,14 @@
       </p:sp>
       <p:sp>
         <p:nvSpPr>
-          <p:cNvPr id="7" name="Rounded Rectangle 6"/>
+          <p:cNvPr id="8" name="Rounded Rectangle 7"/>
           <p:cNvSpPr/>
           <p:nvPr/>
         </p:nvSpPr>
         <p:spPr>
           <a:xfrm>
-            <a:off x="9006840" y="1508760"/>
-            <a:ext cx="2103120" cy="914400"/>
+            <a:off x="9189720" y="1600200"/>
+            <a:ext cx="1920240" cy="868680"/>
           </a:xfrm>
           <a:prstGeom prst="roundRect">
             <a:avLst/>
@@ -3662,9 +3674,9 @@
           <a:solidFill>
             <a:srgbClr val="FFFFFF"/>
           </a:solidFill>
-          <a:ln w="12700">
+          <a:ln>
             <a:solidFill>
-              <a:srgbClr val="D6DCE2"/>
+              <a:srgbClr val="DCE1E6"/>
             </a:solidFill>
           </a:ln>
         </p:spPr>
@@ -3683,13 +3695,13 @@
           </a:fontRef>
         </p:style>
         <p:txBody>
-          <a:bodyPr rtlCol="0" anchor="ctr" lIns="164592" rIns="109728" tIns="73152"/>
+          <a:bodyPr rtlCol="0" anchor="ctr" lIns="164592" tIns="64008"/>
           <a:lstStyle/>
           <a:p>
             <a:pPr algn="ctr">
-              <a:defRPr sz="2300" b="1">
-                <a:solidFill>
-                  <a:srgbClr val="008579"/>
+              <a:defRPr sz="1900" b="1">
+                <a:solidFill>
+                  <a:srgbClr val="007E80"/>
                 </a:solidFill>
                 <a:latin typeface="Aptos Display"/>
               </a:defRPr>
@@ -3700,35 +3712,35 @@
           </a:p>
           <a:p>
             <a:pPr>
-              <a:defRPr sz="1050">
-                <a:solidFill>
-                  <a:srgbClr val="5C6570"/>
-                </a:solidFill>
-                <a:latin typeface="Aptos"/>
-              </a:defRPr>
-            </a:pPr>
-            <a:r>
-              <a:t>Kenar say?s?</a:t>
-            </a:r>
-          </a:p>
-        </p:txBody>
-      </p:sp>
-      <p:sp>
-        <p:nvSpPr>
-          <p:cNvPr id="8" name="Rectangle 7"/>
+              <a:defRPr sz="1000">
+                <a:solidFill>
+                  <a:srgbClr val="5E6670"/>
+                </a:solidFill>
+                <a:latin typeface="Aptos"/>
+              </a:defRPr>
+            </a:pPr>
+            <a:r>
+              <a:t>Kenar</a:t>
+            </a:r>
+          </a:p>
+        </p:txBody>
+      </p:sp>
+      <p:sp>
+        <p:nvSpPr>
+          <p:cNvPr id="9" name="Rectangle 8"/>
           <p:cNvSpPr/>
           <p:nvPr/>
         </p:nvSpPr>
         <p:spPr>
           <a:xfrm>
-            <a:off x="9006840" y="1508760"/>
-            <a:ext cx="73152" cy="914400"/>
+            <a:off x="9189720" y="1600200"/>
+            <a:ext cx="64008" cy="868680"/>
           </a:xfrm>
           <a:prstGeom prst="rect">
             <a:avLst/>
           </a:prstGeom>
           <a:solidFill>
-            <a:srgbClr val="008579"/>
+            <a:srgbClr val="007E80"/>
           </a:solidFill>
           <a:ln>
             <a:noFill/>
@@ -3758,14 +3770,14 @@
       </p:sp>
       <p:sp>
         <p:nvSpPr>
-          <p:cNvPr id="9" name="Rounded Rectangle 8"/>
+          <p:cNvPr id="10" name="Rounded Rectangle 9"/>
           <p:cNvSpPr/>
           <p:nvPr/>
         </p:nvSpPr>
         <p:spPr>
           <a:xfrm>
-            <a:off x="6629400" y="2743200"/>
-            <a:ext cx="2103120" cy="914400"/>
+            <a:off x="6812280" y="2788920"/>
+            <a:ext cx="1920240" cy="868680"/>
           </a:xfrm>
           <a:prstGeom prst="roundRect">
             <a:avLst/>
@@ -3773,9 +3785,9 @@
           <a:solidFill>
             <a:srgbClr val="FFFFFF"/>
           </a:solidFill>
-          <a:ln w="12700">
+          <a:ln>
             <a:solidFill>
-              <a:srgbClr val="D6DCE2"/>
+              <a:srgbClr val="DCE1E6"/>
             </a:solidFill>
           </a:ln>
         </p:spPr>
@@ -3794,52 +3806,52 @@
           </a:fontRef>
         </p:style>
         <p:txBody>
-          <a:bodyPr rtlCol="0" anchor="ctr" lIns="164592" rIns="109728" tIns="73152"/>
+          <a:bodyPr rtlCol="0" anchor="ctr" lIns="164592" tIns="64008"/>
           <a:lstStyle/>
           <a:p>
             <a:pPr algn="ctr">
-              <a:defRPr sz="2300" b="1">
-                <a:solidFill>
-                  <a:srgbClr val="3D8C50"/>
+              <a:defRPr sz="1900" b="1">
+                <a:solidFill>
+                  <a:srgbClr val="418456"/>
                 </a:solidFill>
                 <a:latin typeface="Aptos Display"/>
               </a:defRPr>
             </a:pPr>
             <a:r>
-              <a:t>2014-2024</a:t>
+              <a:t>|r| &gt;= 0.40</a:t>
             </a:r>
           </a:p>
           <a:p>
             <a:pPr>
-              <a:defRPr sz="1050">
-                <a:solidFill>
-                  <a:srgbClr val="5C6570"/>
-                </a:solidFill>
-                <a:latin typeface="Aptos"/>
-              </a:defRPr>
-            </a:pPr>
-            <a:r>
-              <a:t>D?nem</a:t>
-            </a:r>
-          </a:p>
-        </p:txBody>
-      </p:sp>
-      <p:sp>
-        <p:nvSpPr>
-          <p:cNvPr id="10" name="Rectangle 9"/>
+              <a:defRPr sz="1000">
+                <a:solidFill>
+                  <a:srgbClr val="5E6670"/>
+                </a:solidFill>
+                <a:latin typeface="Aptos"/>
+              </a:defRPr>
+            </a:pPr>
+            <a:r>
+              <a:t>Eşik</a:t>
+            </a:r>
+          </a:p>
+        </p:txBody>
+      </p:sp>
+      <p:sp>
+        <p:nvSpPr>
+          <p:cNvPr id="11" name="Rectangle 10"/>
           <p:cNvSpPr/>
           <p:nvPr/>
         </p:nvSpPr>
         <p:spPr>
           <a:xfrm>
-            <a:off x="6629400" y="2743200"/>
-            <a:ext cx="73152" cy="914400"/>
+            <a:off x="6812280" y="2788920"/>
+            <a:ext cx="64008" cy="868680"/>
           </a:xfrm>
           <a:prstGeom prst="rect">
             <a:avLst/>
           </a:prstGeom>
           <a:solidFill>
-            <a:srgbClr val="3D8C50"/>
+            <a:srgbClr val="418456"/>
           </a:solidFill>
           <a:ln>
             <a:noFill/>
@@ -3869,14 +3881,14 @@
       </p:sp>
       <p:sp>
         <p:nvSpPr>
-          <p:cNvPr id="11" name="Rounded Rectangle 10"/>
+          <p:cNvPr id="12" name="Rounded Rectangle 11"/>
           <p:cNvSpPr/>
           <p:nvPr/>
         </p:nvSpPr>
         <p:spPr>
           <a:xfrm>
-            <a:off x="9006840" y="2743200"/>
-            <a:ext cx="2103120" cy="914400"/>
+            <a:off x="9189720" y="2788920"/>
+            <a:ext cx="1920240" cy="868680"/>
           </a:xfrm>
           <a:prstGeom prst="roundRect">
             <a:avLst/>
@@ -3884,9 +3896,9 @@
           <a:solidFill>
             <a:srgbClr val="FFFFFF"/>
           </a:solidFill>
-          <a:ln w="12700">
+          <a:ln>
             <a:solidFill>
-              <a:srgbClr val="D6DCE2"/>
+              <a:srgbClr val="DCE1E6"/>
             </a:solidFill>
           </a:ln>
         </p:spPr>
@@ -3905,52 +3917,52 @@
           </a:fontRef>
         </p:style>
         <p:txBody>
-          <a:bodyPr rtlCol="0" anchor="ctr" lIns="164592" rIns="109728" tIns="73152"/>
+          <a:bodyPr rtlCol="0" anchor="ctr" lIns="164592" tIns="64008"/>
           <a:lstStyle/>
           <a:p>
             <a:pPr algn="ctr">
-              <a:defRPr sz="2300" b="1">
-                <a:solidFill>
-                  <a:srgbClr val="BE3E3E"/>
+              <a:defRPr sz="1900" b="1">
+                <a:solidFill>
+                  <a:srgbClr val="B94242"/>
                 </a:solidFill>
                 <a:latin typeface="Aptos Display"/>
               </a:defRPr>
             </a:pPr>
             <a:r>
-              <a:t>yfinance</a:t>
+              <a:t>Yönsüz</a:t>
             </a:r>
           </a:p>
           <a:p>
             <a:pPr>
-              <a:defRPr sz="1050">
-                <a:solidFill>
-                  <a:srgbClr val="5C6570"/>
-                </a:solidFill>
-                <a:latin typeface="Aptos"/>
-              </a:defRPr>
-            </a:pPr>
-            <a:r>
-              <a:t>Veri kayna??</a:t>
-            </a:r>
-          </a:p>
-        </p:txBody>
-      </p:sp>
-      <p:sp>
-        <p:nvSpPr>
-          <p:cNvPr id="12" name="Rectangle 11"/>
+              <a:defRPr sz="1000">
+                <a:solidFill>
+                  <a:srgbClr val="5E6670"/>
+                </a:solidFill>
+                <a:latin typeface="Aptos"/>
+              </a:defRPr>
+            </a:pPr>
+            <a:r>
+              <a:t>Ağ tipi</a:t>
+            </a:r>
+          </a:p>
+        </p:txBody>
+      </p:sp>
+      <p:sp>
+        <p:nvSpPr>
+          <p:cNvPr id="13" name="Rectangle 12"/>
           <p:cNvSpPr/>
           <p:nvPr/>
         </p:nvSpPr>
         <p:spPr>
           <a:xfrm>
-            <a:off x="9006840" y="2743200"/>
-            <a:ext cx="73152" cy="914400"/>
+            <a:off x="9189720" y="2788920"/>
+            <a:ext cx="64008" cy="868680"/>
           </a:xfrm>
           <a:prstGeom prst="rect">
             <a:avLst/>
           </a:prstGeom>
           <a:solidFill>
-            <a:srgbClr val="BE3E3E"/>
+            <a:srgbClr val="B94242"/>
           </a:solidFill>
           <a:ln>
             <a:noFill/>
@@ -3978,30 +3990,6 @@
           </a:p>
         </p:txBody>
       </p:sp>
-      <p:pic>
-        <p:nvPicPr>
-          <p:cNvPr id="13" name="Picture 12" descr="correlation_heatmap.png"/>
-          <p:cNvPicPr>
-            <a:picLocks noChangeAspect="1"/>
-          </p:cNvPicPr>
-          <p:nvPr/>
-        </p:nvPicPr>
-        <p:blipFill>
-          <a:blip r:embed="rId2"/>
-          <a:stretch>
-            <a:fillRect/>
-          </a:stretch>
-        </p:blipFill>
-        <p:spPr>
-          <a:xfrm>
-            <a:off x="6629400" y="3886200"/>
-            <a:ext cx="4526280" cy="2331720"/>
-          </a:xfrm>
-          <a:prstGeom prst="rect">
-            <a:avLst/>
-          </a:prstGeom>
-        </p:spPr>
-      </p:pic>
       <p:sp>
         <p:nvSpPr>
           <p:cNvPr id="14" name="TextBox 13"/>
@@ -4010,8 +3998,8 @@
         </p:nvSpPr>
         <p:spPr>
           <a:xfrm>
-            <a:off x="10881360" y="6446520"/>
-            <a:ext cx="822960" cy="228600"/>
+            <a:off x="6858000" y="4160520"/>
+            <a:ext cx="4297680" cy="914400"/>
           </a:xfrm>
           <a:prstGeom prst="rect">
             <a:avLst/>
@@ -4019,16 +4007,53 @@
           <a:noFill/>
         </p:spPr>
         <p:txBody>
-          <a:bodyPr wrap="none">
-            <a:spAutoFit/>
+          <a:bodyPr wrap="square">
+            <a:normAutofit/>
           </a:bodyPr>
           <a:lstStyle/>
           <a:p>
+            <a:pPr algn="l">
+              <a:defRPr sz="1400" b="0">
+                <a:solidFill>
+                  <a:srgbClr val="5E6670"/>
+                </a:solidFill>
+                <a:latin typeface="Aptos"/>
+              </a:defRPr>
+            </a:pPr>
+            <a:r>
+              <a:t>Korelasyonun işareti korundu: pozitif ilişkiler birlikte hareketi, negatif ilişkiler ters yönlü hareketi gösterir.</a:t>
+            </a:r>
+          </a:p>
+        </p:txBody>
+      </p:sp>
+      <p:sp>
+        <p:nvSpPr>
+          <p:cNvPr id="15" name="TextBox 14"/>
+          <p:cNvSpPr txBox="1"/>
+          <p:nvPr/>
+        </p:nvSpPr>
+        <p:spPr>
+          <a:xfrm>
+            <a:off x="11155680" y="6446520"/>
+            <a:ext cx="548640" cy="228600"/>
+          </a:xfrm>
+          <a:prstGeom prst="rect">
+            <a:avLst/>
+          </a:prstGeom>
+          <a:noFill/>
+        </p:spPr>
+        <p:txBody>
+          <a:bodyPr wrap="square">
+            <a:normAutofit/>
+          </a:bodyPr>
+          <a:lstStyle/>
+          <a:p>
             <a:pPr algn="r">
-              <a:defRPr sz="900">
-                <a:solidFill>
-                  <a:srgbClr val="5C6570"/>
-                </a:solidFill>
+              <a:defRPr sz="900" b="0">
+                <a:solidFill>
+                  <a:srgbClr val="5E6670"/>
+                </a:solidFill>
+                <a:latin typeface="Aptos"/>
               </a:defRPr>
             </a:pPr>
             <a:r>
@@ -4071,8 +4096,8 @@
         </p:nvSpPr>
         <p:spPr>
           <a:xfrm>
-            <a:off x="502920" y="320040"/>
-            <a:ext cx="11155680" cy="594360"/>
+            <a:off x="502920" y="292608"/>
+            <a:ext cx="11155680" cy="502920"/>
           </a:xfrm>
           <a:prstGeom prst="rect">
             <a:avLst/>
@@ -4080,21 +4105,21 @@
           <a:noFill/>
         </p:spPr>
         <p:txBody>
-          <a:bodyPr wrap="none">
-            <a:spAutoFit/>
+          <a:bodyPr wrap="square">
+            <a:normAutofit/>
           </a:bodyPr>
           <a:lstStyle/>
           <a:p>
-            <a:pPr>
-              <a:defRPr sz="2700" b="1">
-                <a:solidFill>
-                  <a:srgbClr val="1C2126"/>
-                </a:solidFill>
-                <a:latin typeface="Aptos Display"/>
-              </a:defRPr>
-            </a:pPr>
-            <a:r>
-              <a:t>Y?ntem ve Analiz Ak???</a:t>
+            <a:pPr algn="l">
+              <a:defRPr sz="2400" b="1">
+                <a:solidFill>
+                  <a:srgbClr val="1F2328"/>
+                </a:solidFill>
+                <a:latin typeface="Aptos"/>
+              </a:defRPr>
+            </a:pPr>
+            <a:r>
+              <a:t>Veri Seti</a:t>
             </a:r>
           </a:p>
         </p:txBody>
@@ -4107,14 +4132,14 @@
         </p:nvSpPr>
         <p:spPr>
           <a:xfrm>
-            <a:off x="530352" y="1170432"/>
-            <a:ext cx="11109960" cy="18288"/>
+            <a:off x="530352" y="1143000"/>
+            <a:ext cx="11109960" cy="13716"/>
           </a:xfrm>
           <a:prstGeom prst="rect">
             <a:avLst/>
           </a:prstGeom>
           <a:solidFill>
-            <a:srgbClr val="D6DCE2"/>
+            <a:srgbClr val="DCE1E6"/>
           </a:solidFill>
           <a:ln>
             <a:noFill/>
@@ -4144,20 +4169,123 @@
       </p:sp>
       <p:sp>
         <p:nvSpPr>
-          <p:cNvPr id="4" name="Oval 3"/>
+          <p:cNvPr id="4" name="TextBox 3"/>
+          <p:cNvSpPr txBox="1"/>
+          <p:nvPr/>
+        </p:nvSpPr>
+        <p:spPr>
+          <a:xfrm>
+            <a:off x="685800" y="1508760"/>
+            <a:ext cx="5212080" cy="4297680"/>
+          </a:xfrm>
+          <a:prstGeom prst="rect">
+            <a:avLst/>
+          </a:prstGeom>
+          <a:noFill/>
+        </p:spPr>
+        <p:txBody>
+          <a:bodyPr wrap="square">
+            <a:normAutofit/>
+          </a:bodyPr>
+          <a:lstStyle/>
+          <a:p>
+            <a:pPr>
+              <a:spcAft>
+                <a:spcPts val="800"/>
+              </a:spcAft>
+              <a:defRPr sz="1700">
+                <a:solidFill>
+                  <a:srgbClr val="1F2328"/>
+                </a:solidFill>
+                <a:latin typeface="Aptos"/>
+              </a:defRPr>
+            </a:pPr>
+            <a:r>
+              <a:t>- Veri kaynağı: Yahoo Finance.</a:t>
+            </a:r>
+          </a:p>
+          <a:p>
+            <a:pPr>
+              <a:spcAft>
+                <a:spcPts val="800"/>
+              </a:spcAft>
+              <a:defRPr sz="1700">
+                <a:solidFill>
+                  <a:srgbClr val="1F2328"/>
+                </a:solidFill>
+                <a:latin typeface="Aptos"/>
+              </a:defRPr>
+            </a:pPr>
+            <a:r>
+              <a:t>- Dönem: 2014-2024.</a:t>
+            </a:r>
+          </a:p>
+          <a:p>
+            <a:pPr>
+              <a:spcAft>
+                <a:spcPts val="800"/>
+              </a:spcAft>
+              <a:defRPr sz="1700">
+                <a:solidFill>
+                  <a:srgbClr val="1F2328"/>
+                </a:solidFill>
+                <a:latin typeface="Aptos"/>
+              </a:defRPr>
+            </a:pPr>
+            <a:r>
+              <a:t>- Varlıklar: metal, enerji, hisse endeksi, döviz, kripto, risk ve faiz göstergeleri.</a:t>
+            </a:r>
+          </a:p>
+          <a:p>
+            <a:pPr>
+              <a:spcAft>
+                <a:spcPts val="800"/>
+              </a:spcAft>
+              <a:defRPr sz="1700">
+                <a:solidFill>
+                  <a:srgbClr val="1F2328"/>
+                </a:solidFill>
+                <a:latin typeface="Aptos"/>
+              </a:defRPr>
+            </a:pPr>
+            <a:r>
+              <a:t>- Ham fiyatlardan günlük getiri serileri üretildi.</a:t>
+            </a:r>
+          </a:p>
+          <a:p>
+            <a:pPr>
+              <a:spcAft>
+                <a:spcPts val="800"/>
+              </a:spcAft>
+              <a:defRPr sz="1700">
+                <a:solidFill>
+                  <a:srgbClr val="1F2328"/>
+                </a:solidFill>
+                <a:latin typeface="Aptos"/>
+              </a:defRPr>
+            </a:pPr>
+            <a:r>
+              <a:t>- Ağ verisi hazır alınmadı; korelasyonlardan oluşturuldu.</a:t>
+            </a:r>
+          </a:p>
+        </p:txBody>
+      </p:sp>
+      <p:sp>
+        <p:nvSpPr>
+          <p:cNvPr id="5" name="Rounded Rectangle 4"/>
           <p:cNvSpPr/>
           <p:nvPr/>
         </p:nvSpPr>
         <p:spPr>
           <a:xfrm>
-            <a:off x="822960" y="1417320"/>
-            <a:ext cx="411480" cy="411480"/>
-          </a:xfrm>
-          <a:prstGeom prst="ellipse">
+            <a:off x="6400800" y="1600200"/>
+            <a:ext cx="2240280" cy="384048"/>
+          </a:xfrm>
+          <a:prstGeom prst="roundRect">
             <a:avLst/>
           </a:prstGeom>
           <a:solidFill>
-            <a:srgbClr val="195E94"/>
+            <a:srgbClr val="1C5691"/>
           </a:solidFill>
           <a:ln>
             <a:noFill/>
@@ -4178,74 +4306,39 @@
           </a:fontRef>
         </p:style>
         <p:txBody>
-          <a:bodyPr rtlCol="0" anchor="ctr"/>
+          <a:bodyPr rtlCol="0" anchor="ctr" lIns="109728" rIns="109728"/>
           <a:lstStyle/>
           <a:p>
             <a:pPr algn="ctr">
-              <a:defRPr b="1">
+              <a:defRPr sz="1050" b="1">
                 <a:solidFill>
                   <a:srgbClr val="FFFFFF"/>
                 </a:solidFill>
-              </a:defRPr>
-            </a:pPr>
-            <a:r>
-              <a:t>1</a:t>
-            </a:r>
-          </a:p>
-        </p:txBody>
-      </p:sp>
-      <p:sp>
-        <p:nvSpPr>
-          <p:cNvPr id="5" name="TextBox 4"/>
-          <p:cNvSpPr txBox="1"/>
-          <p:nvPr/>
-        </p:nvSpPr>
-        <p:spPr>
-          <a:xfrm>
-            <a:off x="1417320" y="1389888"/>
-            <a:ext cx="5486400" cy="502920"/>
-          </a:xfrm>
-          <a:prstGeom prst="rect">
-            <a:avLst/>
-          </a:prstGeom>
-          <a:noFill/>
-        </p:spPr>
-        <p:txBody>
-          <a:bodyPr wrap="none">
-            <a:spAutoFit/>
-          </a:bodyPr>
-          <a:lstStyle/>
-          <a:p>
-            <a:pPr>
-              <a:defRPr sz="1800">
-                <a:solidFill>
-                  <a:srgbClr val="1C2126"/>
-                </a:solidFill>
-                <a:latin typeface="Aptos"/>
-              </a:defRPr>
-            </a:pPr>
-            <a:r>
-              <a:t>Finansal fiyat verileri ?ekildi</a:t>
-            </a:r>
-          </a:p>
-        </p:txBody>
-      </p:sp>
-      <p:sp>
-        <p:nvSpPr>
-          <p:cNvPr id="6" name="Oval 5"/>
+                <a:latin typeface="Aptos"/>
+              </a:defRPr>
+            </a:pPr>
+            <a:r>
+              <a:t>Altın / Gümüş</a:t>
+            </a:r>
+          </a:p>
+        </p:txBody>
+      </p:sp>
+      <p:sp>
+        <p:nvSpPr>
+          <p:cNvPr id="6" name="Rounded Rectangle 5"/>
           <p:cNvSpPr/>
           <p:nvPr/>
         </p:nvSpPr>
         <p:spPr>
           <a:xfrm>
-            <a:off x="822960" y="2286000"/>
-            <a:ext cx="411480" cy="411480"/>
-          </a:xfrm>
-          <a:prstGeom prst="ellipse">
+            <a:off x="8915400" y="1600200"/>
+            <a:ext cx="2240280" cy="384048"/>
+          </a:xfrm>
+          <a:prstGeom prst="roundRect">
             <a:avLst/>
           </a:prstGeom>
           <a:solidFill>
-            <a:srgbClr val="195E94"/>
+            <a:srgbClr val="007E80"/>
           </a:solidFill>
           <a:ln>
             <a:noFill/>
@@ -4266,74 +4359,39 @@
           </a:fontRef>
         </p:style>
         <p:txBody>
-          <a:bodyPr rtlCol="0" anchor="ctr"/>
+          <a:bodyPr rtlCol="0" anchor="ctr" lIns="109728" rIns="109728"/>
           <a:lstStyle/>
           <a:p>
             <a:pPr algn="ctr">
-              <a:defRPr b="1">
+              <a:defRPr sz="1050" b="1">
                 <a:solidFill>
                   <a:srgbClr val="FFFFFF"/>
                 </a:solidFill>
-              </a:defRPr>
-            </a:pPr>
-            <a:r>
-              <a:t>2</a:t>
-            </a:r>
-          </a:p>
-        </p:txBody>
-      </p:sp>
-      <p:sp>
-        <p:nvSpPr>
-          <p:cNvPr id="7" name="TextBox 6"/>
-          <p:cNvSpPr txBox="1"/>
-          <p:nvPr/>
-        </p:nvSpPr>
-        <p:spPr>
-          <a:xfrm>
-            <a:off x="1417320" y="2258568"/>
-            <a:ext cx="5486400" cy="502920"/>
-          </a:xfrm>
-          <a:prstGeom prst="rect">
-            <a:avLst/>
-          </a:prstGeom>
-          <a:noFill/>
-        </p:spPr>
-        <p:txBody>
-          <a:bodyPr wrap="none">
-            <a:spAutoFit/>
-          </a:bodyPr>
-          <a:lstStyle/>
-          <a:p>
-            <a:pPr>
-              <a:defRPr sz="1800">
-                <a:solidFill>
-                  <a:srgbClr val="1C2126"/>
-                </a:solidFill>
-                <a:latin typeface="Aptos"/>
-              </a:defRPr>
-            </a:pPr>
-            <a:r>
-              <a:t>G?nl?k getiriler hesapland?</a:t>
-            </a:r>
-          </a:p>
-        </p:txBody>
-      </p:sp>
-      <p:sp>
-        <p:nvSpPr>
-          <p:cNvPr id="8" name="Oval 7"/>
+                <a:latin typeface="Aptos"/>
+              </a:defRPr>
+            </a:pPr>
+            <a:r>
+              <a:t>Petrol / Gaz</a:t>
+            </a:r>
+          </a:p>
+        </p:txBody>
+      </p:sp>
+      <p:sp>
+        <p:nvSpPr>
+          <p:cNvPr id="7" name="Rounded Rectangle 6"/>
           <p:cNvSpPr/>
           <p:nvPr/>
         </p:nvSpPr>
         <p:spPr>
           <a:xfrm>
-            <a:off x="822960" y="3154680"/>
-            <a:ext cx="411480" cy="411480"/>
-          </a:xfrm>
-          <a:prstGeom prst="ellipse">
+            <a:off x="6400800" y="2313432"/>
+            <a:ext cx="2240280" cy="384048"/>
+          </a:xfrm>
+          <a:prstGeom prst="roundRect">
             <a:avLst/>
           </a:prstGeom>
           <a:solidFill>
-            <a:srgbClr val="195E94"/>
+            <a:srgbClr val="418456"/>
           </a:solidFill>
           <a:ln>
             <a:noFill/>
@@ -4354,74 +4412,39 @@
           </a:fontRef>
         </p:style>
         <p:txBody>
-          <a:bodyPr rtlCol="0" anchor="ctr"/>
+          <a:bodyPr rtlCol="0" anchor="ctr" lIns="109728" rIns="109728"/>
           <a:lstStyle/>
           <a:p>
             <a:pPr algn="ctr">
-              <a:defRPr b="1">
+              <a:defRPr sz="1050" b="1">
                 <a:solidFill>
                   <a:srgbClr val="FFFFFF"/>
                 </a:solidFill>
-              </a:defRPr>
-            </a:pPr>
-            <a:r>
-              <a:t>3</a:t>
-            </a:r>
-          </a:p>
-        </p:txBody>
-      </p:sp>
-      <p:sp>
-        <p:nvSpPr>
-          <p:cNvPr id="9" name="TextBox 8"/>
-          <p:cNvSpPr txBox="1"/>
-          <p:nvPr/>
-        </p:nvSpPr>
-        <p:spPr>
-          <a:xfrm>
-            <a:off x="1417320" y="3127248"/>
-            <a:ext cx="5486400" cy="502920"/>
-          </a:xfrm>
-          <a:prstGeom prst="rect">
-            <a:avLst/>
-          </a:prstGeom>
-          <a:noFill/>
-        </p:spPr>
-        <p:txBody>
-          <a:bodyPr wrap="none">
-            <a:spAutoFit/>
-          </a:bodyPr>
-          <a:lstStyle/>
-          <a:p>
-            <a:pPr>
-              <a:defRPr sz="1800">
-                <a:solidFill>
-                  <a:srgbClr val="1C2126"/>
-                </a:solidFill>
-                <a:latin typeface="Aptos"/>
-              </a:defRPr>
-            </a:pPr>
-            <a:r>
-              <a:t>Pearson korelasyon matrisi ?retildi</a:t>
-            </a:r>
-          </a:p>
-        </p:txBody>
-      </p:sp>
-      <p:sp>
-        <p:nvSpPr>
-          <p:cNvPr id="10" name="Oval 9"/>
+                <a:latin typeface="Aptos"/>
+              </a:defRPr>
+            </a:pPr>
+            <a:r>
+              <a:t>SP500 / NASDAQ / DAX</a:t>
+            </a:r>
+          </a:p>
+        </p:txBody>
+      </p:sp>
+      <p:sp>
+        <p:nvSpPr>
+          <p:cNvPr id="8" name="Rounded Rectangle 7"/>
           <p:cNvSpPr/>
           <p:nvPr/>
         </p:nvSpPr>
         <p:spPr>
           <a:xfrm>
-            <a:off x="822960" y="4023359"/>
-            <a:ext cx="411480" cy="411480"/>
-          </a:xfrm>
-          <a:prstGeom prst="ellipse">
+            <a:off x="8915400" y="2313432"/>
+            <a:ext cx="2240280" cy="384048"/>
+          </a:xfrm>
+          <a:prstGeom prst="roundRect">
             <a:avLst/>
           </a:prstGeom>
           <a:solidFill>
-            <a:srgbClr val="195E94"/>
+            <a:srgbClr val="B94242"/>
           </a:solidFill>
           <a:ln>
             <a:noFill/>
@@ -4442,74 +4465,39 @@
           </a:fontRef>
         </p:style>
         <p:txBody>
-          <a:bodyPr rtlCol="0" anchor="ctr"/>
+          <a:bodyPr rtlCol="0" anchor="ctr" lIns="109728" rIns="109728"/>
           <a:lstStyle/>
           <a:p>
             <a:pPr algn="ctr">
-              <a:defRPr b="1">
+              <a:defRPr sz="1050" b="1">
                 <a:solidFill>
                   <a:srgbClr val="FFFFFF"/>
                 </a:solidFill>
-              </a:defRPr>
-            </a:pPr>
-            <a:r>
-              <a:t>4</a:t>
-            </a:r>
-          </a:p>
-        </p:txBody>
-      </p:sp>
-      <p:sp>
-        <p:nvSpPr>
-          <p:cNvPr id="11" name="TextBox 10"/>
-          <p:cNvSpPr txBox="1"/>
-          <p:nvPr/>
-        </p:nvSpPr>
-        <p:spPr>
-          <a:xfrm>
-            <a:off x="1417320" y="3995927"/>
-            <a:ext cx="5486400" cy="502920"/>
-          </a:xfrm>
-          <a:prstGeom prst="rect">
-            <a:avLst/>
-          </a:prstGeom>
-          <a:noFill/>
-        </p:spPr>
-        <p:txBody>
-          <a:bodyPr wrap="none">
-            <a:spAutoFit/>
-          </a:bodyPr>
-          <a:lstStyle/>
-          <a:p>
-            <a:pPr>
-              <a:defRPr sz="1800">
-                <a:solidFill>
-                  <a:srgbClr val="1C2126"/>
-                </a:solidFill>
-                <a:latin typeface="Aptos"/>
-              </a:defRPr>
-            </a:pPr>
-            <a:r>
-              <a:t>0.40 e?i?iyle a? kenar listesi olu?turuldu</a:t>
-            </a:r>
-          </a:p>
-        </p:txBody>
-      </p:sp>
-      <p:sp>
-        <p:nvSpPr>
-          <p:cNvPr id="12" name="Oval 11"/>
+                <a:latin typeface="Aptos"/>
+              </a:defRPr>
+            </a:pPr>
+            <a:r>
+              <a:t>BIST100</a:t>
+            </a:r>
+          </a:p>
+        </p:txBody>
+      </p:sp>
+      <p:sp>
+        <p:nvSpPr>
+          <p:cNvPr id="9" name="Rounded Rectangle 8"/>
           <p:cNvSpPr/>
           <p:nvPr/>
         </p:nvSpPr>
         <p:spPr>
           <a:xfrm>
-            <a:off x="822960" y="4892040"/>
-            <a:ext cx="411480" cy="411480"/>
-          </a:xfrm>
-          <a:prstGeom prst="ellipse">
+            <a:off x="6400800" y="3026664"/>
+            <a:ext cx="2240280" cy="384048"/>
+          </a:xfrm>
+          <a:prstGeom prst="roundRect">
             <a:avLst/>
           </a:prstGeom>
           <a:solidFill>
-            <a:srgbClr val="195E94"/>
+            <a:srgbClr val="1C5691"/>
           </a:solidFill>
           <a:ln>
             <a:noFill/>
@@ -4530,132 +4518,185 @@
           </a:fontRef>
         </p:style>
         <p:txBody>
-          <a:bodyPr rtlCol="0" anchor="ctr"/>
+          <a:bodyPr rtlCol="0" anchor="ctr" lIns="109728" rIns="109728"/>
           <a:lstStyle/>
           <a:p>
             <a:pPr algn="ctr">
-              <a:defRPr b="1">
+              <a:defRPr sz="1050" b="1">
                 <a:solidFill>
                   <a:srgbClr val="FFFFFF"/>
                 </a:solidFill>
-              </a:defRPr>
-            </a:pPr>
-            <a:r>
-              <a:t>5</a:t>
-            </a:r>
-          </a:p>
-        </p:txBody>
-      </p:sp>
-      <p:sp>
-        <p:nvSpPr>
-          <p:cNvPr id="13" name="TextBox 12"/>
-          <p:cNvSpPr txBox="1"/>
-          <p:nvPr/>
-        </p:nvSpPr>
-        <p:spPr>
-          <a:xfrm>
-            <a:off x="1417320" y="4864607"/>
-            <a:ext cx="5486400" cy="502920"/>
-          </a:xfrm>
-          <a:prstGeom prst="rect">
-            <a:avLst/>
-          </a:prstGeom>
-          <a:noFill/>
-        </p:spPr>
-        <p:txBody>
-          <a:bodyPr wrap="none">
-            <a:spAutoFit/>
-          </a:bodyPr>
-          <a:lstStyle/>
-          <a:p>
-            <a:pPr>
-              <a:defRPr sz="1800">
-                <a:solidFill>
-                  <a:srgbClr val="1C2126"/>
-                </a:solidFill>
-                <a:latin typeface="Aptos"/>
-              </a:defRPr>
-            </a:pPr>
-            <a:r>
-              <a:t>Merkezilik, topluluk ve dayan?kl?l?k analizleri yap?ld?</a:t>
-            </a:r>
-          </a:p>
-        </p:txBody>
-      </p:sp>
-      <p:sp>
-        <p:nvSpPr>
-          <p:cNvPr id="14" name="TextBox 13"/>
-          <p:cNvSpPr txBox="1"/>
-          <p:nvPr/>
-        </p:nvSpPr>
-        <p:spPr>
-          <a:xfrm>
-            <a:off x="7315200" y="1463040"/>
-            <a:ext cx="4023360" cy="2103120"/>
-          </a:xfrm>
-          <a:prstGeom prst="rect">
-            <a:avLst/>
-          </a:prstGeom>
-          <a:noFill/>
-        </p:spPr>
-        <p:txBody>
-          <a:bodyPr wrap="square">
-            <a:normAutofit/>
-          </a:bodyPr>
-          <a:lstStyle/>
-          <a:p>
-            <a:pPr>
-              <a:spcAft>
-                <a:spcPts val="900"/>
-              </a:spcAft>
-              <a:defRPr sz="1600">
-                <a:solidFill>
-                  <a:srgbClr val="1C2126"/>
-                </a:solidFill>
-                <a:latin typeface="Aptos"/>
-              </a:defRPr>
-            </a:pPr>
-            <a:r>
-              <a:t>? NetworkX ile graph modeli kuruldu.</a:t>
-            </a:r>
-          </a:p>
-          <a:p>
-            <a:pPr>
-              <a:spcAft>
-                <a:spcPts val="900"/>
-              </a:spcAft>
-              <a:defRPr sz="1600">
-                <a:solidFill>
-                  <a:srgbClr val="1C2126"/>
-                </a:solidFill>
-                <a:latin typeface="Aptos"/>
-              </a:defRPr>
-            </a:pPr>
-            <a:r>
-              <a:t>? Louvain y?ntemi ile do?al topluluklar belirlendi.</a:t>
-            </a:r>
-          </a:p>
-          <a:p>
-            <a:pPr>
-              <a:spcAft>
-                <a:spcPts val="900"/>
-              </a:spcAft>
-              <a:defRPr sz="1600">
-                <a:solidFill>
-                  <a:srgbClr val="1C2126"/>
-                </a:solidFill>
-                <a:latin typeface="Aptos"/>
-              </a:defRPr>
-            </a:pPr>
-            <a:r>
-              <a:t>? ?zole d???mler tam a? ?l??tlerinde ayr?ca dikkate al?nd?.</a:t>
+                <a:latin typeface="Aptos"/>
+              </a:defRPr>
+            </a:pPr>
+            <a:r>
+              <a:t>USD_TRY / EUR_TRY</a:t>
+            </a:r>
+          </a:p>
+        </p:txBody>
+      </p:sp>
+      <p:sp>
+        <p:nvSpPr>
+          <p:cNvPr id="10" name="Rounded Rectangle 9"/>
+          <p:cNvSpPr/>
+          <p:nvPr/>
+        </p:nvSpPr>
+        <p:spPr>
+          <a:xfrm>
+            <a:off x="8915400" y="3026664"/>
+            <a:ext cx="2240280" cy="384048"/>
+          </a:xfrm>
+          <a:prstGeom prst="roundRect">
+            <a:avLst/>
+          </a:prstGeom>
+          <a:solidFill>
+            <a:srgbClr val="007E80"/>
+          </a:solidFill>
+          <a:ln>
+            <a:noFill/>
+          </a:ln>
+        </p:spPr>
+        <p:style>
+          <a:lnRef idx="1">
+            <a:schemeClr val="accent1"/>
+          </a:lnRef>
+          <a:fillRef idx="3">
+            <a:schemeClr val="accent1"/>
+          </a:fillRef>
+          <a:effectRef idx="2">
+            <a:schemeClr val="accent1"/>
+          </a:effectRef>
+          <a:fontRef idx="minor">
+            <a:schemeClr val="lt1"/>
+          </a:fontRef>
+        </p:style>
+        <p:txBody>
+          <a:bodyPr rtlCol="0" anchor="ctr" lIns="109728" rIns="109728"/>
+          <a:lstStyle/>
+          <a:p>
+            <a:pPr algn="ctr">
+              <a:defRPr sz="1050" b="1">
+                <a:solidFill>
+                  <a:srgbClr val="FFFFFF"/>
+                </a:solidFill>
+                <a:latin typeface="Aptos"/>
+              </a:defRPr>
+            </a:pPr>
+            <a:r>
+              <a:t>Bitcoin</a:t>
+            </a:r>
+          </a:p>
+        </p:txBody>
+      </p:sp>
+      <p:sp>
+        <p:nvSpPr>
+          <p:cNvPr id="11" name="Rounded Rectangle 10"/>
+          <p:cNvSpPr/>
+          <p:nvPr/>
+        </p:nvSpPr>
+        <p:spPr>
+          <a:xfrm>
+            <a:off x="6400800" y="3739896"/>
+            <a:ext cx="2240280" cy="384048"/>
+          </a:xfrm>
+          <a:prstGeom prst="roundRect">
+            <a:avLst/>
+          </a:prstGeom>
+          <a:solidFill>
+            <a:srgbClr val="B94242"/>
+          </a:solidFill>
+          <a:ln>
+            <a:noFill/>
+          </a:ln>
+        </p:spPr>
+        <p:style>
+          <a:lnRef idx="1">
+            <a:schemeClr val="accent1"/>
+          </a:lnRef>
+          <a:fillRef idx="3">
+            <a:schemeClr val="accent1"/>
+          </a:fillRef>
+          <a:effectRef idx="2">
+            <a:schemeClr val="accent1"/>
+          </a:effectRef>
+          <a:fontRef idx="minor">
+            <a:schemeClr val="lt1"/>
+          </a:fontRef>
+        </p:style>
+        <p:txBody>
+          <a:bodyPr rtlCol="0" anchor="ctr" lIns="109728" rIns="109728"/>
+          <a:lstStyle/>
+          <a:p>
+            <a:pPr algn="ctr">
+              <a:defRPr sz="1050" b="1">
+                <a:solidFill>
+                  <a:srgbClr val="FFFFFF"/>
+                </a:solidFill>
+                <a:latin typeface="Aptos"/>
+              </a:defRPr>
+            </a:pPr>
+            <a:r>
+              <a:t>VIX</a:t>
+            </a:r>
+          </a:p>
+        </p:txBody>
+      </p:sp>
+      <p:sp>
+        <p:nvSpPr>
+          <p:cNvPr id="12" name="Rounded Rectangle 11"/>
+          <p:cNvSpPr/>
+          <p:nvPr/>
+        </p:nvSpPr>
+        <p:spPr>
+          <a:xfrm>
+            <a:off x="8915400" y="3739896"/>
+            <a:ext cx="2240280" cy="384048"/>
+          </a:xfrm>
+          <a:prstGeom prst="roundRect">
+            <a:avLst/>
+          </a:prstGeom>
+          <a:solidFill>
+            <a:srgbClr val="418456"/>
+          </a:solidFill>
+          <a:ln>
+            <a:noFill/>
+          </a:ln>
+        </p:spPr>
+        <p:style>
+          <a:lnRef idx="1">
+            <a:schemeClr val="accent1"/>
+          </a:lnRef>
+          <a:fillRef idx="3">
+            <a:schemeClr val="accent1"/>
+          </a:fillRef>
+          <a:effectRef idx="2">
+            <a:schemeClr val="accent1"/>
+          </a:effectRef>
+          <a:fontRef idx="minor">
+            <a:schemeClr val="lt1"/>
+          </a:fontRef>
+        </p:style>
+        <p:txBody>
+          <a:bodyPr rtlCol="0" anchor="ctr" lIns="109728" rIns="109728"/>
+          <a:lstStyle/>
+          <a:p>
+            <a:pPr algn="ctr">
+              <a:defRPr sz="1050" b="1">
+                <a:solidFill>
+                  <a:srgbClr val="FFFFFF"/>
+                </a:solidFill>
+                <a:latin typeface="Aptos"/>
+              </a:defRPr>
+            </a:pPr>
+            <a:r>
+              <a:t>Dolar Endeksi / Tahvil</a:t>
             </a:r>
           </a:p>
         </p:txBody>
       </p:sp>
       <p:pic>
         <p:nvPicPr>
-          <p:cNvPr id="15" name="Picture 14" descr="degree_distribution.png"/>
+          <p:cNvPr id="13" name="Picture 12" descr="correlation_heatmap.png"/>
           <p:cNvPicPr>
             <a:picLocks noChangeAspect="1"/>
           </p:cNvPicPr>
@@ -4669,8 +4710,8 @@
         </p:blipFill>
         <p:spPr>
           <a:xfrm>
-            <a:off x="7269480" y="3794760"/>
-            <a:ext cx="4114800" cy="2057400"/>
+            <a:off x="6263640" y="4663440"/>
+            <a:ext cx="4937760" cy="1417320"/>
           </a:xfrm>
           <a:prstGeom prst="rect">
             <a:avLst/>
@@ -4679,14 +4720,14 @@
       </p:pic>
       <p:sp>
         <p:nvSpPr>
-          <p:cNvPr id="16" name="TextBox 15"/>
+          <p:cNvPr id="14" name="TextBox 13"/>
           <p:cNvSpPr txBox="1"/>
           <p:nvPr/>
         </p:nvSpPr>
         <p:spPr>
           <a:xfrm>
-            <a:off x="10881360" y="6446520"/>
-            <a:ext cx="822960" cy="228600"/>
+            <a:off x="11155680" y="6446520"/>
+            <a:ext cx="548640" cy="228600"/>
           </a:xfrm>
           <a:prstGeom prst="rect">
             <a:avLst/>
@@ -4694,16 +4735,17 @@
           <a:noFill/>
         </p:spPr>
         <p:txBody>
-          <a:bodyPr wrap="none">
-            <a:spAutoFit/>
+          <a:bodyPr wrap="square">
+            <a:normAutofit/>
           </a:bodyPr>
           <a:lstStyle/>
           <a:p>
             <a:pPr algn="r">
-              <a:defRPr sz="900">
-                <a:solidFill>
-                  <a:srgbClr val="5C6570"/>
-                </a:solidFill>
+              <a:defRPr sz="900" b="0">
+                <a:solidFill>
+                  <a:srgbClr val="5E6670"/>
+                </a:solidFill>
+                <a:latin typeface="Aptos"/>
               </a:defRPr>
             </a:pPr>
             <a:r>
@@ -4746,8 +4788,8 @@
         </p:nvSpPr>
         <p:spPr>
           <a:xfrm>
-            <a:off x="502920" y="320040"/>
-            <a:ext cx="11155680" cy="594360"/>
+            <a:off x="502920" y="292608"/>
+            <a:ext cx="11155680" cy="502920"/>
           </a:xfrm>
           <a:prstGeom prst="rect">
             <a:avLst/>
@@ -4755,21 +4797,21 @@
           <a:noFill/>
         </p:spPr>
         <p:txBody>
-          <a:bodyPr wrap="none">
-            <a:spAutoFit/>
+          <a:bodyPr wrap="square">
+            <a:normAutofit/>
           </a:bodyPr>
           <a:lstStyle/>
           <a:p>
-            <a:pPr>
-              <a:defRPr sz="2700" b="1">
-                <a:solidFill>
-                  <a:srgbClr val="1C2126"/>
-                </a:solidFill>
-                <a:latin typeface="Aptos Display"/>
-              </a:defRPr>
-            </a:pPr>
-            <a:r>
-              <a:t>A? G?rselle?tirmesi ve Ana Yap?</a:t>
+            <a:pPr algn="l">
+              <a:defRPr sz="2400" b="1">
+                <a:solidFill>
+                  <a:srgbClr val="1F2328"/>
+                </a:solidFill>
+                <a:latin typeface="Aptos"/>
+              </a:defRPr>
+            </a:pPr>
+            <a:r>
+              <a:t>Analiz Akışı</a:t>
             </a:r>
           </a:p>
         </p:txBody>
@@ -4782,14 +4824,14 @@
         </p:nvSpPr>
         <p:spPr>
           <a:xfrm>
-            <a:off x="530352" y="1170432"/>
-            <a:ext cx="11109960" cy="18288"/>
+            <a:off x="530352" y="1143000"/>
+            <a:ext cx="11109960" cy="13716"/>
           </a:xfrm>
           <a:prstGeom prst="rect">
             <a:avLst/>
           </a:prstGeom>
           <a:solidFill>
-            <a:srgbClr val="D6DCE2"/>
+            <a:srgbClr val="DCE1E6"/>
           </a:solidFill>
           <a:ln>
             <a:noFill/>
@@ -4817,122 +4859,25 @@
           </a:p>
         </p:txBody>
       </p:sp>
-      <p:pic>
-        <p:nvPicPr>
-          <p:cNvPr id="4" name="Picture 3" descr="network_graph_enhanced.png"/>
-          <p:cNvPicPr>
-            <a:picLocks noChangeAspect="1"/>
-          </p:cNvPicPr>
-          <p:nvPr/>
-        </p:nvPicPr>
-        <p:blipFill>
-          <a:blip r:embed="rId2"/>
-          <a:stretch>
-            <a:fillRect/>
-          </a:stretch>
-        </p:blipFill>
-        <p:spPr>
-          <a:xfrm>
-            <a:off x="502920" y="1417320"/>
-            <a:ext cx="6400800" cy="4800600"/>
-          </a:xfrm>
-          <a:prstGeom prst="rect">
-            <a:avLst/>
-          </a:prstGeom>
-        </p:spPr>
-      </p:pic>
-      <p:sp>
-        <p:nvSpPr>
-          <p:cNvPr id="5" name="TextBox 4"/>
-          <p:cNvSpPr txBox="1"/>
-          <p:nvPr/>
-        </p:nvSpPr>
-        <p:spPr>
-          <a:xfrm>
-            <a:off x="7315200" y="1600200"/>
-            <a:ext cx="4114800" cy="3063240"/>
-          </a:xfrm>
-          <a:prstGeom prst="rect">
-            <a:avLst/>
-          </a:prstGeom>
-          <a:noFill/>
-        </p:spPr>
-        <p:txBody>
-          <a:bodyPr wrap="square">
-            <a:normAutofit/>
-          </a:bodyPr>
-          <a:lstStyle/>
-          <a:p>
-            <a:pPr>
-              <a:spcAft>
-                <a:spcPts val="900"/>
-              </a:spcAft>
-              <a:defRPr sz="1600">
-                <a:solidFill>
-                  <a:srgbClr val="1C2126"/>
-                </a:solidFill>
-                <a:latin typeface="Aptos"/>
-              </a:defRPr>
-            </a:pPr>
-            <a:r>
-              <a:t>? K?resel hisse senedi endeksleri ve VIX a??n en g?r?n?r ?ekirde?ini olu?turur.</a:t>
-            </a:r>
-          </a:p>
-          <a:p>
-            <a:pPr>
-              <a:spcAft>
-                <a:spcPts val="900"/>
-              </a:spcAft>
-              <a:defRPr sz="1600">
-                <a:solidFill>
-                  <a:srgbClr val="1C2126"/>
-                </a:solidFill>
-                <a:latin typeface="Aptos"/>
-              </a:defRPr>
-            </a:pPr>
-            <a:r>
-              <a:t>? Pozitif ili?kiler birlikte hareketi, negatif ili?kiler ters y?nl? hareketi g?sterir.</a:t>
-            </a:r>
-          </a:p>
-          <a:p>
-            <a:pPr>
-              <a:spcAft>
-                <a:spcPts val="900"/>
-              </a:spcAft>
-              <a:defRPr sz="1600">
-                <a:solidFill>
-                  <a:srgbClr val="1C2126"/>
-                </a:solidFill>
-                <a:latin typeface="Aptos"/>
-              </a:defRPr>
-            </a:pPr>
-            <a:r>
-              <a:t>? Alt?n-g?m??-dolar endeksi, petrol varl?klar? ve TL kurlar? ayr? k???k segmentler olu?turur.</a:t>
-            </a:r>
-          </a:p>
-        </p:txBody>
-      </p:sp>
-      <p:sp>
-        <p:nvSpPr>
-          <p:cNvPr id="6" name="Rounded Rectangle 5"/>
+      <p:sp>
+        <p:nvSpPr>
+          <p:cNvPr id="4" name="Rounded Rectangle 3"/>
           <p:cNvSpPr/>
           <p:nvPr/>
         </p:nvSpPr>
         <p:spPr>
           <a:xfrm>
-            <a:off x="7360920" y="4892040"/>
-            <a:ext cx="1828800" cy="777240"/>
+            <a:off x="685800" y="1828800"/>
+            <a:ext cx="502920" cy="502920"/>
           </a:xfrm>
           <a:prstGeom prst="roundRect">
             <a:avLst/>
           </a:prstGeom>
           <a:solidFill>
-            <a:srgbClr val="FFFFFF"/>
+            <a:srgbClr val="1C5691"/>
           </a:solidFill>
-          <a:ln w="12700">
-            <a:solidFill>
-              <a:srgbClr val="D6DCE2"/>
-            </a:solidFill>
+          <a:ln>
+            <a:noFill/>
           </a:ln>
         </p:spPr>
         <p:style>
@@ -4950,52 +4895,111 @@
           </a:fontRef>
         </p:style>
         <p:txBody>
-          <a:bodyPr rtlCol="0" anchor="ctr" lIns="164592" rIns="109728" tIns="73152"/>
+          <a:bodyPr rtlCol="0" anchor="ctr" lIns="109728" rIns="109728"/>
           <a:lstStyle/>
           <a:p>
             <a:pPr algn="ctr">
-              <a:defRPr sz="2300" b="1">
-                <a:solidFill>
-                  <a:srgbClr val="195E94"/>
-                </a:solidFill>
-                <a:latin typeface="Aptos Display"/>
-              </a:defRPr>
-            </a:pPr>
-            <a:r>
-              <a:t>0.1242</a:t>
-            </a:r>
-          </a:p>
-          <a:p>
-            <a:pPr>
-              <a:defRPr sz="1050">
-                <a:solidFill>
-                  <a:srgbClr val="5C6570"/>
-                </a:solidFill>
-                <a:latin typeface="Aptos"/>
-              </a:defRPr>
-            </a:pPr>
-            <a:r>
-              <a:t>Tam a? yo?unlu?u</a:t>
-            </a:r>
-          </a:p>
-        </p:txBody>
-      </p:sp>
-      <p:sp>
-        <p:nvSpPr>
-          <p:cNvPr id="7" name="Rectangle 6"/>
+              <a:defRPr sz="1600" b="1">
+                <a:solidFill>
+                  <a:srgbClr val="FFFFFF"/>
+                </a:solidFill>
+                <a:latin typeface="Aptos"/>
+              </a:defRPr>
+            </a:pPr>
+            <a:r>
+              <a:t>1</a:t>
+            </a:r>
+          </a:p>
+        </p:txBody>
+      </p:sp>
+      <p:sp>
+        <p:nvSpPr>
+          <p:cNvPr id="5" name="TextBox 4"/>
+          <p:cNvSpPr txBox="1"/>
+          <p:nvPr/>
+        </p:nvSpPr>
+        <p:spPr>
+          <a:xfrm>
+            <a:off x="685800" y="2514600"/>
+            <a:ext cx="1645920" cy="320040"/>
+          </a:xfrm>
+          <a:prstGeom prst="rect">
+            <a:avLst/>
+          </a:prstGeom>
+          <a:noFill/>
+        </p:spPr>
+        <p:txBody>
+          <a:bodyPr wrap="square">
+            <a:normAutofit/>
+          </a:bodyPr>
+          <a:lstStyle/>
+          <a:p>
+            <a:pPr algn="ctr">
+              <a:defRPr sz="1500" b="1">
+                <a:solidFill>
+                  <a:srgbClr val="1F2328"/>
+                </a:solidFill>
+                <a:latin typeface="Aptos"/>
+              </a:defRPr>
+            </a:pPr>
+            <a:r>
+              <a:t>Fiyat verisi</a:t>
+            </a:r>
+          </a:p>
+        </p:txBody>
+      </p:sp>
+      <p:sp>
+        <p:nvSpPr>
+          <p:cNvPr id="6" name="TextBox 5"/>
+          <p:cNvSpPr txBox="1"/>
+          <p:nvPr/>
+        </p:nvSpPr>
+        <p:spPr>
+          <a:xfrm>
+            <a:off x="457200" y="2971800"/>
+            <a:ext cx="1874519" cy="777240"/>
+          </a:xfrm>
+          <a:prstGeom prst="rect">
+            <a:avLst/>
+          </a:prstGeom>
+          <a:noFill/>
+        </p:spPr>
+        <p:txBody>
+          <a:bodyPr wrap="square">
+            <a:normAutofit/>
+          </a:bodyPr>
+          <a:lstStyle/>
+          <a:p>
+            <a:pPr algn="ctr">
+              <a:defRPr sz="1150" b="0">
+                <a:solidFill>
+                  <a:srgbClr val="5E6670"/>
+                </a:solidFill>
+                <a:latin typeface="Aptos"/>
+              </a:defRPr>
+            </a:pPr>
+            <a:r>
+              <a:t>Yahoo Finance üzerinden fiyat serileri</a:t>
+            </a:r>
+          </a:p>
+        </p:txBody>
+      </p:sp>
+      <p:sp>
+        <p:nvSpPr>
+          <p:cNvPr id="7" name="Right Arrow 6"/>
           <p:cNvSpPr/>
           <p:nvPr/>
         </p:nvSpPr>
         <p:spPr>
           <a:xfrm>
-            <a:off x="7360920" y="4892040"/>
-            <a:ext cx="73152" cy="777240"/>
-          </a:xfrm>
-          <a:prstGeom prst="rect">
+            <a:off x="1344168" y="1947672"/>
+            <a:ext cx="1097280" cy="256032"/>
+          </a:xfrm>
+          <a:prstGeom prst="rightArrow">
             <a:avLst/>
           </a:prstGeom>
           <a:solidFill>
-            <a:srgbClr val="195E94"/>
+            <a:srgbClr val="DCE1E6"/>
           </a:solidFill>
           <a:ln>
             <a:noFill/>
@@ -5031,19 +5035,17 @@
         </p:nvSpPr>
         <p:spPr>
           <a:xfrm>
-            <a:off x="9464040" y="4892040"/>
-            <a:ext cx="1828800" cy="777240"/>
+            <a:off x="2926080" y="1828800"/>
+            <a:ext cx="502920" cy="502920"/>
           </a:xfrm>
           <a:prstGeom prst="roundRect">
             <a:avLst/>
           </a:prstGeom>
           <a:solidFill>
-            <a:srgbClr val="FFFFFF"/>
+            <a:srgbClr val="007E80"/>
           </a:solidFill>
-          <a:ln w="12700">
-            <a:solidFill>
-              <a:srgbClr val="D6DCE2"/>
-            </a:solidFill>
+          <a:ln>
+            <a:noFill/>
           </a:ln>
         </p:spPr>
         <p:style>
@@ -5061,52 +5063,111 @@
           </a:fontRef>
         </p:style>
         <p:txBody>
-          <a:bodyPr rtlCol="0" anchor="ctr" lIns="164592" rIns="109728" tIns="73152"/>
+          <a:bodyPr rtlCol="0" anchor="ctr" lIns="109728" rIns="109728"/>
           <a:lstStyle/>
           <a:p>
             <a:pPr algn="ctr">
-              <a:defRPr sz="2300" b="1">
-                <a:solidFill>
-                  <a:srgbClr val="008579"/>
-                </a:solidFill>
-                <a:latin typeface="Aptos Display"/>
-              </a:defRPr>
-            </a:pPr>
-            <a:r>
-              <a:t>0.2436</a:t>
-            </a:r>
-          </a:p>
-          <a:p>
-            <a:pPr>
-              <a:defRPr sz="1050">
-                <a:solidFill>
-                  <a:srgbClr val="5C6570"/>
-                </a:solidFill>
-                <a:latin typeface="Aptos"/>
-              </a:defRPr>
-            </a:pPr>
-            <a:r>
-              <a:t>Aktif alt a? yo?unlu?u</a:t>
-            </a:r>
-          </a:p>
-        </p:txBody>
-      </p:sp>
-      <p:sp>
-        <p:nvSpPr>
-          <p:cNvPr id="9" name="Rectangle 8"/>
+              <a:defRPr sz="1600" b="1">
+                <a:solidFill>
+                  <a:srgbClr val="FFFFFF"/>
+                </a:solidFill>
+                <a:latin typeface="Aptos"/>
+              </a:defRPr>
+            </a:pPr>
+            <a:r>
+              <a:t>2</a:t>
+            </a:r>
+          </a:p>
+        </p:txBody>
+      </p:sp>
+      <p:sp>
+        <p:nvSpPr>
+          <p:cNvPr id="9" name="TextBox 8"/>
+          <p:cNvSpPr txBox="1"/>
+          <p:nvPr/>
+        </p:nvSpPr>
+        <p:spPr>
+          <a:xfrm>
+            <a:off x="2926080" y="2514600"/>
+            <a:ext cx="1645920" cy="320040"/>
+          </a:xfrm>
+          <a:prstGeom prst="rect">
+            <a:avLst/>
+          </a:prstGeom>
+          <a:noFill/>
+        </p:spPr>
+        <p:txBody>
+          <a:bodyPr wrap="square">
+            <a:normAutofit/>
+          </a:bodyPr>
+          <a:lstStyle/>
+          <a:p>
+            <a:pPr algn="ctr">
+              <a:defRPr sz="1500" b="1">
+                <a:solidFill>
+                  <a:srgbClr val="1F2328"/>
+                </a:solidFill>
+                <a:latin typeface="Aptos"/>
+              </a:defRPr>
+            </a:pPr>
+            <a:r>
+              <a:t>Getiri</a:t>
+            </a:r>
+          </a:p>
+        </p:txBody>
+      </p:sp>
+      <p:sp>
+        <p:nvSpPr>
+          <p:cNvPr id="10" name="TextBox 9"/>
+          <p:cNvSpPr txBox="1"/>
+          <p:nvPr/>
+        </p:nvSpPr>
+        <p:spPr>
+          <a:xfrm>
+            <a:off x="2697480" y="2971800"/>
+            <a:ext cx="1874519" cy="777240"/>
+          </a:xfrm>
+          <a:prstGeom prst="rect">
+            <a:avLst/>
+          </a:prstGeom>
+          <a:noFill/>
+        </p:spPr>
+        <p:txBody>
+          <a:bodyPr wrap="square">
+            <a:normAutofit/>
+          </a:bodyPr>
+          <a:lstStyle/>
+          <a:p>
+            <a:pPr algn="ctr">
+              <a:defRPr sz="1150" b="0">
+                <a:solidFill>
+                  <a:srgbClr val="5E6670"/>
+                </a:solidFill>
+                <a:latin typeface="Aptos"/>
+              </a:defRPr>
+            </a:pPr>
+            <a:r>
+              <a:t>Günlük yüzde değişim</a:t>
+            </a:r>
+          </a:p>
+        </p:txBody>
+      </p:sp>
+      <p:sp>
+        <p:nvSpPr>
+          <p:cNvPr id="11" name="Right Arrow 10"/>
           <p:cNvSpPr/>
           <p:nvPr/>
         </p:nvSpPr>
         <p:spPr>
           <a:xfrm>
-            <a:off x="9464040" y="4892040"/>
-            <a:ext cx="73152" cy="777240"/>
-          </a:xfrm>
-          <a:prstGeom prst="rect">
+            <a:off x="3584448" y="1947672"/>
+            <a:ext cx="1097280" cy="256032"/>
+          </a:xfrm>
+          <a:prstGeom prst="rightArrow">
             <a:avLst/>
           </a:prstGeom>
           <a:solidFill>
-            <a:srgbClr val="008579"/>
+            <a:srgbClr val="DCE1E6"/>
           </a:solidFill>
           <a:ln>
             <a:noFill/>
@@ -5136,14 +5197,67 @@
       </p:sp>
       <p:sp>
         <p:nvSpPr>
-          <p:cNvPr id="10" name="TextBox 9"/>
+          <p:cNvPr id="12" name="Rounded Rectangle 11"/>
+          <p:cNvSpPr/>
+          <p:nvPr/>
+        </p:nvSpPr>
+        <p:spPr>
+          <a:xfrm>
+            <a:off x="5166360" y="1828800"/>
+            <a:ext cx="502920" cy="502920"/>
+          </a:xfrm>
+          <a:prstGeom prst="roundRect">
+            <a:avLst/>
+          </a:prstGeom>
+          <a:solidFill>
+            <a:srgbClr val="418456"/>
+          </a:solidFill>
+          <a:ln>
+            <a:noFill/>
+          </a:ln>
+        </p:spPr>
+        <p:style>
+          <a:lnRef idx="1">
+            <a:schemeClr val="accent1"/>
+          </a:lnRef>
+          <a:fillRef idx="3">
+            <a:schemeClr val="accent1"/>
+          </a:fillRef>
+          <a:effectRef idx="2">
+            <a:schemeClr val="accent1"/>
+          </a:effectRef>
+          <a:fontRef idx="minor">
+            <a:schemeClr val="lt1"/>
+          </a:fontRef>
+        </p:style>
+        <p:txBody>
+          <a:bodyPr rtlCol="0" anchor="ctr" lIns="109728" rIns="109728"/>
+          <a:lstStyle/>
+          <a:p>
+            <a:pPr algn="ctr">
+              <a:defRPr sz="1600" b="1">
+                <a:solidFill>
+                  <a:srgbClr val="FFFFFF"/>
+                </a:solidFill>
+                <a:latin typeface="Aptos"/>
+              </a:defRPr>
+            </a:pPr>
+            <a:r>
+              <a:t>3</a:t>
+            </a:r>
+          </a:p>
+        </p:txBody>
+      </p:sp>
+      <p:sp>
+        <p:nvSpPr>
+          <p:cNvPr id="13" name="TextBox 12"/>
           <p:cNvSpPr txBox="1"/>
           <p:nvPr/>
         </p:nvSpPr>
         <p:spPr>
           <a:xfrm>
-            <a:off x="10881360" y="6446520"/>
-            <a:ext cx="822960" cy="228600"/>
+            <a:off x="5166360" y="2514600"/>
+            <a:ext cx="1645920" cy="320040"/>
           </a:xfrm>
           <a:prstGeom prst="rect">
             <a:avLst/>
@@ -5151,16 +5265,461 @@
           <a:noFill/>
         </p:spPr>
         <p:txBody>
-          <a:bodyPr wrap="none">
-            <a:spAutoFit/>
+          <a:bodyPr wrap="square">
+            <a:normAutofit/>
           </a:bodyPr>
           <a:lstStyle/>
           <a:p>
+            <a:pPr algn="ctr">
+              <a:defRPr sz="1500" b="1">
+                <a:solidFill>
+                  <a:srgbClr val="1F2328"/>
+                </a:solidFill>
+                <a:latin typeface="Aptos"/>
+              </a:defRPr>
+            </a:pPr>
+            <a:r>
+              <a:t>Korelasyon</a:t>
+            </a:r>
+          </a:p>
+        </p:txBody>
+      </p:sp>
+      <p:sp>
+        <p:nvSpPr>
+          <p:cNvPr id="14" name="TextBox 13"/>
+          <p:cNvSpPr txBox="1"/>
+          <p:nvPr/>
+        </p:nvSpPr>
+        <p:spPr>
+          <a:xfrm>
+            <a:off x="4937760" y="2971800"/>
+            <a:ext cx="1874519" cy="777240"/>
+          </a:xfrm>
+          <a:prstGeom prst="rect">
+            <a:avLst/>
+          </a:prstGeom>
+          <a:noFill/>
+        </p:spPr>
+        <p:txBody>
+          <a:bodyPr wrap="square">
+            <a:normAutofit/>
+          </a:bodyPr>
+          <a:lstStyle/>
+          <a:p>
+            <a:pPr algn="ctr">
+              <a:defRPr sz="1150" b="0">
+                <a:solidFill>
+                  <a:srgbClr val="5E6670"/>
+                </a:solidFill>
+                <a:latin typeface="Aptos"/>
+              </a:defRPr>
+            </a:pPr>
+            <a:r>
+              <a:t>Pearson korelasyon matrisi</a:t>
+            </a:r>
+          </a:p>
+        </p:txBody>
+      </p:sp>
+      <p:sp>
+        <p:nvSpPr>
+          <p:cNvPr id="15" name="Right Arrow 14"/>
+          <p:cNvSpPr/>
+          <p:nvPr/>
+        </p:nvSpPr>
+        <p:spPr>
+          <a:xfrm>
+            <a:off x="5824728" y="1947672"/>
+            <a:ext cx="1097280" cy="256032"/>
+          </a:xfrm>
+          <a:prstGeom prst="rightArrow">
+            <a:avLst/>
+          </a:prstGeom>
+          <a:solidFill>
+            <a:srgbClr val="DCE1E6"/>
+          </a:solidFill>
+          <a:ln>
+            <a:noFill/>
+          </a:ln>
+        </p:spPr>
+        <p:style>
+          <a:lnRef idx="1">
+            <a:schemeClr val="accent1"/>
+          </a:lnRef>
+          <a:fillRef idx="3">
+            <a:schemeClr val="accent1"/>
+          </a:fillRef>
+          <a:effectRef idx="2">
+            <a:schemeClr val="accent1"/>
+          </a:effectRef>
+          <a:fontRef idx="minor">
+            <a:schemeClr val="lt1"/>
+          </a:fontRef>
+        </p:style>
+        <p:txBody>
+          <a:bodyPr rtlCol="0" anchor="ctr"/>
+          <a:lstStyle/>
+          <a:p>
+            <a:pPr algn="ctr"/>
+          </a:p>
+        </p:txBody>
+      </p:sp>
+      <p:sp>
+        <p:nvSpPr>
+          <p:cNvPr id="16" name="Rounded Rectangle 15"/>
+          <p:cNvSpPr/>
+          <p:nvPr/>
+        </p:nvSpPr>
+        <p:spPr>
+          <a:xfrm>
+            <a:off x="7406640" y="1828800"/>
+            <a:ext cx="502920" cy="502920"/>
+          </a:xfrm>
+          <a:prstGeom prst="roundRect">
+            <a:avLst/>
+          </a:prstGeom>
+          <a:solidFill>
+            <a:srgbClr val="B94242"/>
+          </a:solidFill>
+          <a:ln>
+            <a:noFill/>
+          </a:ln>
+        </p:spPr>
+        <p:style>
+          <a:lnRef idx="1">
+            <a:schemeClr val="accent1"/>
+          </a:lnRef>
+          <a:fillRef idx="3">
+            <a:schemeClr val="accent1"/>
+          </a:fillRef>
+          <a:effectRef idx="2">
+            <a:schemeClr val="accent1"/>
+          </a:effectRef>
+          <a:fontRef idx="minor">
+            <a:schemeClr val="lt1"/>
+          </a:fontRef>
+        </p:style>
+        <p:txBody>
+          <a:bodyPr rtlCol="0" anchor="ctr" lIns="109728" rIns="109728"/>
+          <a:lstStyle/>
+          <a:p>
+            <a:pPr algn="ctr">
+              <a:defRPr sz="1600" b="1">
+                <a:solidFill>
+                  <a:srgbClr val="FFFFFF"/>
+                </a:solidFill>
+                <a:latin typeface="Aptos"/>
+              </a:defRPr>
+            </a:pPr>
+            <a:r>
+              <a:t>4</a:t>
+            </a:r>
+          </a:p>
+        </p:txBody>
+      </p:sp>
+      <p:sp>
+        <p:nvSpPr>
+          <p:cNvPr id="17" name="TextBox 16"/>
+          <p:cNvSpPr txBox="1"/>
+          <p:nvPr/>
+        </p:nvSpPr>
+        <p:spPr>
+          <a:xfrm>
+            <a:off x="7406640" y="2514600"/>
+            <a:ext cx="1645920" cy="320040"/>
+          </a:xfrm>
+          <a:prstGeom prst="rect">
+            <a:avLst/>
+          </a:prstGeom>
+          <a:noFill/>
+        </p:spPr>
+        <p:txBody>
+          <a:bodyPr wrap="square">
+            <a:normAutofit/>
+          </a:bodyPr>
+          <a:lstStyle/>
+          <a:p>
+            <a:pPr algn="ctr">
+              <a:defRPr sz="1500" b="1">
+                <a:solidFill>
+                  <a:srgbClr val="1F2328"/>
+                </a:solidFill>
+                <a:latin typeface="Aptos"/>
+              </a:defRPr>
+            </a:pPr>
+            <a:r>
+              <a:t>Ağ</a:t>
+            </a:r>
+          </a:p>
+        </p:txBody>
+      </p:sp>
+      <p:sp>
+        <p:nvSpPr>
+          <p:cNvPr id="18" name="TextBox 17"/>
+          <p:cNvSpPr txBox="1"/>
+          <p:nvPr/>
+        </p:nvSpPr>
+        <p:spPr>
+          <a:xfrm>
+            <a:off x="7178040" y="2971800"/>
+            <a:ext cx="1874519" cy="777240"/>
+          </a:xfrm>
+          <a:prstGeom prst="rect">
+            <a:avLst/>
+          </a:prstGeom>
+          <a:noFill/>
+        </p:spPr>
+        <p:txBody>
+          <a:bodyPr wrap="square">
+            <a:normAutofit/>
+          </a:bodyPr>
+          <a:lstStyle/>
+          <a:p>
+            <a:pPr algn="ctr">
+              <a:defRPr sz="1150" b="0">
+                <a:solidFill>
+                  <a:srgbClr val="5E6670"/>
+                </a:solidFill>
+                <a:latin typeface="Aptos"/>
+              </a:defRPr>
+            </a:pPr>
+            <a:r>
+              <a:t>Eşik değeriyle kenar listesi</a:t>
+            </a:r>
+          </a:p>
+        </p:txBody>
+      </p:sp>
+      <p:sp>
+        <p:nvSpPr>
+          <p:cNvPr id="19" name="Right Arrow 18"/>
+          <p:cNvSpPr/>
+          <p:nvPr/>
+        </p:nvSpPr>
+        <p:spPr>
+          <a:xfrm>
+            <a:off x="8065008" y="1947672"/>
+            <a:ext cx="1097280" cy="256032"/>
+          </a:xfrm>
+          <a:prstGeom prst="rightArrow">
+            <a:avLst/>
+          </a:prstGeom>
+          <a:solidFill>
+            <a:srgbClr val="DCE1E6"/>
+          </a:solidFill>
+          <a:ln>
+            <a:noFill/>
+          </a:ln>
+        </p:spPr>
+        <p:style>
+          <a:lnRef idx="1">
+            <a:schemeClr val="accent1"/>
+          </a:lnRef>
+          <a:fillRef idx="3">
+            <a:schemeClr val="accent1"/>
+          </a:fillRef>
+          <a:effectRef idx="2">
+            <a:schemeClr val="accent1"/>
+          </a:effectRef>
+          <a:fontRef idx="minor">
+            <a:schemeClr val="lt1"/>
+          </a:fontRef>
+        </p:style>
+        <p:txBody>
+          <a:bodyPr rtlCol="0" anchor="ctr"/>
+          <a:lstStyle/>
+          <a:p>
+            <a:pPr algn="ctr"/>
+          </a:p>
+        </p:txBody>
+      </p:sp>
+      <p:sp>
+        <p:nvSpPr>
+          <p:cNvPr id="20" name="Rounded Rectangle 19"/>
+          <p:cNvSpPr/>
+          <p:nvPr/>
+        </p:nvSpPr>
+        <p:spPr>
+          <a:xfrm>
+            <a:off x="9646920" y="1828800"/>
+            <a:ext cx="502920" cy="502920"/>
+          </a:xfrm>
+          <a:prstGeom prst="roundRect">
+            <a:avLst/>
+          </a:prstGeom>
+          <a:solidFill>
+            <a:srgbClr val="1C5691"/>
+          </a:solidFill>
+          <a:ln>
+            <a:noFill/>
+          </a:ln>
+        </p:spPr>
+        <p:style>
+          <a:lnRef idx="1">
+            <a:schemeClr val="accent1"/>
+          </a:lnRef>
+          <a:fillRef idx="3">
+            <a:schemeClr val="accent1"/>
+          </a:fillRef>
+          <a:effectRef idx="2">
+            <a:schemeClr val="accent1"/>
+          </a:effectRef>
+          <a:fontRef idx="minor">
+            <a:schemeClr val="lt1"/>
+          </a:fontRef>
+        </p:style>
+        <p:txBody>
+          <a:bodyPr rtlCol="0" anchor="ctr" lIns="109728" rIns="109728"/>
+          <a:lstStyle/>
+          <a:p>
+            <a:pPr algn="ctr">
+              <a:defRPr sz="1600" b="1">
+                <a:solidFill>
+                  <a:srgbClr val="FFFFFF"/>
+                </a:solidFill>
+                <a:latin typeface="Aptos"/>
+              </a:defRPr>
+            </a:pPr>
+            <a:r>
+              <a:t>5</a:t>
+            </a:r>
+          </a:p>
+        </p:txBody>
+      </p:sp>
+      <p:sp>
+        <p:nvSpPr>
+          <p:cNvPr id="21" name="TextBox 20"/>
+          <p:cNvSpPr txBox="1"/>
+          <p:nvPr/>
+        </p:nvSpPr>
+        <p:spPr>
+          <a:xfrm>
+            <a:off x="9646920" y="2514600"/>
+            <a:ext cx="1645920" cy="320040"/>
+          </a:xfrm>
+          <a:prstGeom prst="rect">
+            <a:avLst/>
+          </a:prstGeom>
+          <a:noFill/>
+        </p:spPr>
+        <p:txBody>
+          <a:bodyPr wrap="square">
+            <a:normAutofit/>
+          </a:bodyPr>
+          <a:lstStyle/>
+          <a:p>
+            <a:pPr algn="ctr">
+              <a:defRPr sz="1500" b="1">
+                <a:solidFill>
+                  <a:srgbClr val="1F2328"/>
+                </a:solidFill>
+                <a:latin typeface="Aptos"/>
+              </a:defRPr>
+            </a:pPr>
+            <a:r>
+              <a:t>Analiz</a:t>
+            </a:r>
+          </a:p>
+        </p:txBody>
+      </p:sp>
+      <p:sp>
+        <p:nvSpPr>
+          <p:cNvPr id="22" name="TextBox 21"/>
+          <p:cNvSpPr txBox="1"/>
+          <p:nvPr/>
+        </p:nvSpPr>
+        <p:spPr>
+          <a:xfrm>
+            <a:off x="9418320" y="2971800"/>
+            <a:ext cx="1874519" cy="777240"/>
+          </a:xfrm>
+          <a:prstGeom prst="rect">
+            <a:avLst/>
+          </a:prstGeom>
+          <a:noFill/>
+        </p:spPr>
+        <p:txBody>
+          <a:bodyPr wrap="square">
+            <a:normAutofit/>
+          </a:bodyPr>
+          <a:lstStyle/>
+          <a:p>
+            <a:pPr algn="ctr">
+              <a:defRPr sz="1150" b="0">
+                <a:solidFill>
+                  <a:srgbClr val="5E6670"/>
+                </a:solidFill>
+                <a:latin typeface="Aptos"/>
+              </a:defRPr>
+            </a:pPr>
+            <a:r>
+              <a:t>Merkezilik, topluluk, dayanıklılık</a:t>
+            </a:r>
+          </a:p>
+        </p:txBody>
+      </p:sp>
+      <p:sp>
+        <p:nvSpPr>
+          <p:cNvPr id="23" name="TextBox 22"/>
+          <p:cNvSpPr txBox="1"/>
+          <p:nvPr/>
+        </p:nvSpPr>
+        <p:spPr>
+          <a:xfrm>
+            <a:off x="1828800" y="4892040"/>
+            <a:ext cx="8503920" cy="640080"/>
+          </a:xfrm>
+          <a:prstGeom prst="rect">
+            <a:avLst/>
+          </a:prstGeom>
+          <a:noFill/>
+        </p:spPr>
+        <p:txBody>
+          <a:bodyPr wrap="square">
+            <a:normAutofit/>
+          </a:bodyPr>
+          <a:lstStyle/>
+          <a:p>
+            <a:pPr algn="ctr">
+              <a:defRPr sz="1600" b="1">
+                <a:solidFill>
+                  <a:srgbClr val="1F2328"/>
+                </a:solidFill>
+                <a:latin typeface="Aptos"/>
+              </a:defRPr>
+            </a:pPr>
+            <a:r>
+              <a:t>Bu akışta temel amaç, fiyat seviyelerini doğrudan karşılaştırmak yerine birlikte hareket etme yapısını ağ olarak okumaktır.</a:t>
+            </a:r>
+          </a:p>
+        </p:txBody>
+      </p:sp>
+      <p:sp>
+        <p:nvSpPr>
+          <p:cNvPr id="24" name="TextBox 23"/>
+          <p:cNvSpPr txBox="1"/>
+          <p:nvPr/>
+        </p:nvSpPr>
+        <p:spPr>
+          <a:xfrm>
+            <a:off x="11155680" y="6446520"/>
+            <a:ext cx="548640" cy="228600"/>
+          </a:xfrm>
+          <a:prstGeom prst="rect">
+            <a:avLst/>
+          </a:prstGeom>
+          <a:noFill/>
+        </p:spPr>
+        <p:txBody>
+          <a:bodyPr wrap="square">
+            <a:normAutofit/>
+          </a:bodyPr>
+          <a:lstStyle/>
+          <a:p>
             <a:pPr algn="r">
-              <a:defRPr sz="900">
-                <a:solidFill>
-                  <a:srgbClr val="5C6570"/>
-                </a:solidFill>
+              <a:defRPr sz="900" b="0">
+                <a:solidFill>
+                  <a:srgbClr val="5E6670"/>
+                </a:solidFill>
+                <a:latin typeface="Aptos"/>
               </a:defRPr>
             </a:pPr>
             <a:r>
@@ -5203,8 +5762,8 @@
         </p:nvSpPr>
         <p:spPr>
           <a:xfrm>
-            <a:off x="502920" y="320040"/>
-            <a:ext cx="11155680" cy="594360"/>
+            <a:off x="502920" y="292608"/>
+            <a:ext cx="11155680" cy="502920"/>
           </a:xfrm>
           <a:prstGeom prst="rect">
             <a:avLst/>
@@ -5212,21 +5771,21 @@
           <a:noFill/>
         </p:spPr>
         <p:txBody>
-          <a:bodyPr wrap="none">
-            <a:spAutoFit/>
+          <a:bodyPr wrap="square">
+            <a:normAutofit/>
           </a:bodyPr>
           <a:lstStyle/>
           <a:p>
-            <a:pPr>
-              <a:defRPr sz="2700" b="1">
-                <a:solidFill>
-                  <a:srgbClr val="1C2126"/>
-                </a:solidFill>
-                <a:latin typeface="Aptos Display"/>
-              </a:defRPr>
-            </a:pPr>
-            <a:r>
-              <a:t>Merkezilik ve Topluluk Bulgular?</a:t>
+            <a:pPr algn="l">
+              <a:defRPr sz="2400" b="1">
+                <a:solidFill>
+                  <a:srgbClr val="1F2328"/>
+                </a:solidFill>
+                <a:latin typeface="Aptos"/>
+              </a:defRPr>
+            </a:pPr>
+            <a:r>
+              <a:t>Ağ Yapısı ve Temel Ölçütler</a:t>
             </a:r>
           </a:p>
         </p:txBody>
@@ -5239,14 +5798,14 @@
         </p:nvSpPr>
         <p:spPr>
           <a:xfrm>
-            <a:off x="530352" y="1170432"/>
-            <a:ext cx="11109960" cy="18288"/>
+            <a:off x="530352" y="1143000"/>
+            <a:ext cx="11109960" cy="13716"/>
           </a:xfrm>
           <a:prstGeom prst="rect">
             <a:avLst/>
           </a:prstGeom>
           <a:solidFill>
-            <a:srgbClr val="D6DCE2"/>
+            <a:srgbClr val="DCE1E6"/>
           </a:solidFill>
           <a:ln>
             <a:noFill/>
@@ -5276,7 +5835,7 @@
       </p:sp>
       <p:pic>
         <p:nvPicPr>
-          <p:cNvPr id="4" name="Picture 3" descr="community_network.png"/>
+          <p:cNvPr id="4" name="Picture 3" descr="network_graph_enhanced.png"/>
           <p:cNvPicPr>
             <a:picLocks noChangeAspect="1"/>
           </p:cNvPicPr>
@@ -5290,8 +5849,8 @@
         </p:blipFill>
         <p:spPr>
           <a:xfrm>
-            <a:off x="502920" y="1417320"/>
-            <a:ext cx="5257800" cy="4526280"/>
+            <a:off x="502920" y="1389888"/>
+            <a:ext cx="6263640" cy="4892040"/>
           </a:xfrm>
           <a:prstGeom prst="rect">
             <a:avLst/>
@@ -5300,204 +5859,14 @@
       </p:pic>
       <p:sp>
         <p:nvSpPr>
-          <p:cNvPr id="5" name="TextBox 4"/>
-          <p:cNvSpPr txBox="1"/>
-          <p:nvPr/>
-        </p:nvSpPr>
-        <p:spPr>
-          <a:xfrm>
-            <a:off x="6080760" y="1417320"/>
-            <a:ext cx="2514600" cy="4389120"/>
-          </a:xfrm>
-          <a:prstGeom prst="rect">
-            <a:avLst/>
-          </a:prstGeom>
-          <a:noFill/>
-        </p:spPr>
-        <p:txBody>
-          <a:bodyPr wrap="square">
-            <a:spAutoFit/>
-          </a:bodyPr>
-          <a:lstStyle/>
-          <a:p>
-            <a:pPr>
-              <a:defRPr b="1" sz="1500">
-                <a:solidFill>
-                  <a:srgbClr val="195E94"/>
-                </a:solidFill>
-              </a:defRPr>
-            </a:pPr>
-            <a:r>
-              <a:t>En y?ksek degree centrality</a:t>
-            </a:r>
-          </a:p>
-          <a:p>
-            <a:pPr>
-              <a:defRPr sz="1250">
-                <a:solidFill>
-                  <a:srgbClr val="1C2126"/>
-                </a:solidFill>
-              </a:defRPr>
-            </a:pPr>
-            <a:r>
-              <a:t>DAX: 0.2941</a:t>
-            </a:r>
-          </a:p>
-          <a:p>
-            <a:pPr>
-              <a:defRPr sz="1250">
-                <a:solidFill>
-                  <a:srgbClr val="1C2126"/>
-                </a:solidFill>
-              </a:defRPr>
-            </a:pPr>
-            <a:r>
-              <a:t>SP500: 0.2941</a:t>
-            </a:r>
-          </a:p>
-          <a:p>
-            <a:pPr>
-              <a:defRPr sz="1250">
-                <a:solidFill>
-                  <a:srgbClr val="1C2126"/>
-                </a:solidFill>
-              </a:defRPr>
-            </a:pPr>
-            <a:r>
-              <a:t>FTSE100: 0.2941</a:t>
-            </a:r>
-          </a:p>
-          <a:p>
-            <a:pPr>
-              <a:defRPr sz="1250">
-                <a:solidFill>
-                  <a:srgbClr val="1C2126"/>
-                </a:solidFill>
-              </a:defRPr>
-            </a:pPr>
-            <a:r>
-              <a:t>VIX: 0.2941</a:t>
-            </a:r>
-          </a:p>
-          <a:p>
-            <a:pPr>
-              <a:defRPr sz="1250">
-                <a:solidFill>
-                  <a:srgbClr val="1C2126"/>
-                </a:solidFill>
-              </a:defRPr>
-            </a:pPr>
-            <a:r>
-              <a:t>Dow_Jones: 0.2941</a:t>
-            </a:r>
-          </a:p>
-        </p:txBody>
-      </p:sp>
-      <p:sp>
-        <p:nvSpPr>
-          <p:cNvPr id="6" name="TextBox 5"/>
-          <p:cNvSpPr txBox="1"/>
-          <p:nvPr/>
-        </p:nvSpPr>
-        <p:spPr>
-          <a:xfrm>
-            <a:off x="8778240" y="1417320"/>
-            <a:ext cx="2651760" cy="4389120"/>
-          </a:xfrm>
-          <a:prstGeom prst="rect">
-            <a:avLst/>
-          </a:prstGeom>
-          <a:noFill/>
-        </p:spPr>
-        <p:txBody>
-          <a:bodyPr wrap="square">
-            <a:spAutoFit/>
-          </a:bodyPr>
-          <a:lstStyle/>
-          <a:p>
-            <a:pPr>
-              <a:defRPr b="1" sz="1500">
-                <a:solidFill>
-                  <a:srgbClr val="BE3E3E"/>
-                </a:solidFill>
-              </a:defRPr>
-            </a:pPr>
-            <a:r>
-              <a:t>K?pr? rol?</a:t>
-            </a:r>
-          </a:p>
-          <a:p>
-            <a:pPr>
-              <a:defRPr sz="1250">
-                <a:solidFill>
-                  <a:srgbClr val="1C2126"/>
-                </a:solidFill>
-              </a:defRPr>
-            </a:pPr>
-            <a:r>
-              <a:t>VIX: 0.0735</a:t>
-            </a:r>
-          </a:p>
-          <a:p>
-            <a:pPr>
-              <a:defRPr sz="1250">
-                <a:solidFill>
-                  <a:srgbClr val="1C2126"/>
-                </a:solidFill>
-              </a:defRPr>
-            </a:pPr>
-            <a:r>
-              <a:t>Gold: 0.0074</a:t>
-            </a:r>
-          </a:p>
-          <a:p>
-            <a:pPr>
-              <a:defRPr sz="1250">
-                <a:solidFill>
-                  <a:srgbClr val="1C2126"/>
-                </a:solidFill>
-              </a:defRPr>
-            </a:pPr>
-            <a:r>
-              <a:t>Silver: 0.0000</a:t>
-            </a:r>
-          </a:p>
-          <a:p>
-            <a:pPr>
-              <a:defRPr sz="1250">
-                <a:solidFill>
-                  <a:srgbClr val="1C2126"/>
-                </a:solidFill>
-              </a:defRPr>
-            </a:pPr>
-            <a:r>
-              <a:t>Brent_Oil: 0.0000</a:t>
-            </a:r>
-          </a:p>
-          <a:p>
-            <a:pPr>
-              <a:defRPr sz="1250">
-                <a:solidFill>
-                  <a:srgbClr val="1C2126"/>
-                </a:solidFill>
-              </a:defRPr>
-            </a:pPr>
-            <a:r>
-              <a:t>Natural_Gas: 0.0000</a:t>
-            </a:r>
-          </a:p>
-        </p:txBody>
-      </p:sp>
-      <p:sp>
-        <p:nvSpPr>
-          <p:cNvPr id="7" name="Rounded Rectangle 6"/>
+          <p:cNvPr id="5" name="Rounded Rectangle 4"/>
           <p:cNvSpPr/>
           <p:nvPr/>
         </p:nvSpPr>
         <p:spPr>
           <a:xfrm>
-            <a:off x="6172200" y="5257800"/>
-            <a:ext cx="2103120" cy="731520"/>
+            <a:off x="7086600" y="1554480"/>
+            <a:ext cx="1920240" cy="822960"/>
           </a:xfrm>
           <a:prstGeom prst="roundRect">
             <a:avLst/>
@@ -5505,9 +5874,9 @@
           <a:solidFill>
             <a:srgbClr val="FFFFFF"/>
           </a:solidFill>
-          <a:ln w="12700">
+          <a:ln>
             <a:solidFill>
-              <a:srgbClr val="D6DCE2"/>
+              <a:srgbClr val="DCE1E6"/>
             </a:solidFill>
           </a:ln>
         </p:spPr>
@@ -5526,52 +5895,52 @@
           </a:fontRef>
         </p:style>
         <p:txBody>
-          <a:bodyPr rtlCol="0" anchor="ctr" lIns="164592" rIns="109728" tIns="73152"/>
+          <a:bodyPr rtlCol="0" anchor="ctr" lIns="164592" tIns="64008"/>
           <a:lstStyle/>
           <a:p>
             <a:pPr algn="ctr">
-              <a:defRPr sz="2300" b="1">
-                <a:solidFill>
-                  <a:srgbClr val="3D8C50"/>
+              <a:defRPr sz="1900" b="1">
+                <a:solidFill>
+                  <a:srgbClr val="1C5691"/>
                 </a:solidFill>
                 <a:latin typeface="Aptos Display"/>
               </a:defRPr>
             </a:pPr>
             <a:r>
-              <a:t>4</a:t>
+              <a:t>0.124</a:t>
             </a:r>
           </a:p>
           <a:p>
             <a:pPr>
-              <a:defRPr sz="1050">
-                <a:solidFill>
-                  <a:srgbClr val="5C6570"/>
-                </a:solidFill>
-                <a:latin typeface="Aptos"/>
-              </a:defRPr>
-            </a:pPr>
-            <a:r>
-              <a:t>Louvain topluluk say?s?</a:t>
-            </a:r>
-          </a:p>
-        </p:txBody>
-      </p:sp>
-      <p:sp>
-        <p:nvSpPr>
-          <p:cNvPr id="8" name="Rectangle 7"/>
+              <a:defRPr sz="1000">
+                <a:solidFill>
+                  <a:srgbClr val="5E6670"/>
+                </a:solidFill>
+                <a:latin typeface="Aptos"/>
+              </a:defRPr>
+            </a:pPr>
+            <a:r>
+              <a:t>Tam ağ yoğunluğu</a:t>
+            </a:r>
+          </a:p>
+        </p:txBody>
+      </p:sp>
+      <p:sp>
+        <p:nvSpPr>
+          <p:cNvPr id="6" name="Rectangle 5"/>
           <p:cNvSpPr/>
           <p:nvPr/>
         </p:nvSpPr>
         <p:spPr>
           <a:xfrm>
-            <a:off x="6172200" y="5257800"/>
-            <a:ext cx="73152" cy="731520"/>
+            <a:off x="7086600" y="1554480"/>
+            <a:ext cx="64008" cy="822960"/>
           </a:xfrm>
           <a:prstGeom prst="rect">
             <a:avLst/>
           </a:prstGeom>
           <a:solidFill>
-            <a:srgbClr val="3D8C50"/>
+            <a:srgbClr val="1C5691"/>
           </a:solidFill>
           <a:ln>
             <a:noFill/>
@@ -5601,14 +5970,14 @@
       </p:sp>
       <p:sp>
         <p:nvSpPr>
-          <p:cNvPr id="9" name="Rounded Rectangle 8"/>
+          <p:cNvPr id="7" name="Rounded Rectangle 6"/>
           <p:cNvSpPr/>
           <p:nvPr/>
         </p:nvSpPr>
         <p:spPr>
           <a:xfrm>
-            <a:off x="8732520" y="5257800"/>
-            <a:ext cx="2103120" cy="731520"/>
+            <a:off x="9372600" y="1554480"/>
+            <a:ext cx="1920240" cy="822960"/>
           </a:xfrm>
           <a:prstGeom prst="roundRect">
             <a:avLst/>
@@ -5616,9 +5985,9 @@
           <a:solidFill>
             <a:srgbClr val="FFFFFF"/>
           </a:solidFill>
-          <a:ln w="12700">
+          <a:ln>
             <a:solidFill>
-              <a:srgbClr val="D6DCE2"/>
+              <a:srgbClr val="DCE1E6"/>
             </a:solidFill>
           </a:ln>
         </p:spPr>
@@ -5637,52 +6006,52 @@
           </a:fontRef>
         </p:style>
         <p:txBody>
-          <a:bodyPr rtlCol="0" anchor="ctr" lIns="164592" rIns="109728" tIns="73152"/>
+          <a:bodyPr rtlCol="0" anchor="ctr" lIns="164592" tIns="64008"/>
           <a:lstStyle/>
           <a:p>
             <a:pPr algn="ctr">
-              <a:defRPr sz="2300" b="1">
-                <a:solidFill>
-                  <a:srgbClr val="BE3E3E"/>
+              <a:defRPr sz="1900" b="1">
+                <a:solidFill>
+                  <a:srgbClr val="007E80"/>
                 </a:solidFill>
                 <a:latin typeface="Aptos Display"/>
               </a:defRPr>
             </a:pPr>
             <a:r>
-              <a:t>VIX</a:t>
+              <a:t>13 düğüm</a:t>
             </a:r>
           </a:p>
           <a:p>
             <a:pPr>
-              <a:defRPr sz="1050">
-                <a:solidFill>
-                  <a:srgbClr val="5C6570"/>
-                </a:solidFill>
-                <a:latin typeface="Aptos"/>
-              </a:defRPr>
-            </a:pPr>
-            <a:r>
-              <a:t>?ne ??kan k?pr?</a:t>
-            </a:r>
-          </a:p>
-        </p:txBody>
-      </p:sp>
-      <p:sp>
-        <p:nvSpPr>
-          <p:cNvPr id="10" name="Rectangle 9"/>
+              <a:defRPr sz="1000">
+                <a:solidFill>
+                  <a:srgbClr val="5E6670"/>
+                </a:solidFill>
+                <a:latin typeface="Aptos"/>
+              </a:defRPr>
+            </a:pPr>
+            <a:r>
+              <a:t>Aktif alt ağ</a:t>
+            </a:r>
+          </a:p>
+        </p:txBody>
+      </p:sp>
+      <p:sp>
+        <p:nvSpPr>
+          <p:cNvPr id="8" name="Rectangle 7"/>
           <p:cNvSpPr/>
           <p:nvPr/>
         </p:nvSpPr>
         <p:spPr>
           <a:xfrm>
-            <a:off x="8732520" y="5257800"/>
-            <a:ext cx="73152" cy="731520"/>
+            <a:off x="9372600" y="1554480"/>
+            <a:ext cx="64008" cy="822960"/>
           </a:xfrm>
           <a:prstGeom prst="rect">
             <a:avLst/>
           </a:prstGeom>
           <a:solidFill>
-            <a:srgbClr val="BE3E3E"/>
+            <a:srgbClr val="007E80"/>
           </a:solidFill>
           <a:ln>
             <a:noFill/>
@@ -5712,14 +6081,236 @@
       </p:sp>
       <p:sp>
         <p:nvSpPr>
-          <p:cNvPr id="11" name="TextBox 10"/>
+          <p:cNvPr id="9" name="Rounded Rectangle 8"/>
+          <p:cNvSpPr/>
+          <p:nvPr/>
+        </p:nvSpPr>
+        <p:spPr>
+          <a:xfrm>
+            <a:off x="7086600" y="2697480"/>
+            <a:ext cx="1920240" cy="822960"/>
+          </a:xfrm>
+          <a:prstGeom prst="roundRect">
+            <a:avLst/>
+          </a:prstGeom>
+          <a:solidFill>
+            <a:srgbClr val="FFFFFF"/>
+          </a:solidFill>
+          <a:ln>
+            <a:solidFill>
+              <a:srgbClr val="DCE1E6"/>
+            </a:solidFill>
+          </a:ln>
+        </p:spPr>
+        <p:style>
+          <a:lnRef idx="1">
+            <a:schemeClr val="accent1"/>
+          </a:lnRef>
+          <a:fillRef idx="3">
+            <a:schemeClr val="accent1"/>
+          </a:fillRef>
+          <a:effectRef idx="2">
+            <a:schemeClr val="accent1"/>
+          </a:effectRef>
+          <a:fontRef idx="minor">
+            <a:schemeClr val="lt1"/>
+          </a:fontRef>
+        </p:style>
+        <p:txBody>
+          <a:bodyPr rtlCol="0" anchor="ctr" lIns="164592" tIns="64008"/>
+          <a:lstStyle/>
+          <a:p>
+            <a:pPr algn="ctr">
+              <a:defRPr sz="1900" b="1">
+                <a:solidFill>
+                  <a:srgbClr val="418456"/>
+                </a:solidFill>
+                <a:latin typeface="Aptos Display"/>
+              </a:defRPr>
+            </a:pPr>
+            <a:r>
+              <a:t>9</a:t>
+            </a:r>
+          </a:p>
+          <a:p>
+            <a:pPr>
+              <a:defRPr sz="1000">
+                <a:solidFill>
+                  <a:srgbClr val="5E6670"/>
+                </a:solidFill>
+                <a:latin typeface="Aptos"/>
+              </a:defRPr>
+            </a:pPr>
+            <a:r>
+              <a:t>Bileşen sayısı</a:t>
+            </a:r>
+          </a:p>
+        </p:txBody>
+      </p:sp>
+      <p:sp>
+        <p:nvSpPr>
+          <p:cNvPr id="10" name="Rectangle 9"/>
+          <p:cNvSpPr/>
+          <p:nvPr/>
+        </p:nvSpPr>
+        <p:spPr>
+          <a:xfrm>
+            <a:off x="7086600" y="2697480"/>
+            <a:ext cx="64008" cy="822960"/>
+          </a:xfrm>
+          <a:prstGeom prst="rect">
+            <a:avLst/>
+          </a:prstGeom>
+          <a:solidFill>
+            <a:srgbClr val="418456"/>
+          </a:solidFill>
+          <a:ln>
+            <a:noFill/>
+          </a:ln>
+        </p:spPr>
+        <p:style>
+          <a:lnRef idx="1">
+            <a:schemeClr val="accent1"/>
+          </a:lnRef>
+          <a:fillRef idx="3">
+            <a:schemeClr val="accent1"/>
+          </a:fillRef>
+          <a:effectRef idx="2">
+            <a:schemeClr val="accent1"/>
+          </a:effectRef>
+          <a:fontRef idx="minor">
+            <a:schemeClr val="lt1"/>
+          </a:fontRef>
+        </p:style>
+        <p:txBody>
+          <a:bodyPr rtlCol="0" anchor="ctr"/>
+          <a:lstStyle/>
+          <a:p>
+            <a:pPr algn="ctr"/>
+          </a:p>
+        </p:txBody>
+      </p:sp>
+      <p:sp>
+        <p:nvSpPr>
+          <p:cNvPr id="11" name="Rounded Rectangle 10"/>
+          <p:cNvSpPr/>
+          <p:nvPr/>
+        </p:nvSpPr>
+        <p:spPr>
+          <a:xfrm>
+            <a:off x="9372600" y="2697480"/>
+            <a:ext cx="1920240" cy="822960"/>
+          </a:xfrm>
+          <a:prstGeom prst="roundRect">
+            <a:avLst/>
+          </a:prstGeom>
+          <a:solidFill>
+            <a:srgbClr val="FFFFFF"/>
+          </a:solidFill>
+          <a:ln>
+            <a:solidFill>
+              <a:srgbClr val="DCE1E6"/>
+            </a:solidFill>
+          </a:ln>
+        </p:spPr>
+        <p:style>
+          <a:lnRef idx="1">
+            <a:schemeClr val="accent1"/>
+          </a:lnRef>
+          <a:fillRef idx="3">
+            <a:schemeClr val="accent1"/>
+          </a:fillRef>
+          <a:effectRef idx="2">
+            <a:schemeClr val="accent1"/>
+          </a:effectRef>
+          <a:fontRef idx="minor">
+            <a:schemeClr val="lt1"/>
+          </a:fontRef>
+        </p:style>
+        <p:txBody>
+          <a:bodyPr rtlCol="0" anchor="ctr" lIns="164592" tIns="64008"/>
+          <a:lstStyle/>
+          <a:p>
+            <a:pPr algn="ctr">
+              <a:defRPr sz="1900" b="1">
+                <a:solidFill>
+                  <a:srgbClr val="B94242"/>
+                </a:solidFill>
+                <a:latin typeface="Aptos Display"/>
+              </a:defRPr>
+            </a:pPr>
+            <a:r>
+              <a:t>6</a:t>
+            </a:r>
+          </a:p>
+          <a:p>
+            <a:pPr>
+              <a:defRPr sz="1000">
+                <a:solidFill>
+                  <a:srgbClr val="5E6670"/>
+                </a:solidFill>
+                <a:latin typeface="Aptos"/>
+              </a:defRPr>
+            </a:pPr>
+            <a:r>
+              <a:t>En büyük bileşen</a:t>
+            </a:r>
+          </a:p>
+        </p:txBody>
+      </p:sp>
+      <p:sp>
+        <p:nvSpPr>
+          <p:cNvPr id="12" name="Rectangle 11"/>
+          <p:cNvSpPr/>
+          <p:nvPr/>
+        </p:nvSpPr>
+        <p:spPr>
+          <a:xfrm>
+            <a:off x="9372600" y="2697480"/>
+            <a:ext cx="64008" cy="822960"/>
+          </a:xfrm>
+          <a:prstGeom prst="rect">
+            <a:avLst/>
+          </a:prstGeom>
+          <a:solidFill>
+            <a:srgbClr val="B94242"/>
+          </a:solidFill>
+          <a:ln>
+            <a:noFill/>
+          </a:ln>
+        </p:spPr>
+        <p:style>
+          <a:lnRef idx="1">
+            <a:schemeClr val="accent1"/>
+          </a:lnRef>
+          <a:fillRef idx="3">
+            <a:schemeClr val="accent1"/>
+          </a:fillRef>
+          <a:effectRef idx="2">
+            <a:schemeClr val="accent1"/>
+          </a:effectRef>
+          <a:fontRef idx="minor">
+            <a:schemeClr val="lt1"/>
+          </a:fontRef>
+        </p:style>
+        <p:txBody>
+          <a:bodyPr rtlCol="0" anchor="ctr"/>
+          <a:lstStyle/>
+          <a:p>
+            <a:pPr algn="ctr"/>
+          </a:p>
+        </p:txBody>
+      </p:sp>
+      <p:sp>
+        <p:nvSpPr>
+          <p:cNvPr id="13" name="TextBox 12"/>
           <p:cNvSpPr txBox="1"/>
           <p:nvPr/>
         </p:nvSpPr>
         <p:spPr>
           <a:xfrm>
-            <a:off x="10881360" y="6446520"/>
-            <a:ext cx="822960" cy="228600"/>
+            <a:off x="7086600" y="4069080"/>
+            <a:ext cx="4206240" cy="1645920"/>
           </a:xfrm>
           <a:prstGeom prst="rect">
             <a:avLst/>
@@ -5727,16 +6318,88 @@
           <a:noFill/>
         </p:spPr>
         <p:txBody>
-          <a:bodyPr wrap="none">
-            <a:spAutoFit/>
+          <a:bodyPr wrap="square">
+            <a:normAutofit/>
           </a:bodyPr>
           <a:lstStyle/>
           <a:p>
+            <a:pPr>
+              <a:spcAft>
+                <a:spcPts val="800"/>
+              </a:spcAft>
+              <a:defRPr sz="1400">
+                <a:solidFill>
+                  <a:srgbClr val="1F2328"/>
+                </a:solidFill>
+                <a:latin typeface="Aptos"/>
+              </a:defRPr>
+            </a:pPr>
+            <a:r>
+              <a:t>- Hisse senedi endeksleri ve VIX belirgin bir çekirdek oluşturdu.</a:t>
+            </a:r>
+          </a:p>
+          <a:p>
+            <a:pPr>
+              <a:spcAft>
+                <a:spcPts val="800"/>
+              </a:spcAft>
+              <a:defRPr sz="1400">
+                <a:solidFill>
+                  <a:srgbClr val="1F2328"/>
+                </a:solidFill>
+                <a:latin typeface="Aptos"/>
+              </a:defRPr>
+            </a:pPr>
+            <a:r>
+              <a:t>- Bazı varlıklar eşik değerine göre izole kaldı.</a:t>
+            </a:r>
+          </a:p>
+          <a:p>
+            <a:pPr>
+              <a:spcAft>
+                <a:spcPts val="800"/>
+              </a:spcAft>
+              <a:defRPr sz="1400">
+                <a:solidFill>
+                  <a:srgbClr val="1F2328"/>
+                </a:solidFill>
+                <a:latin typeface="Aptos"/>
+              </a:defRPr>
+            </a:pPr>
+            <a:r>
+              <a:t>- Ağ genel olarak parçalı ama merkezde yoğun bir yapı gösterdi.</a:t>
+            </a:r>
+          </a:p>
+        </p:txBody>
+      </p:sp>
+      <p:sp>
+        <p:nvSpPr>
+          <p:cNvPr id="14" name="TextBox 13"/>
+          <p:cNvSpPr txBox="1"/>
+          <p:nvPr/>
+        </p:nvSpPr>
+        <p:spPr>
+          <a:xfrm>
+            <a:off x="11155680" y="6446520"/>
+            <a:ext cx="548640" cy="228600"/>
+          </a:xfrm>
+          <a:prstGeom prst="rect">
+            <a:avLst/>
+          </a:prstGeom>
+          <a:noFill/>
+        </p:spPr>
+        <p:txBody>
+          <a:bodyPr wrap="square">
+            <a:normAutofit/>
+          </a:bodyPr>
+          <a:lstStyle/>
+          <a:p>
             <a:pPr algn="r">
-              <a:defRPr sz="900">
-                <a:solidFill>
-                  <a:srgbClr val="5C6570"/>
-                </a:solidFill>
+              <a:defRPr sz="900" b="0">
+                <a:solidFill>
+                  <a:srgbClr val="5E6670"/>
+                </a:solidFill>
+                <a:latin typeface="Aptos"/>
               </a:defRPr>
             </a:pPr>
             <a:r>
@@ -5779,8 +6442,8 @@
         </p:nvSpPr>
         <p:spPr>
           <a:xfrm>
-            <a:off x="502920" y="320040"/>
-            <a:ext cx="11155680" cy="594360"/>
+            <a:off x="502920" y="292608"/>
+            <a:ext cx="11155680" cy="502920"/>
           </a:xfrm>
           <a:prstGeom prst="rect">
             <a:avLst/>
@@ -5788,21 +6451,21 @@
           <a:noFill/>
         </p:spPr>
         <p:txBody>
-          <a:bodyPr wrap="none">
-            <a:spAutoFit/>
+          <a:bodyPr wrap="square">
+            <a:normAutofit/>
           </a:bodyPr>
           <a:lstStyle/>
           <a:p>
-            <a:pPr>
-              <a:defRPr sz="2700" b="1">
-                <a:solidFill>
-                  <a:srgbClr val="1C2126"/>
-                </a:solidFill>
-                <a:latin typeface="Aptos Display"/>
-              </a:defRPr>
-            </a:pPr>
-            <a:r>
-              <a:t>Sonu? ve Dayan?kl?l?k Yorumu</a:t>
+            <a:pPr algn="l">
+              <a:defRPr sz="2400" b="1">
+                <a:solidFill>
+                  <a:srgbClr val="1F2328"/>
+                </a:solidFill>
+                <a:latin typeface="Aptos"/>
+              </a:defRPr>
+            </a:pPr>
+            <a:r>
+              <a:t>Merkezilik Bulguları</a:t>
             </a:r>
           </a:p>
         </p:txBody>
@@ -5815,14 +6478,14 @@
         </p:nvSpPr>
         <p:spPr>
           <a:xfrm>
-            <a:off x="530352" y="1170432"/>
-            <a:ext cx="11109960" cy="18288"/>
+            <a:off x="530352" y="1143000"/>
+            <a:ext cx="11109960" cy="13716"/>
           </a:xfrm>
           <a:prstGeom prst="rect">
             <a:avLst/>
           </a:prstGeom>
           <a:solidFill>
-            <a:srgbClr val="D6DCE2"/>
+            <a:srgbClr val="DCE1E6"/>
           </a:solidFill>
           <a:ln>
             <a:noFill/>
@@ -5850,445 +6513,9 @@
           </a:p>
         </p:txBody>
       </p:sp>
-      <p:sp>
-        <p:nvSpPr>
-          <p:cNvPr id="4" name="Rounded Rectangle 3"/>
-          <p:cNvSpPr/>
-          <p:nvPr/>
-        </p:nvSpPr>
-        <p:spPr>
-          <a:xfrm>
-            <a:off x="685800" y="1417320"/>
-            <a:ext cx="2057400" cy="822960"/>
-          </a:xfrm>
-          <a:prstGeom prst="roundRect">
-            <a:avLst/>
-          </a:prstGeom>
-          <a:solidFill>
-            <a:srgbClr val="FFFFFF"/>
-          </a:solidFill>
-          <a:ln w="12700">
-            <a:solidFill>
-              <a:srgbClr val="D6DCE2"/>
-            </a:solidFill>
-          </a:ln>
-        </p:spPr>
-        <p:style>
-          <a:lnRef idx="1">
-            <a:schemeClr val="accent1"/>
-          </a:lnRef>
-          <a:fillRef idx="3">
-            <a:schemeClr val="accent1"/>
-          </a:fillRef>
-          <a:effectRef idx="2">
-            <a:schemeClr val="accent1"/>
-          </a:effectRef>
-          <a:fontRef idx="minor">
-            <a:schemeClr val="lt1"/>
-          </a:fontRef>
-        </p:style>
-        <p:txBody>
-          <a:bodyPr rtlCol="0" anchor="ctr" lIns="164592" rIns="109728" tIns="73152"/>
-          <a:lstStyle/>
-          <a:p>
-            <a:pPr algn="ctr">
-              <a:defRPr sz="2300" b="1">
-                <a:solidFill>
-                  <a:srgbClr val="195E94"/>
-                </a:solidFill>
-                <a:latin typeface="Aptos Display"/>
-              </a:defRPr>
-            </a:pPr>
-            <a:r>
-              <a:t>19</a:t>
-            </a:r>
-          </a:p>
-          <a:p>
-            <a:pPr>
-              <a:defRPr sz="1050">
-                <a:solidFill>
-                  <a:srgbClr val="5C6570"/>
-                </a:solidFill>
-                <a:latin typeface="Aptos"/>
-              </a:defRPr>
-            </a:pPr>
-            <a:r>
-              <a:t>Ba?lang?? kenar say?s?</a:t>
-            </a:r>
-          </a:p>
-        </p:txBody>
-      </p:sp>
-      <p:sp>
-        <p:nvSpPr>
-          <p:cNvPr id="5" name="Rectangle 4"/>
-          <p:cNvSpPr/>
-          <p:nvPr/>
-        </p:nvSpPr>
-        <p:spPr>
-          <a:xfrm>
-            <a:off x="685800" y="1417320"/>
-            <a:ext cx="73152" cy="822960"/>
-          </a:xfrm>
-          <a:prstGeom prst="rect">
-            <a:avLst/>
-          </a:prstGeom>
-          <a:solidFill>
-            <a:srgbClr val="195E94"/>
-          </a:solidFill>
-          <a:ln>
-            <a:noFill/>
-          </a:ln>
-        </p:spPr>
-        <p:style>
-          <a:lnRef idx="1">
-            <a:schemeClr val="accent1"/>
-          </a:lnRef>
-          <a:fillRef idx="3">
-            <a:schemeClr val="accent1"/>
-          </a:fillRef>
-          <a:effectRef idx="2">
-            <a:schemeClr val="accent1"/>
-          </a:effectRef>
-          <a:fontRef idx="minor">
-            <a:schemeClr val="lt1"/>
-          </a:fontRef>
-        </p:style>
-        <p:txBody>
-          <a:bodyPr rtlCol="0" anchor="ctr"/>
-          <a:lstStyle/>
-          <a:p>
-            <a:pPr algn="ctr"/>
-          </a:p>
-        </p:txBody>
-      </p:sp>
-      <p:sp>
-        <p:nvSpPr>
-          <p:cNvPr id="6" name="Rounded Rectangle 5"/>
-          <p:cNvSpPr/>
-          <p:nvPr/>
-        </p:nvSpPr>
-        <p:spPr>
-          <a:xfrm>
-            <a:off x="2971800" y="1417320"/>
-            <a:ext cx="2057400" cy="822960"/>
-          </a:xfrm>
-          <a:prstGeom prst="roundRect">
-            <a:avLst/>
-          </a:prstGeom>
-          <a:solidFill>
-            <a:srgbClr val="FFFFFF"/>
-          </a:solidFill>
-          <a:ln w="12700">
-            <a:solidFill>
-              <a:srgbClr val="D6DCE2"/>
-            </a:solidFill>
-          </a:ln>
-        </p:spPr>
-        <p:style>
-          <a:lnRef idx="1">
-            <a:schemeClr val="accent1"/>
-          </a:lnRef>
-          <a:fillRef idx="3">
-            <a:schemeClr val="accent1"/>
-          </a:fillRef>
-          <a:effectRef idx="2">
-            <a:schemeClr val="accent1"/>
-          </a:effectRef>
-          <a:fontRef idx="minor">
-            <a:schemeClr val="lt1"/>
-          </a:fontRef>
-        </p:style>
-        <p:txBody>
-          <a:bodyPr rtlCol="0" anchor="ctr" lIns="164592" rIns="109728" tIns="73152"/>
-          <a:lstStyle/>
-          <a:p>
-            <a:pPr algn="ctr">
-              <a:defRPr sz="2300" b="1">
-                <a:solidFill>
-                  <a:srgbClr val="008579"/>
-                </a:solidFill>
-                <a:latin typeface="Aptos Display"/>
-              </a:defRPr>
-            </a:pPr>
-            <a:r>
-              <a:t>14</a:t>
-            </a:r>
-          </a:p>
-          <a:p>
-            <a:pPr>
-              <a:defRPr sz="1050">
-                <a:solidFill>
-                  <a:srgbClr val="5C6570"/>
-                </a:solidFill>
-                <a:latin typeface="Aptos"/>
-              </a:defRPr>
-            </a:pPr>
-            <a:r>
-              <a:t>SP500 ??kar?l?nca</a:t>
-            </a:r>
-          </a:p>
-        </p:txBody>
-      </p:sp>
-      <p:sp>
-        <p:nvSpPr>
-          <p:cNvPr id="7" name="Rectangle 6"/>
-          <p:cNvSpPr/>
-          <p:nvPr/>
-        </p:nvSpPr>
-        <p:spPr>
-          <a:xfrm>
-            <a:off x="2971800" y="1417320"/>
-            <a:ext cx="73152" cy="822960"/>
-          </a:xfrm>
-          <a:prstGeom prst="rect">
-            <a:avLst/>
-          </a:prstGeom>
-          <a:solidFill>
-            <a:srgbClr val="008579"/>
-          </a:solidFill>
-          <a:ln>
-            <a:noFill/>
-          </a:ln>
-        </p:spPr>
-        <p:style>
-          <a:lnRef idx="1">
-            <a:schemeClr val="accent1"/>
-          </a:lnRef>
-          <a:fillRef idx="3">
-            <a:schemeClr val="accent1"/>
-          </a:fillRef>
-          <a:effectRef idx="2">
-            <a:schemeClr val="accent1"/>
-          </a:effectRef>
-          <a:fontRef idx="minor">
-            <a:schemeClr val="lt1"/>
-          </a:fontRef>
-        </p:style>
-        <p:txBody>
-          <a:bodyPr rtlCol="0" anchor="ctr"/>
-          <a:lstStyle/>
-          <a:p>
-            <a:pPr algn="ctr"/>
-          </a:p>
-        </p:txBody>
-      </p:sp>
-      <p:sp>
-        <p:nvSpPr>
-          <p:cNvPr id="8" name="Rounded Rectangle 7"/>
-          <p:cNvSpPr/>
-          <p:nvPr/>
-        </p:nvSpPr>
-        <p:spPr>
-          <a:xfrm>
-            <a:off x="5257800" y="1417320"/>
-            <a:ext cx="2057400" cy="822960"/>
-          </a:xfrm>
-          <a:prstGeom prst="roundRect">
-            <a:avLst/>
-          </a:prstGeom>
-          <a:solidFill>
-            <a:srgbClr val="FFFFFF"/>
-          </a:solidFill>
-          <a:ln w="12700">
-            <a:solidFill>
-              <a:srgbClr val="D6DCE2"/>
-            </a:solidFill>
-          </a:ln>
-        </p:spPr>
-        <p:style>
-          <a:lnRef idx="1">
-            <a:schemeClr val="accent1"/>
-          </a:lnRef>
-          <a:fillRef idx="3">
-            <a:schemeClr val="accent1"/>
-          </a:fillRef>
-          <a:effectRef idx="2">
-            <a:schemeClr val="accent1"/>
-          </a:effectRef>
-          <a:fontRef idx="minor">
-            <a:schemeClr val="lt1"/>
-          </a:fontRef>
-        </p:style>
-        <p:txBody>
-          <a:bodyPr rtlCol="0" anchor="ctr" lIns="164592" rIns="109728" tIns="73152"/>
-          <a:lstStyle/>
-          <a:p>
-            <a:pPr algn="ctr">
-              <a:defRPr sz="2300" b="1">
-                <a:solidFill>
-                  <a:srgbClr val="BE3E3E"/>
-                </a:solidFill>
-                <a:latin typeface="Aptos Display"/>
-              </a:defRPr>
-            </a:pPr>
-            <a:r>
-              <a:t>14</a:t>
-            </a:r>
-          </a:p>
-          <a:p>
-            <a:pPr>
-              <a:defRPr sz="1050">
-                <a:solidFill>
-                  <a:srgbClr val="5C6570"/>
-                </a:solidFill>
-                <a:latin typeface="Aptos"/>
-              </a:defRPr>
-            </a:pPr>
-            <a:r>
-              <a:t>VIX ??kar?l?nca</a:t>
-            </a:r>
-          </a:p>
-        </p:txBody>
-      </p:sp>
-      <p:sp>
-        <p:nvSpPr>
-          <p:cNvPr id="9" name="Rectangle 8"/>
-          <p:cNvSpPr/>
-          <p:nvPr/>
-        </p:nvSpPr>
-        <p:spPr>
-          <a:xfrm>
-            <a:off x="5257800" y="1417320"/>
-            <a:ext cx="73152" cy="822960"/>
-          </a:xfrm>
-          <a:prstGeom prst="rect">
-            <a:avLst/>
-          </a:prstGeom>
-          <a:solidFill>
-            <a:srgbClr val="BE3E3E"/>
-          </a:solidFill>
-          <a:ln>
-            <a:noFill/>
-          </a:ln>
-        </p:spPr>
-        <p:style>
-          <a:lnRef idx="1">
-            <a:schemeClr val="accent1"/>
-          </a:lnRef>
-          <a:fillRef idx="3">
-            <a:schemeClr val="accent1"/>
-          </a:fillRef>
-          <a:effectRef idx="2">
-            <a:schemeClr val="accent1"/>
-          </a:effectRef>
-          <a:fontRef idx="minor">
-            <a:schemeClr val="lt1"/>
-          </a:fontRef>
-        </p:style>
-        <p:txBody>
-          <a:bodyPr rtlCol="0" anchor="ctr"/>
-          <a:lstStyle/>
-          <a:p>
-            <a:pPr algn="ctr"/>
-          </a:p>
-        </p:txBody>
-      </p:sp>
-      <p:sp>
-        <p:nvSpPr>
-          <p:cNvPr id="10" name="TextBox 9"/>
-          <p:cNvSpPr txBox="1"/>
-          <p:nvPr/>
-        </p:nvSpPr>
-        <p:spPr>
-          <a:xfrm>
-            <a:off x="777240" y="2743200"/>
-            <a:ext cx="6446520" cy="3017520"/>
-          </a:xfrm>
-          <a:prstGeom prst="rect">
-            <a:avLst/>
-          </a:prstGeom>
-          <a:noFill/>
-        </p:spPr>
-        <p:txBody>
-          <a:bodyPr wrap="square">
-            <a:normAutofit/>
-          </a:bodyPr>
-          <a:lstStyle/>
-          <a:p>
-            <a:pPr>
-              <a:spcAft>
-                <a:spcPts val="900"/>
-              </a:spcAft>
-              <a:defRPr sz="1600">
-                <a:solidFill>
-                  <a:srgbClr val="1C2126"/>
-                </a:solidFill>
-                <a:latin typeface="Aptos"/>
-              </a:defRPr>
-            </a:pPr>
-            <a:r>
-              <a:t>? A?, hisse senedi endeksleri ve VIX etraf?nda g??l? bir ?ekirdek yap? ?retmi?tir.</a:t>
-            </a:r>
-          </a:p>
-          <a:p>
-            <a:pPr>
-              <a:spcAft>
-                <a:spcPts val="900"/>
-              </a:spcAft>
-              <a:defRPr sz="1600">
-                <a:solidFill>
-                  <a:srgbClr val="1C2126"/>
-                </a:solidFill>
-                <a:latin typeface="Aptos"/>
-              </a:defRPr>
-            </a:pPr>
-            <a:r>
-              <a:t>? Topluluklar finansal piyasa segmentleriyle uyumlu bi?imde ayr??m??t?r.</a:t>
-            </a:r>
-          </a:p>
-          <a:p>
-            <a:pPr>
-              <a:spcAft>
-                <a:spcPts val="900"/>
-              </a:spcAft>
-              <a:defRPr sz="1600">
-                <a:solidFill>
-                  <a:srgbClr val="1C2126"/>
-                </a:solidFill>
-                <a:latin typeface="Aptos"/>
-              </a:defRPr>
-            </a:pPr>
-            <a:r>
-              <a:t>? Merkezi d???m ??kar?mlar? ba?lant? say?s?n? azalt?r; ancak a??n tamam? tek hamlede ??kmez.</a:t>
-            </a:r>
-          </a:p>
-          <a:p>
-            <a:pPr>
-              <a:spcAft>
-                <a:spcPts val="900"/>
-              </a:spcAft>
-              <a:defRPr sz="1600">
-                <a:solidFill>
-                  <a:srgbClr val="1C2126"/>
-                </a:solidFill>
-                <a:latin typeface="Aptos"/>
-              </a:defRPr>
-            </a:pPr>
-            <a:r>
-              <a:t>? ?al??man?n temel s?n?rl?l??? korelasyonun nedensellik g?stermemesi ve e?i?e duyarl? olmas?d?r.</a:t>
-            </a:r>
-          </a:p>
-          <a:p>
-            <a:pPr>
-              <a:spcAft>
-                <a:spcPts val="900"/>
-              </a:spcAft>
-              <a:defRPr sz="1600">
-                <a:solidFill>
-                  <a:srgbClr val="1C2126"/>
-                </a:solidFill>
-                <a:latin typeface="Aptos"/>
-              </a:defRPr>
-            </a:pPr>
-            <a:r>
-              <a:t>? Teslim paketi: rapor, notebook, veri setleri, g?rseller ve bu k?sa sunum.</a:t>
-            </a:r>
-          </a:p>
-        </p:txBody>
-      </p:sp>
       <p:pic>
         <p:nvPicPr>
-          <p:cNvPr id="11" name="Picture 10" descr="top_degree_nodes.png"/>
+          <p:cNvPr id="4" name="Picture 3" descr="top_degree_nodes.png"/>
           <p:cNvPicPr>
             <a:picLocks noChangeAspect="1"/>
           </p:cNvPicPr>
@@ -6302,14 +6529,286 @@
         </p:blipFill>
         <p:spPr>
           <a:xfrm>
-            <a:off x="7635240" y="1508760"/>
-            <a:ext cx="3840480" cy="4389120"/>
+            <a:off x="594360" y="1463040"/>
+            <a:ext cx="4846320" cy="4251960"/>
           </a:xfrm>
           <a:prstGeom prst="rect">
             <a:avLst/>
           </a:prstGeom>
         </p:spPr>
       </p:pic>
+      <p:sp>
+        <p:nvSpPr>
+          <p:cNvPr id="5" name="TextBox 4"/>
+          <p:cNvSpPr txBox="1"/>
+          <p:nvPr/>
+        </p:nvSpPr>
+        <p:spPr>
+          <a:xfrm>
+            <a:off x="5897880" y="1572768"/>
+            <a:ext cx="1645920" cy="274320"/>
+          </a:xfrm>
+          <a:prstGeom prst="rect">
+            <a:avLst/>
+          </a:prstGeom>
+          <a:noFill/>
+        </p:spPr>
+        <p:txBody>
+          <a:bodyPr wrap="square">
+            <a:normAutofit/>
+          </a:bodyPr>
+          <a:lstStyle/>
+          <a:p>
+            <a:pPr algn="ctr">
+              <a:defRPr sz="1400" b="1">
+                <a:solidFill>
+                  <a:srgbClr val="1C5691"/>
+                </a:solidFill>
+                <a:latin typeface="Aptos"/>
+              </a:defRPr>
+            </a:pPr>
+            <a:r>
+              <a:t>Degree</a:t>
+            </a:r>
+          </a:p>
+        </p:txBody>
+      </p:sp>
+      <p:sp>
+        <p:nvSpPr>
+          <p:cNvPr id="6" name="TextBox 5"/>
+          <p:cNvSpPr txBox="1"/>
+          <p:nvPr/>
+        </p:nvSpPr>
+        <p:spPr>
+          <a:xfrm>
+            <a:off x="5897880" y="2057400"/>
+            <a:ext cx="1645920" cy="475488"/>
+          </a:xfrm>
+          <a:prstGeom prst="rect">
+            <a:avLst/>
+          </a:prstGeom>
+          <a:noFill/>
+        </p:spPr>
+        <p:txBody>
+          <a:bodyPr wrap="square">
+            <a:normAutofit/>
+          </a:bodyPr>
+          <a:lstStyle/>
+          <a:p>
+            <a:pPr algn="ctr">
+              <a:defRPr sz="1050" b="0">
+                <a:solidFill>
+                  <a:srgbClr val="1F2328"/>
+                </a:solidFill>
+                <a:latin typeface="Aptos"/>
+              </a:defRPr>
+            </a:pPr>
+            <a:r>
+              <a:t>1. DAX</a:t>
+            </a:r>
+            <a:br/>
+            <a:r>
+              <a:t>0.2941</a:t>
+            </a:r>
+          </a:p>
+        </p:txBody>
+      </p:sp>
+      <p:sp>
+        <p:nvSpPr>
+          <p:cNvPr id="7" name="TextBox 6"/>
+          <p:cNvSpPr txBox="1"/>
+          <p:nvPr/>
+        </p:nvSpPr>
+        <p:spPr>
+          <a:xfrm>
+            <a:off x="5897880" y="2697480"/>
+            <a:ext cx="1645920" cy="475488"/>
+          </a:xfrm>
+          <a:prstGeom prst="rect">
+            <a:avLst/>
+          </a:prstGeom>
+          <a:noFill/>
+        </p:spPr>
+        <p:txBody>
+          <a:bodyPr wrap="square">
+            <a:normAutofit/>
+          </a:bodyPr>
+          <a:lstStyle/>
+          <a:p>
+            <a:pPr algn="ctr">
+              <a:defRPr sz="1050" b="0">
+                <a:solidFill>
+                  <a:srgbClr val="1F2328"/>
+                </a:solidFill>
+                <a:latin typeface="Aptos"/>
+              </a:defRPr>
+            </a:pPr>
+            <a:r>
+              <a:t>2. SP500</a:t>
+            </a:r>
+            <a:br/>
+            <a:r>
+              <a:t>0.2941</a:t>
+            </a:r>
+          </a:p>
+        </p:txBody>
+      </p:sp>
+      <p:sp>
+        <p:nvSpPr>
+          <p:cNvPr id="8" name="TextBox 7"/>
+          <p:cNvSpPr txBox="1"/>
+          <p:nvPr/>
+        </p:nvSpPr>
+        <p:spPr>
+          <a:xfrm>
+            <a:off x="5897880" y="3337560"/>
+            <a:ext cx="1645920" cy="475488"/>
+          </a:xfrm>
+          <a:prstGeom prst="rect">
+            <a:avLst/>
+          </a:prstGeom>
+          <a:noFill/>
+        </p:spPr>
+        <p:txBody>
+          <a:bodyPr wrap="square">
+            <a:normAutofit/>
+          </a:bodyPr>
+          <a:lstStyle/>
+          <a:p>
+            <a:pPr algn="ctr">
+              <a:defRPr sz="1050" b="0">
+                <a:solidFill>
+                  <a:srgbClr val="1F2328"/>
+                </a:solidFill>
+                <a:latin typeface="Aptos"/>
+              </a:defRPr>
+            </a:pPr>
+            <a:r>
+              <a:t>3. FTSE100</a:t>
+            </a:r>
+            <a:br/>
+            <a:r>
+              <a:t>0.2941</a:t>
+            </a:r>
+          </a:p>
+        </p:txBody>
+      </p:sp>
+      <p:sp>
+        <p:nvSpPr>
+          <p:cNvPr id="9" name="TextBox 8"/>
+          <p:cNvSpPr txBox="1"/>
+          <p:nvPr/>
+        </p:nvSpPr>
+        <p:spPr>
+          <a:xfrm>
+            <a:off x="5897880" y="3977640"/>
+            <a:ext cx="1645920" cy="475488"/>
+          </a:xfrm>
+          <a:prstGeom prst="rect">
+            <a:avLst/>
+          </a:prstGeom>
+          <a:noFill/>
+        </p:spPr>
+        <p:txBody>
+          <a:bodyPr wrap="square">
+            <a:normAutofit/>
+          </a:bodyPr>
+          <a:lstStyle/>
+          <a:p>
+            <a:pPr algn="ctr">
+              <a:defRPr sz="1050" b="0">
+                <a:solidFill>
+                  <a:srgbClr val="1F2328"/>
+                </a:solidFill>
+                <a:latin typeface="Aptos"/>
+              </a:defRPr>
+            </a:pPr>
+            <a:r>
+              <a:t>4. VIX</a:t>
+            </a:r>
+            <a:br/>
+            <a:r>
+              <a:t>0.2941</a:t>
+            </a:r>
+          </a:p>
+        </p:txBody>
+      </p:sp>
+      <p:sp>
+        <p:nvSpPr>
+          <p:cNvPr id="10" name="TextBox 9"/>
+          <p:cNvSpPr txBox="1"/>
+          <p:nvPr/>
+        </p:nvSpPr>
+        <p:spPr>
+          <a:xfrm>
+            <a:off x="5897880" y="4617720"/>
+            <a:ext cx="1645920" cy="475488"/>
+          </a:xfrm>
+          <a:prstGeom prst="rect">
+            <a:avLst/>
+          </a:prstGeom>
+          <a:noFill/>
+        </p:spPr>
+        <p:txBody>
+          <a:bodyPr wrap="square">
+            <a:normAutofit/>
+          </a:bodyPr>
+          <a:lstStyle/>
+          <a:p>
+            <a:pPr algn="ctr">
+              <a:defRPr sz="1050" b="0">
+                <a:solidFill>
+                  <a:srgbClr val="1F2328"/>
+                </a:solidFill>
+                <a:latin typeface="Aptos"/>
+              </a:defRPr>
+            </a:pPr>
+            <a:r>
+              <a:t>5. Dow_Jones</a:t>
+            </a:r>
+            <a:br/>
+            <a:r>
+              <a:t>0.2941</a:t>
+            </a:r>
+          </a:p>
+        </p:txBody>
+      </p:sp>
+      <p:sp>
+        <p:nvSpPr>
+          <p:cNvPr id="11" name="TextBox 10"/>
+          <p:cNvSpPr txBox="1"/>
+          <p:nvPr/>
+        </p:nvSpPr>
+        <p:spPr>
+          <a:xfrm>
+            <a:off x="7909560" y="1572768"/>
+            <a:ext cx="1645920" cy="274320"/>
+          </a:xfrm>
+          <a:prstGeom prst="rect">
+            <a:avLst/>
+          </a:prstGeom>
+          <a:noFill/>
+        </p:spPr>
+        <p:txBody>
+          <a:bodyPr wrap="square">
+            <a:normAutofit/>
+          </a:bodyPr>
+          <a:lstStyle/>
+          <a:p>
+            <a:pPr algn="ctr">
+              <a:defRPr sz="1400" b="1">
+                <a:solidFill>
+                  <a:srgbClr val="B94242"/>
+                </a:solidFill>
+                <a:latin typeface="Aptos"/>
+              </a:defRPr>
+            </a:pPr>
+            <a:r>
+              <a:t>Betweenness</a:t>
+            </a:r>
+          </a:p>
+        </p:txBody>
+      </p:sp>
       <p:sp>
         <p:nvSpPr>
           <p:cNvPr id="12" name="TextBox 11"/>
@@ -6318,8 +6817,8 @@
         </p:nvSpPr>
         <p:spPr>
           <a:xfrm>
-            <a:off x="10881360" y="6446520"/>
-            <a:ext cx="822960" cy="228600"/>
+            <a:off x="7909560" y="2057400"/>
+            <a:ext cx="1645920" cy="475488"/>
           </a:xfrm>
           <a:prstGeom prst="rect">
             <a:avLst/>
@@ -6327,20 +6826,1834 @@
           <a:noFill/>
         </p:spPr>
         <p:txBody>
-          <a:bodyPr wrap="none">
-            <a:spAutoFit/>
+          <a:bodyPr wrap="square">
+            <a:normAutofit/>
           </a:bodyPr>
           <a:lstStyle/>
           <a:p>
+            <a:pPr algn="ctr">
+              <a:defRPr sz="1050" b="0">
+                <a:solidFill>
+                  <a:srgbClr val="1F2328"/>
+                </a:solidFill>
+                <a:latin typeface="Aptos"/>
+              </a:defRPr>
+            </a:pPr>
+            <a:r>
+              <a:t>1. VIX</a:t>
+            </a:r>
+            <a:br/>
+            <a:r>
+              <a:t>0.0735</a:t>
+            </a:r>
+          </a:p>
+        </p:txBody>
+      </p:sp>
+      <p:sp>
+        <p:nvSpPr>
+          <p:cNvPr id="13" name="TextBox 12"/>
+          <p:cNvSpPr txBox="1"/>
+          <p:nvPr/>
+        </p:nvSpPr>
+        <p:spPr>
+          <a:xfrm>
+            <a:off x="7909560" y="2697480"/>
+            <a:ext cx="1645920" cy="475488"/>
+          </a:xfrm>
+          <a:prstGeom prst="rect">
+            <a:avLst/>
+          </a:prstGeom>
+          <a:noFill/>
+        </p:spPr>
+        <p:txBody>
+          <a:bodyPr wrap="square">
+            <a:normAutofit/>
+          </a:bodyPr>
+          <a:lstStyle/>
+          <a:p>
+            <a:pPr algn="ctr">
+              <a:defRPr sz="1050" b="0">
+                <a:solidFill>
+                  <a:srgbClr val="1F2328"/>
+                </a:solidFill>
+                <a:latin typeface="Aptos"/>
+              </a:defRPr>
+            </a:pPr>
+            <a:r>
+              <a:t>2. Gold</a:t>
+            </a:r>
+            <a:br/>
+            <a:r>
+              <a:t>0.0074</a:t>
+            </a:r>
+          </a:p>
+        </p:txBody>
+      </p:sp>
+      <p:sp>
+        <p:nvSpPr>
+          <p:cNvPr id="14" name="TextBox 13"/>
+          <p:cNvSpPr txBox="1"/>
+          <p:nvPr/>
+        </p:nvSpPr>
+        <p:spPr>
+          <a:xfrm>
+            <a:off x="7909560" y="3337560"/>
+            <a:ext cx="1645920" cy="475488"/>
+          </a:xfrm>
+          <a:prstGeom prst="rect">
+            <a:avLst/>
+          </a:prstGeom>
+          <a:noFill/>
+        </p:spPr>
+        <p:txBody>
+          <a:bodyPr wrap="square">
+            <a:normAutofit/>
+          </a:bodyPr>
+          <a:lstStyle/>
+          <a:p>
+            <a:pPr algn="ctr">
+              <a:defRPr sz="1050" b="0">
+                <a:solidFill>
+                  <a:srgbClr val="1F2328"/>
+                </a:solidFill>
+                <a:latin typeface="Aptos"/>
+              </a:defRPr>
+            </a:pPr>
+            <a:r>
+              <a:t>3. Silver</a:t>
+            </a:r>
+            <a:br/>
+            <a:r>
+              <a:t>0.0000</a:t>
+            </a:r>
+          </a:p>
+        </p:txBody>
+      </p:sp>
+      <p:sp>
+        <p:nvSpPr>
+          <p:cNvPr id="15" name="TextBox 14"/>
+          <p:cNvSpPr txBox="1"/>
+          <p:nvPr/>
+        </p:nvSpPr>
+        <p:spPr>
+          <a:xfrm>
+            <a:off x="7909560" y="3977640"/>
+            <a:ext cx="1645920" cy="475488"/>
+          </a:xfrm>
+          <a:prstGeom prst="rect">
+            <a:avLst/>
+          </a:prstGeom>
+          <a:noFill/>
+        </p:spPr>
+        <p:txBody>
+          <a:bodyPr wrap="square">
+            <a:normAutofit/>
+          </a:bodyPr>
+          <a:lstStyle/>
+          <a:p>
+            <a:pPr algn="ctr">
+              <a:defRPr sz="1050" b="0">
+                <a:solidFill>
+                  <a:srgbClr val="1F2328"/>
+                </a:solidFill>
+                <a:latin typeface="Aptos"/>
+              </a:defRPr>
+            </a:pPr>
+            <a:r>
+              <a:t>4. Brent_Oil</a:t>
+            </a:r>
+            <a:br/>
+            <a:r>
+              <a:t>0.0000</a:t>
+            </a:r>
+          </a:p>
+        </p:txBody>
+      </p:sp>
+      <p:sp>
+        <p:nvSpPr>
+          <p:cNvPr id="16" name="TextBox 15"/>
+          <p:cNvSpPr txBox="1"/>
+          <p:nvPr/>
+        </p:nvSpPr>
+        <p:spPr>
+          <a:xfrm>
+            <a:off x="7909560" y="4617720"/>
+            <a:ext cx="1645920" cy="475488"/>
+          </a:xfrm>
+          <a:prstGeom prst="rect">
+            <a:avLst/>
+          </a:prstGeom>
+          <a:noFill/>
+        </p:spPr>
+        <p:txBody>
+          <a:bodyPr wrap="square">
+            <a:normAutofit/>
+          </a:bodyPr>
+          <a:lstStyle/>
+          <a:p>
+            <a:pPr algn="ctr">
+              <a:defRPr sz="1050" b="0">
+                <a:solidFill>
+                  <a:srgbClr val="1F2328"/>
+                </a:solidFill>
+                <a:latin typeface="Aptos"/>
+              </a:defRPr>
+            </a:pPr>
+            <a:r>
+              <a:t>5. Natural_Gas</a:t>
+            </a:r>
+            <a:br/>
+            <a:r>
+              <a:t>0.0000</a:t>
+            </a:r>
+          </a:p>
+        </p:txBody>
+      </p:sp>
+      <p:sp>
+        <p:nvSpPr>
+          <p:cNvPr id="17" name="TextBox 16"/>
+          <p:cNvSpPr txBox="1"/>
+          <p:nvPr/>
+        </p:nvSpPr>
+        <p:spPr>
+          <a:xfrm>
+            <a:off x="9921240" y="1572768"/>
+            <a:ext cx="1645920" cy="274320"/>
+          </a:xfrm>
+          <a:prstGeom prst="rect">
+            <a:avLst/>
+          </a:prstGeom>
+          <a:noFill/>
+        </p:spPr>
+        <p:txBody>
+          <a:bodyPr wrap="square">
+            <a:normAutofit/>
+          </a:bodyPr>
+          <a:lstStyle/>
+          <a:p>
+            <a:pPr algn="ctr">
+              <a:defRPr sz="1400" b="1">
+                <a:solidFill>
+                  <a:srgbClr val="418456"/>
+                </a:solidFill>
+                <a:latin typeface="Aptos"/>
+              </a:defRPr>
+            </a:pPr>
+            <a:r>
+              <a:t>Eigenvector</a:t>
+            </a:r>
+          </a:p>
+        </p:txBody>
+      </p:sp>
+      <p:sp>
+        <p:nvSpPr>
+          <p:cNvPr id="18" name="TextBox 17"/>
+          <p:cNvSpPr txBox="1"/>
+          <p:nvPr/>
+        </p:nvSpPr>
+        <p:spPr>
+          <a:xfrm>
+            <a:off x="9921240" y="2057400"/>
+            <a:ext cx="1645920" cy="475488"/>
+          </a:xfrm>
+          <a:prstGeom prst="rect">
+            <a:avLst/>
+          </a:prstGeom>
+          <a:noFill/>
+        </p:spPr>
+        <p:txBody>
+          <a:bodyPr wrap="square">
+            <a:normAutofit/>
+          </a:bodyPr>
+          <a:lstStyle/>
+          <a:p>
+            <a:pPr algn="ctr">
+              <a:defRPr sz="1050" b="0">
+                <a:solidFill>
+                  <a:srgbClr val="1F2328"/>
+                </a:solidFill>
+                <a:latin typeface="Aptos"/>
+              </a:defRPr>
+            </a:pPr>
+            <a:r>
+              <a:t>1. DAX</a:t>
+            </a:r>
+            <a:br/>
+            <a:r>
+              <a:t>0.4082</a:t>
+            </a:r>
+          </a:p>
+        </p:txBody>
+      </p:sp>
+      <p:sp>
+        <p:nvSpPr>
+          <p:cNvPr id="19" name="TextBox 18"/>
+          <p:cNvSpPr txBox="1"/>
+          <p:nvPr/>
+        </p:nvSpPr>
+        <p:spPr>
+          <a:xfrm>
+            <a:off x="9921240" y="2697480"/>
+            <a:ext cx="1645920" cy="475488"/>
+          </a:xfrm>
+          <a:prstGeom prst="rect">
+            <a:avLst/>
+          </a:prstGeom>
+          <a:noFill/>
+        </p:spPr>
+        <p:txBody>
+          <a:bodyPr wrap="square">
+            <a:normAutofit/>
+          </a:bodyPr>
+          <a:lstStyle/>
+          <a:p>
+            <a:pPr algn="ctr">
+              <a:defRPr sz="1050" b="0">
+                <a:solidFill>
+                  <a:srgbClr val="1F2328"/>
+                </a:solidFill>
+                <a:latin typeface="Aptos"/>
+              </a:defRPr>
+            </a:pPr>
+            <a:r>
+              <a:t>2. SP500</a:t>
+            </a:r>
+            <a:br/>
+            <a:r>
+              <a:t>0.4082</a:t>
+            </a:r>
+          </a:p>
+        </p:txBody>
+      </p:sp>
+      <p:sp>
+        <p:nvSpPr>
+          <p:cNvPr id="20" name="TextBox 19"/>
+          <p:cNvSpPr txBox="1"/>
+          <p:nvPr/>
+        </p:nvSpPr>
+        <p:spPr>
+          <a:xfrm>
+            <a:off x="9921240" y="3337560"/>
+            <a:ext cx="1645920" cy="475488"/>
+          </a:xfrm>
+          <a:prstGeom prst="rect">
+            <a:avLst/>
+          </a:prstGeom>
+          <a:noFill/>
+        </p:spPr>
+        <p:txBody>
+          <a:bodyPr wrap="square">
+            <a:normAutofit/>
+          </a:bodyPr>
+          <a:lstStyle/>
+          <a:p>
+            <a:pPr algn="ctr">
+              <a:defRPr sz="1050" b="0">
+                <a:solidFill>
+                  <a:srgbClr val="1F2328"/>
+                </a:solidFill>
+                <a:latin typeface="Aptos"/>
+              </a:defRPr>
+            </a:pPr>
+            <a:r>
+              <a:t>3. FTSE100</a:t>
+            </a:r>
+            <a:br/>
+            <a:r>
+              <a:t>0.4082</a:t>
+            </a:r>
+          </a:p>
+        </p:txBody>
+      </p:sp>
+      <p:sp>
+        <p:nvSpPr>
+          <p:cNvPr id="21" name="TextBox 20"/>
+          <p:cNvSpPr txBox="1"/>
+          <p:nvPr/>
+        </p:nvSpPr>
+        <p:spPr>
+          <a:xfrm>
+            <a:off x="9921240" y="3977640"/>
+            <a:ext cx="1645920" cy="475488"/>
+          </a:xfrm>
+          <a:prstGeom prst="rect">
+            <a:avLst/>
+          </a:prstGeom>
+          <a:noFill/>
+        </p:spPr>
+        <p:txBody>
+          <a:bodyPr wrap="square">
+            <a:normAutofit/>
+          </a:bodyPr>
+          <a:lstStyle/>
+          <a:p>
+            <a:pPr algn="ctr">
+              <a:defRPr sz="1050" b="0">
+                <a:solidFill>
+                  <a:srgbClr val="1F2328"/>
+                </a:solidFill>
+                <a:latin typeface="Aptos"/>
+              </a:defRPr>
+            </a:pPr>
+            <a:r>
+              <a:t>4. VIX</a:t>
+            </a:r>
+            <a:br/>
+            <a:r>
+              <a:t>0.4082</a:t>
+            </a:r>
+          </a:p>
+        </p:txBody>
+      </p:sp>
+      <p:sp>
+        <p:nvSpPr>
+          <p:cNvPr id="22" name="TextBox 21"/>
+          <p:cNvSpPr txBox="1"/>
+          <p:nvPr/>
+        </p:nvSpPr>
+        <p:spPr>
+          <a:xfrm>
+            <a:off x="9921240" y="4617720"/>
+            <a:ext cx="1645920" cy="475488"/>
+          </a:xfrm>
+          <a:prstGeom prst="rect">
+            <a:avLst/>
+          </a:prstGeom>
+          <a:noFill/>
+        </p:spPr>
+        <p:txBody>
+          <a:bodyPr wrap="square">
+            <a:normAutofit/>
+          </a:bodyPr>
+          <a:lstStyle/>
+          <a:p>
+            <a:pPr algn="ctr">
+              <a:defRPr sz="1050" b="0">
+                <a:solidFill>
+                  <a:srgbClr val="1F2328"/>
+                </a:solidFill>
+                <a:latin typeface="Aptos"/>
+              </a:defRPr>
+            </a:pPr>
+            <a:r>
+              <a:t>5. Dow_Jones</a:t>
+            </a:r>
+            <a:br/>
+            <a:r>
+              <a:t>0.4082</a:t>
+            </a:r>
+          </a:p>
+        </p:txBody>
+      </p:sp>
+      <p:sp>
+        <p:nvSpPr>
+          <p:cNvPr id="23" name="TextBox 22"/>
+          <p:cNvSpPr txBox="1"/>
+          <p:nvPr/>
+        </p:nvSpPr>
+        <p:spPr>
+          <a:xfrm>
+            <a:off x="5989320" y="5532120"/>
+            <a:ext cx="5394960" cy="457200"/>
+          </a:xfrm>
+          <a:prstGeom prst="rect">
+            <a:avLst/>
+          </a:prstGeom>
+          <a:noFill/>
+        </p:spPr>
+        <p:txBody>
+          <a:bodyPr wrap="square">
+            <a:normAutofit/>
+          </a:bodyPr>
+          <a:lstStyle/>
+          <a:p>
+            <a:pPr algn="ctr">
+              <a:defRPr sz="1300" b="1">
+                <a:solidFill>
+                  <a:srgbClr val="1F2328"/>
+                </a:solidFill>
+                <a:latin typeface="Aptos"/>
+              </a:defRPr>
+            </a:pPr>
+            <a:r>
+              <a:t>VIX, betweenness centrality açısından öne çıkarak risk göstergesi rolünü ağ içinde de gösterdi.</a:t>
+            </a:r>
+          </a:p>
+        </p:txBody>
+      </p:sp>
+      <p:sp>
+        <p:nvSpPr>
+          <p:cNvPr id="24" name="TextBox 23"/>
+          <p:cNvSpPr txBox="1"/>
+          <p:nvPr/>
+        </p:nvSpPr>
+        <p:spPr>
+          <a:xfrm>
+            <a:off x="11155680" y="6446520"/>
+            <a:ext cx="548640" cy="228600"/>
+          </a:xfrm>
+          <a:prstGeom prst="rect">
+            <a:avLst/>
+          </a:prstGeom>
+          <a:noFill/>
+        </p:spPr>
+        <p:txBody>
+          <a:bodyPr wrap="square">
+            <a:normAutofit/>
+          </a:bodyPr>
+          <a:lstStyle/>
+          <a:p>
             <a:pPr algn="r">
-              <a:defRPr sz="900">
-                <a:solidFill>
-                  <a:srgbClr val="5C6570"/>
-                </a:solidFill>
+              <a:defRPr sz="900" b="0">
+                <a:solidFill>
+                  <a:srgbClr val="5E6670"/>
+                </a:solidFill>
+                <a:latin typeface="Aptos"/>
               </a:defRPr>
             </a:pPr>
             <a:r>
               <a:t>6</a:t>
+            </a:r>
+          </a:p>
+        </p:txBody>
+      </p:sp>
+    </p:spTree>
+  </p:cSld>
+  <p:clrMapOvr>
+    <a:masterClrMapping/>
+  </p:clrMapOvr>
+</p:sld>
+</file>
+
+<file path=ppt/slides/slide7.xml><?xml version="1.0" encoding="utf-8"?>
+<p:sld xmlns:a="http://schemas.openxmlformats.org/drawingml/2006/main" xmlns:p="http://schemas.openxmlformats.org/presentationml/2006/main" xmlns:r="http://schemas.openxmlformats.org/officeDocument/2006/relationships">
+  <p:cSld>
+    <p:bg>
+      <p:bgPr>
+        <a:solidFill>
+          <a:srgbClr val="F8FAFC"/>
+        </a:solidFill>
+        <a:effectLst/>
+      </p:bgPr>
+    </p:bg>
+    <p:spTree>
+      <p:nvGrpSpPr>
+        <p:cNvPr id="1" name=""/>
+        <p:cNvGrpSpPr/>
+        <p:nvPr/>
+      </p:nvGrpSpPr>
+      <p:grpSpPr/>
+      <p:sp>
+        <p:nvSpPr>
+          <p:cNvPr id="2" name="TextBox 1"/>
+          <p:cNvSpPr txBox="1"/>
+          <p:nvPr/>
+        </p:nvSpPr>
+        <p:spPr>
+          <a:xfrm>
+            <a:off x="502920" y="292608"/>
+            <a:ext cx="11155680" cy="502920"/>
+          </a:xfrm>
+          <a:prstGeom prst="rect">
+            <a:avLst/>
+          </a:prstGeom>
+          <a:noFill/>
+        </p:spPr>
+        <p:txBody>
+          <a:bodyPr wrap="square">
+            <a:normAutofit/>
+          </a:bodyPr>
+          <a:lstStyle/>
+          <a:p>
+            <a:pPr algn="l">
+              <a:defRPr sz="2400" b="1">
+                <a:solidFill>
+                  <a:srgbClr val="1F2328"/>
+                </a:solidFill>
+                <a:latin typeface="Aptos"/>
+              </a:defRPr>
+            </a:pPr>
+            <a:r>
+              <a:t>Topluluklar</a:t>
+            </a:r>
+          </a:p>
+        </p:txBody>
+      </p:sp>
+      <p:sp>
+        <p:nvSpPr>
+          <p:cNvPr id="3" name="Rectangle 2"/>
+          <p:cNvSpPr/>
+          <p:nvPr/>
+        </p:nvSpPr>
+        <p:spPr>
+          <a:xfrm>
+            <a:off x="530352" y="1143000"/>
+            <a:ext cx="11109960" cy="13716"/>
+          </a:xfrm>
+          <a:prstGeom prst="rect">
+            <a:avLst/>
+          </a:prstGeom>
+          <a:solidFill>
+            <a:srgbClr val="DCE1E6"/>
+          </a:solidFill>
+          <a:ln>
+            <a:noFill/>
+          </a:ln>
+        </p:spPr>
+        <p:style>
+          <a:lnRef idx="1">
+            <a:schemeClr val="accent1"/>
+          </a:lnRef>
+          <a:fillRef idx="3">
+            <a:schemeClr val="accent1"/>
+          </a:fillRef>
+          <a:effectRef idx="2">
+            <a:schemeClr val="accent1"/>
+          </a:effectRef>
+          <a:fontRef idx="minor">
+            <a:schemeClr val="lt1"/>
+          </a:fontRef>
+        </p:style>
+        <p:txBody>
+          <a:bodyPr rtlCol="0" anchor="ctr"/>
+          <a:lstStyle/>
+          <a:p>
+            <a:pPr algn="ctr"/>
+          </a:p>
+        </p:txBody>
+      </p:sp>
+      <p:pic>
+        <p:nvPicPr>
+          <p:cNvPr id="4" name="Picture 3" descr="community_network.png"/>
+          <p:cNvPicPr>
+            <a:picLocks noChangeAspect="1"/>
+          </p:cNvPicPr>
+          <p:nvPr/>
+        </p:nvPicPr>
+        <p:blipFill>
+          <a:blip r:embed="rId2"/>
+          <a:stretch>
+            <a:fillRect/>
+          </a:stretch>
+        </p:blipFill>
+        <p:spPr>
+          <a:xfrm>
+            <a:off x="594360" y="1417320"/>
+            <a:ext cx="5806440" cy="4892040"/>
+          </a:xfrm>
+          <a:prstGeom prst="rect">
+            <a:avLst/>
+          </a:prstGeom>
+        </p:spPr>
+      </p:pic>
+      <p:sp>
+        <p:nvSpPr>
+          <p:cNvPr id="5" name="Rounded Rectangle 4"/>
+          <p:cNvSpPr/>
+          <p:nvPr/>
+        </p:nvSpPr>
+        <p:spPr>
+          <a:xfrm>
+            <a:off x="6720840" y="1508760"/>
+            <a:ext cx="4251960" cy="713232"/>
+          </a:xfrm>
+          <a:prstGeom prst="roundRect">
+            <a:avLst/>
+          </a:prstGeom>
+          <a:solidFill>
+            <a:srgbClr val="FFFFFF"/>
+          </a:solidFill>
+          <a:ln>
+            <a:solidFill>
+              <a:srgbClr val="DCE1E6"/>
+            </a:solidFill>
+          </a:ln>
+        </p:spPr>
+        <p:style>
+          <a:lnRef idx="1">
+            <a:schemeClr val="accent1"/>
+          </a:lnRef>
+          <a:fillRef idx="3">
+            <a:schemeClr val="accent1"/>
+          </a:fillRef>
+          <a:effectRef idx="2">
+            <a:schemeClr val="accent1"/>
+          </a:effectRef>
+          <a:fontRef idx="minor">
+            <a:schemeClr val="lt1"/>
+          </a:fontRef>
+        </p:style>
+        <p:txBody>
+          <a:bodyPr rtlCol="0" anchor="ctr" lIns="164592" tIns="64008"/>
+          <a:lstStyle/>
+          <a:p>
+            <a:pPr algn="ctr">
+              <a:defRPr sz="1900" b="1">
+                <a:solidFill>
+                  <a:srgbClr val="1C5691"/>
+                </a:solidFill>
+                <a:latin typeface="Aptos Display"/>
+              </a:defRPr>
+            </a:pPr>
+            <a:r>
+              <a:t>EUR_TRY, USD_TRY</a:t>
+            </a:r>
+          </a:p>
+          <a:p>
+            <a:pPr>
+              <a:defRPr sz="1000">
+                <a:solidFill>
+                  <a:srgbClr val="5E6670"/>
+                </a:solidFill>
+                <a:latin typeface="Aptos"/>
+              </a:defRPr>
+            </a:pPr>
+            <a:r>
+              <a:t>Topluluk 0</a:t>
+            </a:r>
+          </a:p>
+        </p:txBody>
+      </p:sp>
+      <p:sp>
+        <p:nvSpPr>
+          <p:cNvPr id="6" name="Rectangle 5"/>
+          <p:cNvSpPr/>
+          <p:nvPr/>
+        </p:nvSpPr>
+        <p:spPr>
+          <a:xfrm>
+            <a:off x="6720840" y="1508760"/>
+            <a:ext cx="64008" cy="713232"/>
+          </a:xfrm>
+          <a:prstGeom prst="rect">
+            <a:avLst/>
+          </a:prstGeom>
+          <a:solidFill>
+            <a:srgbClr val="1C5691"/>
+          </a:solidFill>
+          <a:ln>
+            <a:noFill/>
+          </a:ln>
+        </p:spPr>
+        <p:style>
+          <a:lnRef idx="1">
+            <a:schemeClr val="accent1"/>
+          </a:lnRef>
+          <a:fillRef idx="3">
+            <a:schemeClr val="accent1"/>
+          </a:fillRef>
+          <a:effectRef idx="2">
+            <a:schemeClr val="accent1"/>
+          </a:effectRef>
+          <a:fontRef idx="minor">
+            <a:schemeClr val="lt1"/>
+          </a:fontRef>
+        </p:style>
+        <p:txBody>
+          <a:bodyPr rtlCol="0" anchor="ctr"/>
+          <a:lstStyle/>
+          <a:p>
+            <a:pPr algn="ctr"/>
+          </a:p>
+        </p:txBody>
+      </p:sp>
+      <p:sp>
+        <p:nvSpPr>
+          <p:cNvPr id="7" name="Rounded Rectangle 6"/>
+          <p:cNvSpPr/>
+          <p:nvPr/>
+        </p:nvSpPr>
+        <p:spPr>
+          <a:xfrm>
+            <a:off x="6720840" y="2423160"/>
+            <a:ext cx="4251960" cy="713232"/>
+          </a:xfrm>
+          <a:prstGeom prst="roundRect">
+            <a:avLst/>
+          </a:prstGeom>
+          <a:solidFill>
+            <a:srgbClr val="FFFFFF"/>
+          </a:solidFill>
+          <a:ln>
+            <a:solidFill>
+              <a:srgbClr val="DCE1E6"/>
+            </a:solidFill>
+          </a:ln>
+        </p:spPr>
+        <p:style>
+          <a:lnRef idx="1">
+            <a:schemeClr val="accent1"/>
+          </a:lnRef>
+          <a:fillRef idx="3">
+            <a:schemeClr val="accent1"/>
+          </a:fillRef>
+          <a:effectRef idx="2">
+            <a:schemeClr val="accent1"/>
+          </a:effectRef>
+          <a:fontRef idx="minor">
+            <a:schemeClr val="lt1"/>
+          </a:fontRef>
+        </p:style>
+        <p:txBody>
+          <a:bodyPr rtlCol="0" anchor="ctr" lIns="164592" tIns="64008"/>
+          <a:lstStyle/>
+          <a:p>
+            <a:pPr algn="ctr">
+              <a:defRPr sz="1900" b="1">
+                <a:solidFill>
+                  <a:srgbClr val="007E80"/>
+                </a:solidFill>
+                <a:latin typeface="Aptos Display"/>
+              </a:defRPr>
+            </a:pPr>
+            <a:r>
+              <a:t>Dollar_Index, Gold, Silver</a:t>
+            </a:r>
+          </a:p>
+          <a:p>
+            <a:pPr>
+              <a:defRPr sz="1000">
+                <a:solidFill>
+                  <a:srgbClr val="5E6670"/>
+                </a:solidFill>
+                <a:latin typeface="Aptos"/>
+              </a:defRPr>
+            </a:pPr>
+            <a:r>
+              <a:t>Topluluk 1</a:t>
+            </a:r>
+          </a:p>
+        </p:txBody>
+      </p:sp>
+      <p:sp>
+        <p:nvSpPr>
+          <p:cNvPr id="8" name="Rectangle 7"/>
+          <p:cNvSpPr/>
+          <p:nvPr/>
+        </p:nvSpPr>
+        <p:spPr>
+          <a:xfrm>
+            <a:off x="6720840" y="2423160"/>
+            <a:ext cx="64008" cy="713232"/>
+          </a:xfrm>
+          <a:prstGeom prst="rect">
+            <a:avLst/>
+          </a:prstGeom>
+          <a:solidFill>
+            <a:srgbClr val="007E80"/>
+          </a:solidFill>
+          <a:ln>
+            <a:noFill/>
+          </a:ln>
+        </p:spPr>
+        <p:style>
+          <a:lnRef idx="1">
+            <a:schemeClr val="accent1"/>
+          </a:lnRef>
+          <a:fillRef idx="3">
+            <a:schemeClr val="accent1"/>
+          </a:fillRef>
+          <a:effectRef idx="2">
+            <a:schemeClr val="accent1"/>
+          </a:effectRef>
+          <a:fontRef idx="minor">
+            <a:schemeClr val="lt1"/>
+          </a:fontRef>
+        </p:style>
+        <p:txBody>
+          <a:bodyPr rtlCol="0" anchor="ctr"/>
+          <a:lstStyle/>
+          <a:p>
+            <a:pPr algn="ctr"/>
+          </a:p>
+        </p:txBody>
+      </p:sp>
+      <p:sp>
+        <p:nvSpPr>
+          <p:cNvPr id="9" name="Rounded Rectangle 8"/>
+          <p:cNvSpPr/>
+          <p:nvPr/>
+        </p:nvSpPr>
+        <p:spPr>
+          <a:xfrm>
+            <a:off x="6720840" y="3337560"/>
+            <a:ext cx="4251960" cy="713232"/>
+          </a:xfrm>
+          <a:prstGeom prst="roundRect">
+            <a:avLst/>
+          </a:prstGeom>
+          <a:solidFill>
+            <a:srgbClr val="FFFFFF"/>
+          </a:solidFill>
+          <a:ln>
+            <a:solidFill>
+              <a:srgbClr val="DCE1E6"/>
+            </a:solidFill>
+          </a:ln>
+        </p:spPr>
+        <p:style>
+          <a:lnRef idx="1">
+            <a:schemeClr val="accent1"/>
+          </a:lnRef>
+          <a:fillRef idx="3">
+            <a:schemeClr val="accent1"/>
+          </a:fillRef>
+          <a:effectRef idx="2">
+            <a:schemeClr val="accent1"/>
+          </a:effectRef>
+          <a:fontRef idx="minor">
+            <a:schemeClr val="lt1"/>
+          </a:fontRef>
+        </p:style>
+        <p:txBody>
+          <a:bodyPr rtlCol="0" anchor="ctr" lIns="164592" tIns="64008"/>
+          <a:lstStyle/>
+          <a:p>
+            <a:pPr algn="ctr">
+              <a:defRPr sz="1900" b="1">
+                <a:solidFill>
+                  <a:srgbClr val="418456"/>
+                </a:solidFill>
+                <a:latin typeface="Aptos Display"/>
+              </a:defRPr>
+            </a:pPr>
+            <a:r>
+              <a:t>DAX, Dow_Jones, FTSE100, NASDAQ, SP500, VIX</a:t>
+            </a:r>
+          </a:p>
+          <a:p>
+            <a:pPr>
+              <a:defRPr sz="1000">
+                <a:solidFill>
+                  <a:srgbClr val="5E6670"/>
+                </a:solidFill>
+                <a:latin typeface="Aptos"/>
+              </a:defRPr>
+            </a:pPr>
+            <a:r>
+              <a:t>Topluluk 2</a:t>
+            </a:r>
+          </a:p>
+        </p:txBody>
+      </p:sp>
+      <p:sp>
+        <p:nvSpPr>
+          <p:cNvPr id="10" name="Rectangle 9"/>
+          <p:cNvSpPr/>
+          <p:nvPr/>
+        </p:nvSpPr>
+        <p:spPr>
+          <a:xfrm>
+            <a:off x="6720840" y="3337560"/>
+            <a:ext cx="64008" cy="713232"/>
+          </a:xfrm>
+          <a:prstGeom prst="rect">
+            <a:avLst/>
+          </a:prstGeom>
+          <a:solidFill>
+            <a:srgbClr val="418456"/>
+          </a:solidFill>
+          <a:ln>
+            <a:noFill/>
+          </a:ln>
+        </p:spPr>
+        <p:style>
+          <a:lnRef idx="1">
+            <a:schemeClr val="accent1"/>
+          </a:lnRef>
+          <a:fillRef idx="3">
+            <a:schemeClr val="accent1"/>
+          </a:fillRef>
+          <a:effectRef idx="2">
+            <a:schemeClr val="accent1"/>
+          </a:effectRef>
+          <a:fontRef idx="minor">
+            <a:schemeClr val="lt1"/>
+          </a:fontRef>
+        </p:style>
+        <p:txBody>
+          <a:bodyPr rtlCol="0" anchor="ctr"/>
+          <a:lstStyle/>
+          <a:p>
+            <a:pPr algn="ctr"/>
+          </a:p>
+        </p:txBody>
+      </p:sp>
+      <p:sp>
+        <p:nvSpPr>
+          <p:cNvPr id="11" name="Rounded Rectangle 10"/>
+          <p:cNvSpPr/>
+          <p:nvPr/>
+        </p:nvSpPr>
+        <p:spPr>
+          <a:xfrm>
+            <a:off x="6720840" y="4251960"/>
+            <a:ext cx="4251960" cy="713232"/>
+          </a:xfrm>
+          <a:prstGeom prst="roundRect">
+            <a:avLst/>
+          </a:prstGeom>
+          <a:solidFill>
+            <a:srgbClr val="FFFFFF"/>
+          </a:solidFill>
+          <a:ln>
+            <a:solidFill>
+              <a:srgbClr val="DCE1E6"/>
+            </a:solidFill>
+          </a:ln>
+        </p:spPr>
+        <p:style>
+          <a:lnRef idx="1">
+            <a:schemeClr val="accent1"/>
+          </a:lnRef>
+          <a:fillRef idx="3">
+            <a:schemeClr val="accent1"/>
+          </a:fillRef>
+          <a:effectRef idx="2">
+            <a:schemeClr val="accent1"/>
+          </a:effectRef>
+          <a:fontRef idx="minor">
+            <a:schemeClr val="lt1"/>
+          </a:fontRef>
+        </p:style>
+        <p:txBody>
+          <a:bodyPr rtlCol="0" anchor="ctr" lIns="164592" tIns="64008"/>
+          <a:lstStyle/>
+          <a:p>
+            <a:pPr algn="ctr">
+              <a:defRPr sz="1900" b="1">
+                <a:solidFill>
+                  <a:srgbClr val="B94242"/>
+                </a:solidFill>
+                <a:latin typeface="Aptos Display"/>
+              </a:defRPr>
+            </a:pPr>
+            <a:r>
+              <a:t>Brent_Oil, WTI_Oil</a:t>
+            </a:r>
+          </a:p>
+          <a:p>
+            <a:pPr>
+              <a:defRPr sz="1000">
+                <a:solidFill>
+                  <a:srgbClr val="5E6670"/>
+                </a:solidFill>
+                <a:latin typeface="Aptos"/>
+              </a:defRPr>
+            </a:pPr>
+            <a:r>
+              <a:t>Topluluk 3</a:t>
+            </a:r>
+          </a:p>
+        </p:txBody>
+      </p:sp>
+      <p:sp>
+        <p:nvSpPr>
+          <p:cNvPr id="12" name="Rectangle 11"/>
+          <p:cNvSpPr/>
+          <p:nvPr/>
+        </p:nvSpPr>
+        <p:spPr>
+          <a:xfrm>
+            <a:off x="6720840" y="4251960"/>
+            <a:ext cx="64008" cy="713232"/>
+          </a:xfrm>
+          <a:prstGeom prst="rect">
+            <a:avLst/>
+          </a:prstGeom>
+          <a:solidFill>
+            <a:srgbClr val="B94242"/>
+          </a:solidFill>
+          <a:ln>
+            <a:noFill/>
+          </a:ln>
+        </p:spPr>
+        <p:style>
+          <a:lnRef idx="1">
+            <a:schemeClr val="accent1"/>
+          </a:lnRef>
+          <a:fillRef idx="3">
+            <a:schemeClr val="accent1"/>
+          </a:fillRef>
+          <a:effectRef idx="2">
+            <a:schemeClr val="accent1"/>
+          </a:effectRef>
+          <a:fontRef idx="minor">
+            <a:schemeClr val="lt1"/>
+          </a:fontRef>
+        </p:style>
+        <p:txBody>
+          <a:bodyPr rtlCol="0" anchor="ctr"/>
+          <a:lstStyle/>
+          <a:p>
+            <a:pPr algn="ctr"/>
+          </a:p>
+        </p:txBody>
+      </p:sp>
+      <p:sp>
+        <p:nvSpPr>
+          <p:cNvPr id="13" name="TextBox 12"/>
+          <p:cNvSpPr txBox="1"/>
+          <p:nvPr/>
+        </p:nvSpPr>
+        <p:spPr>
+          <a:xfrm>
+            <a:off x="6720840" y="5440680"/>
+            <a:ext cx="4297680" cy="685800"/>
+          </a:xfrm>
+          <a:prstGeom prst="rect">
+            <a:avLst/>
+          </a:prstGeom>
+          <a:noFill/>
+        </p:spPr>
+        <p:txBody>
+          <a:bodyPr wrap="square">
+            <a:normAutofit/>
+          </a:bodyPr>
+          <a:lstStyle/>
+          <a:p>
+            <a:pPr algn="ctr">
+              <a:defRPr sz="1350" b="1">
+                <a:solidFill>
+                  <a:srgbClr val="1F2328"/>
+                </a:solidFill>
+                <a:latin typeface="Aptos"/>
+              </a:defRPr>
+            </a:pPr>
+            <a:r>
+              <a:t>Topluluklar finansal segmentlerin ayrışmasını gösterir: hisse-risk grubu, değerli metaller, döviz ve enerji varlıkları ayrı yapılar oluşturdu.</a:t>
+            </a:r>
+          </a:p>
+        </p:txBody>
+      </p:sp>
+      <p:sp>
+        <p:nvSpPr>
+          <p:cNvPr id="14" name="TextBox 13"/>
+          <p:cNvSpPr txBox="1"/>
+          <p:nvPr/>
+        </p:nvSpPr>
+        <p:spPr>
+          <a:xfrm>
+            <a:off x="11155680" y="6446520"/>
+            <a:ext cx="548640" cy="228600"/>
+          </a:xfrm>
+          <a:prstGeom prst="rect">
+            <a:avLst/>
+          </a:prstGeom>
+          <a:noFill/>
+        </p:spPr>
+        <p:txBody>
+          <a:bodyPr wrap="square">
+            <a:normAutofit/>
+          </a:bodyPr>
+          <a:lstStyle/>
+          <a:p>
+            <a:pPr algn="r">
+              <a:defRPr sz="900" b="0">
+                <a:solidFill>
+                  <a:srgbClr val="5E6670"/>
+                </a:solidFill>
+                <a:latin typeface="Aptos"/>
+              </a:defRPr>
+            </a:pPr>
+            <a:r>
+              <a:t>7</a:t>
+            </a:r>
+          </a:p>
+        </p:txBody>
+      </p:sp>
+    </p:spTree>
+  </p:cSld>
+  <p:clrMapOvr>
+    <a:masterClrMapping/>
+  </p:clrMapOvr>
+</p:sld>
+</file>
+
+<file path=ppt/slides/slide8.xml><?xml version="1.0" encoding="utf-8"?>
+<p:sld xmlns:a="http://schemas.openxmlformats.org/drawingml/2006/main" xmlns:p="http://schemas.openxmlformats.org/presentationml/2006/main" xmlns:r="http://schemas.openxmlformats.org/officeDocument/2006/relationships">
+  <p:cSld>
+    <p:bg>
+      <p:bgPr>
+        <a:solidFill>
+          <a:srgbClr val="F8FAFC"/>
+        </a:solidFill>
+        <a:effectLst/>
+      </p:bgPr>
+    </p:bg>
+    <p:spTree>
+      <p:nvGrpSpPr>
+        <p:cNvPr id="1" name=""/>
+        <p:cNvGrpSpPr/>
+        <p:nvPr/>
+      </p:nvGrpSpPr>
+      <p:grpSpPr/>
+      <p:sp>
+        <p:nvSpPr>
+          <p:cNvPr id="2" name="TextBox 1"/>
+          <p:cNvSpPr txBox="1"/>
+          <p:nvPr/>
+        </p:nvSpPr>
+        <p:spPr>
+          <a:xfrm>
+            <a:off x="502920" y="292608"/>
+            <a:ext cx="11155680" cy="502920"/>
+          </a:xfrm>
+          <a:prstGeom prst="rect">
+            <a:avLst/>
+          </a:prstGeom>
+          <a:noFill/>
+        </p:spPr>
+        <p:txBody>
+          <a:bodyPr wrap="square">
+            <a:normAutofit/>
+          </a:bodyPr>
+          <a:lstStyle/>
+          <a:p>
+            <a:pPr algn="l">
+              <a:defRPr sz="2400" b="1">
+                <a:solidFill>
+                  <a:srgbClr val="1F2328"/>
+                </a:solidFill>
+                <a:latin typeface="Aptos"/>
+              </a:defRPr>
+            </a:pPr>
+            <a:r>
+              <a:t>Dayanıklılık ve Genel Sonuç</a:t>
+            </a:r>
+          </a:p>
+        </p:txBody>
+      </p:sp>
+      <p:sp>
+        <p:nvSpPr>
+          <p:cNvPr id="3" name="Rectangle 2"/>
+          <p:cNvSpPr/>
+          <p:nvPr/>
+        </p:nvSpPr>
+        <p:spPr>
+          <a:xfrm>
+            <a:off x="530352" y="1143000"/>
+            <a:ext cx="11109960" cy="13716"/>
+          </a:xfrm>
+          <a:prstGeom prst="rect">
+            <a:avLst/>
+          </a:prstGeom>
+          <a:solidFill>
+            <a:srgbClr val="DCE1E6"/>
+          </a:solidFill>
+          <a:ln>
+            <a:noFill/>
+          </a:ln>
+        </p:spPr>
+        <p:style>
+          <a:lnRef idx="1">
+            <a:schemeClr val="accent1"/>
+          </a:lnRef>
+          <a:fillRef idx="3">
+            <a:schemeClr val="accent1"/>
+          </a:fillRef>
+          <a:effectRef idx="2">
+            <a:schemeClr val="accent1"/>
+          </a:effectRef>
+          <a:fontRef idx="minor">
+            <a:schemeClr val="lt1"/>
+          </a:fontRef>
+        </p:style>
+        <p:txBody>
+          <a:bodyPr rtlCol="0" anchor="ctr"/>
+          <a:lstStyle/>
+          <a:p>
+            <a:pPr algn="ctr"/>
+          </a:p>
+        </p:txBody>
+      </p:sp>
+      <p:sp>
+        <p:nvSpPr>
+          <p:cNvPr id="4" name="Rounded Rectangle 3"/>
+          <p:cNvSpPr/>
+          <p:nvPr/>
+        </p:nvSpPr>
+        <p:spPr>
+          <a:xfrm>
+            <a:off x="731520" y="1508760"/>
+            <a:ext cx="2057400" cy="822960"/>
+          </a:xfrm>
+          <a:prstGeom prst="roundRect">
+            <a:avLst/>
+          </a:prstGeom>
+          <a:solidFill>
+            <a:srgbClr val="FFFFFF"/>
+          </a:solidFill>
+          <a:ln>
+            <a:solidFill>
+              <a:srgbClr val="DCE1E6"/>
+            </a:solidFill>
+          </a:ln>
+        </p:spPr>
+        <p:style>
+          <a:lnRef idx="1">
+            <a:schemeClr val="accent1"/>
+          </a:lnRef>
+          <a:fillRef idx="3">
+            <a:schemeClr val="accent1"/>
+          </a:fillRef>
+          <a:effectRef idx="2">
+            <a:schemeClr val="accent1"/>
+          </a:effectRef>
+          <a:fontRef idx="minor">
+            <a:schemeClr val="lt1"/>
+          </a:fontRef>
+        </p:style>
+        <p:txBody>
+          <a:bodyPr rtlCol="0" anchor="ctr" lIns="164592" tIns="64008"/>
+          <a:lstStyle/>
+          <a:p>
+            <a:pPr algn="ctr">
+              <a:defRPr sz="1900" b="1">
+                <a:solidFill>
+                  <a:srgbClr val="1C5691"/>
+                </a:solidFill>
+                <a:latin typeface="Aptos Display"/>
+              </a:defRPr>
+            </a:pPr>
+            <a:r>
+              <a:t>19</a:t>
+            </a:r>
+          </a:p>
+          <a:p>
+            <a:pPr>
+              <a:defRPr sz="1000">
+                <a:solidFill>
+                  <a:srgbClr val="5E6670"/>
+                </a:solidFill>
+                <a:latin typeface="Aptos"/>
+              </a:defRPr>
+            </a:pPr>
+            <a:r>
+              <a:t>Başlangıç kenar</a:t>
+            </a:r>
+          </a:p>
+        </p:txBody>
+      </p:sp>
+      <p:sp>
+        <p:nvSpPr>
+          <p:cNvPr id="5" name="Rectangle 4"/>
+          <p:cNvSpPr/>
+          <p:nvPr/>
+        </p:nvSpPr>
+        <p:spPr>
+          <a:xfrm>
+            <a:off x="731520" y="1508760"/>
+            <a:ext cx="64008" cy="822960"/>
+          </a:xfrm>
+          <a:prstGeom prst="rect">
+            <a:avLst/>
+          </a:prstGeom>
+          <a:solidFill>
+            <a:srgbClr val="1C5691"/>
+          </a:solidFill>
+          <a:ln>
+            <a:noFill/>
+          </a:ln>
+        </p:spPr>
+        <p:style>
+          <a:lnRef idx="1">
+            <a:schemeClr val="accent1"/>
+          </a:lnRef>
+          <a:fillRef idx="3">
+            <a:schemeClr val="accent1"/>
+          </a:fillRef>
+          <a:effectRef idx="2">
+            <a:schemeClr val="accent1"/>
+          </a:effectRef>
+          <a:fontRef idx="minor">
+            <a:schemeClr val="lt1"/>
+          </a:fontRef>
+        </p:style>
+        <p:txBody>
+          <a:bodyPr rtlCol="0" anchor="ctr"/>
+          <a:lstStyle/>
+          <a:p>
+            <a:pPr algn="ctr"/>
+          </a:p>
+        </p:txBody>
+      </p:sp>
+      <p:sp>
+        <p:nvSpPr>
+          <p:cNvPr id="6" name="Rounded Rectangle 5"/>
+          <p:cNvSpPr/>
+          <p:nvPr/>
+        </p:nvSpPr>
+        <p:spPr>
+          <a:xfrm>
+            <a:off x="3154680" y="1508760"/>
+            <a:ext cx="2057400" cy="822960"/>
+          </a:xfrm>
+          <a:prstGeom prst="roundRect">
+            <a:avLst/>
+          </a:prstGeom>
+          <a:solidFill>
+            <a:srgbClr val="FFFFFF"/>
+          </a:solidFill>
+          <a:ln>
+            <a:solidFill>
+              <a:srgbClr val="DCE1E6"/>
+            </a:solidFill>
+          </a:ln>
+        </p:spPr>
+        <p:style>
+          <a:lnRef idx="1">
+            <a:schemeClr val="accent1"/>
+          </a:lnRef>
+          <a:fillRef idx="3">
+            <a:schemeClr val="accent1"/>
+          </a:fillRef>
+          <a:effectRef idx="2">
+            <a:schemeClr val="accent1"/>
+          </a:effectRef>
+          <a:fontRef idx="minor">
+            <a:schemeClr val="lt1"/>
+          </a:fontRef>
+        </p:style>
+        <p:txBody>
+          <a:bodyPr rtlCol="0" anchor="ctr" lIns="164592" tIns="64008"/>
+          <a:lstStyle/>
+          <a:p>
+            <a:pPr algn="ctr">
+              <a:defRPr sz="1900" b="1">
+                <a:solidFill>
+                  <a:srgbClr val="007E80"/>
+                </a:solidFill>
+                <a:latin typeface="Aptos Display"/>
+              </a:defRPr>
+            </a:pPr>
+            <a:r>
+              <a:t>14</a:t>
+            </a:r>
+          </a:p>
+          <a:p>
+            <a:pPr>
+              <a:defRPr sz="1000">
+                <a:solidFill>
+                  <a:srgbClr val="5E6670"/>
+                </a:solidFill>
+                <a:latin typeface="Aptos"/>
+              </a:defRPr>
+            </a:pPr>
+            <a:r>
+              <a:t>SP500 çıkarılınca</a:t>
+            </a:r>
+          </a:p>
+        </p:txBody>
+      </p:sp>
+      <p:sp>
+        <p:nvSpPr>
+          <p:cNvPr id="7" name="Rectangle 6"/>
+          <p:cNvSpPr/>
+          <p:nvPr/>
+        </p:nvSpPr>
+        <p:spPr>
+          <a:xfrm>
+            <a:off x="3154680" y="1508760"/>
+            <a:ext cx="64008" cy="822960"/>
+          </a:xfrm>
+          <a:prstGeom prst="rect">
+            <a:avLst/>
+          </a:prstGeom>
+          <a:solidFill>
+            <a:srgbClr val="007E80"/>
+          </a:solidFill>
+          <a:ln>
+            <a:noFill/>
+          </a:ln>
+        </p:spPr>
+        <p:style>
+          <a:lnRef idx="1">
+            <a:schemeClr val="accent1"/>
+          </a:lnRef>
+          <a:fillRef idx="3">
+            <a:schemeClr val="accent1"/>
+          </a:fillRef>
+          <a:effectRef idx="2">
+            <a:schemeClr val="accent1"/>
+          </a:effectRef>
+          <a:fontRef idx="minor">
+            <a:schemeClr val="lt1"/>
+          </a:fontRef>
+        </p:style>
+        <p:txBody>
+          <a:bodyPr rtlCol="0" anchor="ctr"/>
+          <a:lstStyle/>
+          <a:p>
+            <a:pPr algn="ctr"/>
+          </a:p>
+        </p:txBody>
+      </p:sp>
+      <p:sp>
+        <p:nvSpPr>
+          <p:cNvPr id="8" name="Rounded Rectangle 7"/>
+          <p:cNvSpPr/>
+          <p:nvPr/>
+        </p:nvSpPr>
+        <p:spPr>
+          <a:xfrm>
+            <a:off x="5577840" y="1508760"/>
+            <a:ext cx="2057400" cy="822960"/>
+          </a:xfrm>
+          <a:prstGeom prst="roundRect">
+            <a:avLst/>
+          </a:prstGeom>
+          <a:solidFill>
+            <a:srgbClr val="FFFFFF"/>
+          </a:solidFill>
+          <a:ln>
+            <a:solidFill>
+              <a:srgbClr val="DCE1E6"/>
+            </a:solidFill>
+          </a:ln>
+        </p:spPr>
+        <p:style>
+          <a:lnRef idx="1">
+            <a:schemeClr val="accent1"/>
+          </a:lnRef>
+          <a:fillRef idx="3">
+            <a:schemeClr val="accent1"/>
+          </a:fillRef>
+          <a:effectRef idx="2">
+            <a:schemeClr val="accent1"/>
+          </a:effectRef>
+          <a:fontRef idx="minor">
+            <a:schemeClr val="lt1"/>
+          </a:fontRef>
+        </p:style>
+        <p:txBody>
+          <a:bodyPr rtlCol="0" anchor="ctr" lIns="164592" tIns="64008"/>
+          <a:lstStyle/>
+          <a:p>
+            <a:pPr algn="ctr">
+              <a:defRPr sz="1900" b="1">
+                <a:solidFill>
+                  <a:srgbClr val="B94242"/>
+                </a:solidFill>
+                <a:latin typeface="Aptos Display"/>
+              </a:defRPr>
+            </a:pPr>
+            <a:r>
+              <a:t>14</a:t>
+            </a:r>
+          </a:p>
+          <a:p>
+            <a:pPr>
+              <a:defRPr sz="1000">
+                <a:solidFill>
+                  <a:srgbClr val="5E6670"/>
+                </a:solidFill>
+                <a:latin typeface="Aptos"/>
+              </a:defRPr>
+            </a:pPr>
+            <a:r>
+              <a:t>VIX çıkarılınca</a:t>
+            </a:r>
+          </a:p>
+        </p:txBody>
+      </p:sp>
+      <p:sp>
+        <p:nvSpPr>
+          <p:cNvPr id="9" name="Rectangle 8"/>
+          <p:cNvSpPr/>
+          <p:nvPr/>
+        </p:nvSpPr>
+        <p:spPr>
+          <a:xfrm>
+            <a:off x="5577840" y="1508760"/>
+            <a:ext cx="64008" cy="822960"/>
+          </a:xfrm>
+          <a:prstGeom prst="rect">
+            <a:avLst/>
+          </a:prstGeom>
+          <a:solidFill>
+            <a:srgbClr val="B94242"/>
+          </a:solidFill>
+          <a:ln>
+            <a:noFill/>
+          </a:ln>
+        </p:spPr>
+        <p:style>
+          <a:lnRef idx="1">
+            <a:schemeClr val="accent1"/>
+          </a:lnRef>
+          <a:fillRef idx="3">
+            <a:schemeClr val="accent1"/>
+          </a:fillRef>
+          <a:effectRef idx="2">
+            <a:schemeClr val="accent1"/>
+          </a:effectRef>
+          <a:fontRef idx="minor">
+            <a:schemeClr val="lt1"/>
+          </a:fontRef>
+        </p:style>
+        <p:txBody>
+          <a:bodyPr rtlCol="0" anchor="ctr"/>
+          <a:lstStyle/>
+          <a:p>
+            <a:pPr algn="ctr"/>
+          </a:p>
+        </p:txBody>
+      </p:sp>
+      <p:sp>
+        <p:nvSpPr>
+          <p:cNvPr id="10" name="Rounded Rectangle 9"/>
+          <p:cNvSpPr/>
+          <p:nvPr/>
+        </p:nvSpPr>
+        <p:spPr>
+          <a:xfrm>
+            <a:off x="8001000" y="1508760"/>
+            <a:ext cx="2057400" cy="822960"/>
+          </a:xfrm>
+          <a:prstGeom prst="roundRect">
+            <a:avLst/>
+          </a:prstGeom>
+          <a:solidFill>
+            <a:srgbClr val="FFFFFF"/>
+          </a:solidFill>
+          <a:ln>
+            <a:solidFill>
+              <a:srgbClr val="DCE1E6"/>
+            </a:solidFill>
+          </a:ln>
+        </p:spPr>
+        <p:style>
+          <a:lnRef idx="1">
+            <a:schemeClr val="accent1"/>
+          </a:lnRef>
+          <a:fillRef idx="3">
+            <a:schemeClr val="accent1"/>
+          </a:fillRef>
+          <a:effectRef idx="2">
+            <a:schemeClr val="accent1"/>
+          </a:effectRef>
+          <a:fontRef idx="minor">
+            <a:schemeClr val="lt1"/>
+          </a:fontRef>
+        </p:style>
+        <p:txBody>
+          <a:bodyPr rtlCol="0" anchor="ctr" lIns="164592" tIns="64008"/>
+          <a:lstStyle/>
+          <a:p>
+            <a:pPr algn="ctr">
+              <a:defRPr sz="1900" b="1">
+                <a:solidFill>
+                  <a:srgbClr val="418456"/>
+                </a:solidFill>
+                <a:latin typeface="Aptos Display"/>
+              </a:defRPr>
+            </a:pPr>
+            <a:r>
+              <a:t>5</a:t>
+            </a:r>
+          </a:p>
+          <a:p>
+            <a:pPr>
+              <a:defRPr sz="1000">
+                <a:solidFill>
+                  <a:srgbClr val="5E6670"/>
+                </a:solidFill>
+                <a:latin typeface="Aptos"/>
+              </a:defRPr>
+            </a:pPr>
+            <a:r>
+              <a:t>En büyük bileşen</a:t>
+            </a:r>
+          </a:p>
+        </p:txBody>
+      </p:sp>
+      <p:sp>
+        <p:nvSpPr>
+          <p:cNvPr id="11" name="Rectangle 10"/>
+          <p:cNvSpPr/>
+          <p:nvPr/>
+        </p:nvSpPr>
+        <p:spPr>
+          <a:xfrm>
+            <a:off x="8001000" y="1508760"/>
+            <a:ext cx="64008" cy="822960"/>
+          </a:xfrm>
+          <a:prstGeom prst="rect">
+            <a:avLst/>
+          </a:prstGeom>
+          <a:solidFill>
+            <a:srgbClr val="418456"/>
+          </a:solidFill>
+          <a:ln>
+            <a:noFill/>
+          </a:ln>
+        </p:spPr>
+        <p:style>
+          <a:lnRef idx="1">
+            <a:schemeClr val="accent1"/>
+          </a:lnRef>
+          <a:fillRef idx="3">
+            <a:schemeClr val="accent1"/>
+          </a:fillRef>
+          <a:effectRef idx="2">
+            <a:schemeClr val="accent1"/>
+          </a:effectRef>
+          <a:fontRef idx="minor">
+            <a:schemeClr val="lt1"/>
+          </a:fontRef>
+        </p:style>
+        <p:txBody>
+          <a:bodyPr rtlCol="0" anchor="ctr"/>
+          <a:lstStyle/>
+          <a:p>
+            <a:pPr algn="ctr"/>
+          </a:p>
+        </p:txBody>
+      </p:sp>
+      <p:sp>
+        <p:nvSpPr>
+          <p:cNvPr id="12" name="TextBox 11"/>
+          <p:cNvSpPr txBox="1"/>
+          <p:nvPr/>
+        </p:nvSpPr>
+        <p:spPr>
+          <a:xfrm>
+            <a:off x="914400" y="2880360"/>
+            <a:ext cx="5486400" cy="2468880"/>
+          </a:xfrm>
+          <a:prstGeom prst="rect">
+            <a:avLst/>
+          </a:prstGeom>
+          <a:noFill/>
+        </p:spPr>
+        <p:txBody>
+          <a:bodyPr wrap="square">
+            <a:normAutofit/>
+          </a:bodyPr>
+          <a:lstStyle/>
+          <a:p>
+            <a:pPr>
+              <a:spcAft>
+                <a:spcPts val="800"/>
+              </a:spcAft>
+              <a:defRPr sz="1600">
+                <a:solidFill>
+                  <a:srgbClr val="1F2328"/>
+                </a:solidFill>
+                <a:latin typeface="Aptos"/>
+              </a:defRPr>
+            </a:pPr>
+            <a:r>
+              <a:t>- Merkezi düğüm çıkarma kenar sayısını azaltıyor.</a:t>
+            </a:r>
+          </a:p>
+          <a:p>
+            <a:pPr>
+              <a:spcAft>
+                <a:spcPts val="800"/>
+              </a:spcAft>
+              <a:defRPr sz="1600">
+                <a:solidFill>
+                  <a:srgbClr val="1F2328"/>
+                </a:solidFill>
+                <a:latin typeface="Aptos"/>
+              </a:defRPr>
+            </a:pPr>
+            <a:r>
+              <a:t>- Ağ tamamen çökmüyor; ancak çekirdek yapı zayıflıyor.</a:t>
+            </a:r>
+          </a:p>
+          <a:p>
+            <a:pPr>
+              <a:spcAft>
+                <a:spcPts val="800"/>
+              </a:spcAft>
+              <a:defRPr sz="1600">
+                <a:solidFill>
+                  <a:srgbClr val="1F2328"/>
+                </a:solidFill>
+                <a:latin typeface="Aptos"/>
+              </a:defRPr>
+            </a:pPr>
+            <a:r>
+              <a:t>- Hisse senedi endeksleri ve VIX en dikkat çeken merkez yapıyı oluşturuyor.</a:t>
+            </a:r>
+          </a:p>
+          <a:p>
+            <a:pPr>
+              <a:spcAft>
+                <a:spcPts val="800"/>
+              </a:spcAft>
+              <a:defRPr sz="1600">
+                <a:solidFill>
+                  <a:srgbClr val="1F2328"/>
+                </a:solidFill>
+                <a:latin typeface="Aptos"/>
+              </a:defRPr>
+            </a:pPr>
+            <a:r>
+              <a:t>- Sosyal ağ analizi finansal varlıkları sistem olarak okumayı kolaylaştırıyor.</a:t>
+            </a:r>
+          </a:p>
+        </p:txBody>
+      </p:sp>
+      <p:pic>
+        <p:nvPicPr>
+          <p:cNvPr id="13" name="Picture 12" descr="degree_distribution.png"/>
+          <p:cNvPicPr>
+            <a:picLocks noChangeAspect="1"/>
+          </p:cNvPicPr>
+          <p:nvPr/>
+        </p:nvPicPr>
+        <p:blipFill>
+          <a:blip r:embed="rId2"/>
+          <a:stretch>
+            <a:fillRect/>
+          </a:stretch>
+        </p:blipFill>
+        <p:spPr>
+          <a:xfrm>
+            <a:off x="6903720" y="2788920"/>
+            <a:ext cx="4206240" cy="2606040"/>
+          </a:xfrm>
+          <a:prstGeom prst="rect">
+            <a:avLst/>
+          </a:prstGeom>
+        </p:spPr>
+      </p:pic>
+      <p:sp>
+        <p:nvSpPr>
+          <p:cNvPr id="14" name="TextBox 13"/>
+          <p:cNvSpPr txBox="1"/>
+          <p:nvPr/>
+        </p:nvSpPr>
+        <p:spPr>
+          <a:xfrm>
+            <a:off x="11155680" y="6446520"/>
+            <a:ext cx="548640" cy="228600"/>
+          </a:xfrm>
+          <a:prstGeom prst="rect">
+            <a:avLst/>
+          </a:prstGeom>
+          <a:noFill/>
+        </p:spPr>
+        <p:txBody>
+          <a:bodyPr wrap="square">
+            <a:normAutofit/>
+          </a:bodyPr>
+          <a:lstStyle/>
+          <a:p>
+            <a:pPr algn="r">
+              <a:defRPr sz="900" b="0">
+                <a:solidFill>
+                  <a:srgbClr val="5E6670"/>
+                </a:solidFill>
+                <a:latin typeface="Aptos"/>
+              </a:defRPr>
+            </a:pPr>
+            <a:r>
+              <a:t>8</a:t>
             </a:r>
           </a:p>
         </p:txBody>

--- a/report/finansal_ag_analizi_sunum.pptx
+++ b/report/finansal_ag_analizi_sunum.pptx
@@ -10,13 +10,14 @@
     <p:sldId id="258" r:id="rId4"/>
     <p:sldId id="265" r:id="rId5"/>
     <p:sldId id="259" r:id="rId6"/>
-    <p:sldId id="260" r:id="rId7"/>
-    <p:sldId id="266" r:id="rId8"/>
-    <p:sldId id="261" r:id="rId9"/>
-    <p:sldId id="267" r:id="rId10"/>
-    <p:sldId id="262" r:id="rId11"/>
-    <p:sldId id="263" r:id="rId12"/>
-    <p:sldId id="264" r:id="rId13"/>
+    <p:sldId id="268" r:id="rId7"/>
+    <p:sldId id="260" r:id="rId8"/>
+    <p:sldId id="266" r:id="rId9"/>
+    <p:sldId id="261" r:id="rId10"/>
+    <p:sldId id="267" r:id="rId11"/>
+    <p:sldId id="262" r:id="rId12"/>
+    <p:sldId id="263" r:id="rId13"/>
+    <p:sldId id="264" r:id="rId14"/>
   </p:sldIdLst>
   <p:sldSz cx="12192000" cy="6858000"/>
   <p:notesSz cx="6858000" cy="9144000"/>
@@ -313,7 +314,7 @@
           <a:p>
             <a:fld id="{5BCAD085-E8A6-8845-BD4E-CB4CCA059FC4}" type="datetimeFigureOut">
               <a:rPr lang="en-US" smtClean="0"/>
-              <a:t>5/18/2026</a:t>
+              <a:t>5/22/2026</a:t>
             </a:fld>
             <a:endParaRPr lang="en-US"/>
           </a:p>
@@ -481,7 +482,7 @@
           <a:p>
             <a:fld id="{5BCAD085-E8A6-8845-BD4E-CB4CCA059FC4}" type="datetimeFigureOut">
               <a:rPr lang="en-US" smtClean="0"/>
-              <a:t>5/18/2026</a:t>
+              <a:t>5/22/2026</a:t>
             </a:fld>
             <a:endParaRPr lang="en-US"/>
           </a:p>
@@ -659,7 +660,7 @@
           <a:p>
             <a:fld id="{5BCAD085-E8A6-8845-BD4E-CB4CCA059FC4}" type="datetimeFigureOut">
               <a:rPr lang="en-US" smtClean="0"/>
-              <a:t>5/18/2026</a:t>
+              <a:t>5/22/2026</a:t>
             </a:fld>
             <a:endParaRPr lang="en-US"/>
           </a:p>
@@ -827,7 +828,7 @@
           <a:p>
             <a:fld id="{5BCAD085-E8A6-8845-BD4E-CB4CCA059FC4}" type="datetimeFigureOut">
               <a:rPr lang="en-US" smtClean="0"/>
-              <a:t>5/18/2026</a:t>
+              <a:t>5/22/2026</a:t>
             </a:fld>
             <a:endParaRPr lang="en-US"/>
           </a:p>
@@ -1072,7 +1073,7 @@
           <a:p>
             <a:fld id="{5BCAD085-E8A6-8845-BD4E-CB4CCA059FC4}" type="datetimeFigureOut">
               <a:rPr lang="en-US" smtClean="0"/>
-              <a:t>5/18/2026</a:t>
+              <a:t>5/22/2026</a:t>
             </a:fld>
             <a:endParaRPr lang="en-US"/>
           </a:p>
@@ -1357,7 +1358,7 @@
           <a:p>
             <a:fld id="{5BCAD085-E8A6-8845-BD4E-CB4CCA059FC4}" type="datetimeFigureOut">
               <a:rPr lang="en-US" smtClean="0"/>
-              <a:t>5/18/2026</a:t>
+              <a:t>5/22/2026</a:t>
             </a:fld>
             <a:endParaRPr lang="en-US"/>
           </a:p>
@@ -1776,7 +1777,7 @@
           <a:p>
             <a:fld id="{5BCAD085-E8A6-8845-BD4E-CB4CCA059FC4}" type="datetimeFigureOut">
               <a:rPr lang="en-US" smtClean="0"/>
-              <a:t>5/18/2026</a:t>
+              <a:t>5/22/2026</a:t>
             </a:fld>
             <a:endParaRPr lang="en-US"/>
           </a:p>
@@ -1893,7 +1894,7 @@
           <a:p>
             <a:fld id="{5BCAD085-E8A6-8845-BD4E-CB4CCA059FC4}" type="datetimeFigureOut">
               <a:rPr lang="en-US" smtClean="0"/>
-              <a:t>5/18/2026</a:t>
+              <a:t>5/22/2026</a:t>
             </a:fld>
             <a:endParaRPr lang="en-US"/>
           </a:p>
@@ -1988,7 +1989,7 @@
           <a:p>
             <a:fld id="{5BCAD085-E8A6-8845-BD4E-CB4CCA059FC4}" type="datetimeFigureOut">
               <a:rPr lang="en-US" smtClean="0"/>
-              <a:t>5/18/2026</a:t>
+              <a:t>5/22/2026</a:t>
             </a:fld>
             <a:endParaRPr lang="en-US"/>
           </a:p>
@@ -2263,7 +2264,7 @@
           <a:p>
             <a:fld id="{5BCAD085-E8A6-8845-BD4E-CB4CCA059FC4}" type="datetimeFigureOut">
               <a:rPr lang="en-US" smtClean="0"/>
-              <a:t>5/18/2026</a:t>
+              <a:t>5/22/2026</a:t>
             </a:fld>
             <a:endParaRPr lang="en-US"/>
           </a:p>
@@ -2515,7 +2516,7 @@
           <a:p>
             <a:fld id="{5BCAD085-E8A6-8845-BD4E-CB4CCA059FC4}" type="datetimeFigureOut">
               <a:rPr lang="en-US" smtClean="0"/>
-              <a:t>5/18/2026</a:t>
+              <a:t>5/22/2026</a:t>
             </a:fld>
             <a:endParaRPr lang="en-US"/>
           </a:p>
@@ -2726,7 +2727,7 @@
           <a:p>
             <a:fld id="{5BCAD085-E8A6-8845-BD4E-CB4CCA059FC4}" type="datetimeFigureOut">
               <a:rPr lang="en-US" smtClean="0"/>
-              <a:t>5/18/2026</a:t>
+              <a:t>5/22/2026</a:t>
             </a:fld>
             <a:endParaRPr lang="en-US"/>
           </a:p>
@@ -3090,7 +3091,9 @@
     <p:bg>
       <p:bgPr>
         <a:solidFill>
-          <a:srgbClr val="142434"/>
+          <a:schemeClr val="bg1">
+            <a:lumMod val="85000"/>
+          </a:schemeClr>
         </a:solidFill>
         <a:effectLst/>
       </p:bgPr>
@@ -3236,58 +3239,212 @@
               </a:defRPr>
             </a:pPr>
             <a:r>
-              <a:rPr sz="3600" err="1"/>
+              <a:rPr sz="3600" err="1">
+                <a:solidFill>
+                  <a:srgbClr val="002060"/>
+                </a:solidFill>
+                <a:effectLst>
+                  <a:outerShdw blurRad="38100" dist="38100" dir="2700000" algn="tl">
+                    <a:srgbClr val="000000">
+                      <a:alpha val="43137"/>
+                    </a:srgbClr>
+                  </a:outerShdw>
+                </a:effectLst>
+              </a:rPr>
               <a:t>Finansal</a:t>
             </a:r>
             <a:r>
-              <a:rPr sz="3600"/>
+              <a:rPr sz="3600">
+                <a:solidFill>
+                  <a:srgbClr val="002060"/>
+                </a:solidFill>
+                <a:effectLst>
+                  <a:outerShdw blurRad="38100" dist="38100" dir="2700000" algn="tl">
+                    <a:srgbClr val="000000">
+                      <a:alpha val="43137"/>
+                    </a:srgbClr>
+                  </a:outerShdw>
+                </a:effectLst>
+              </a:rPr>
               <a:t> </a:t>
             </a:r>
             <a:r>
-              <a:rPr sz="3600" err="1"/>
+              <a:rPr sz="3600" err="1">
+                <a:solidFill>
+                  <a:srgbClr val="002060"/>
+                </a:solidFill>
+                <a:effectLst>
+                  <a:outerShdw blurRad="38100" dist="38100" dir="2700000" algn="tl">
+                    <a:srgbClr val="000000">
+                      <a:alpha val="43137"/>
+                    </a:srgbClr>
+                  </a:outerShdw>
+                </a:effectLst>
+              </a:rPr>
               <a:t>Varlıklar</a:t>
             </a:r>
             <a:r>
-              <a:rPr sz="3600"/>
+              <a:rPr sz="3600">
+                <a:solidFill>
+                  <a:srgbClr val="002060"/>
+                </a:solidFill>
+                <a:effectLst>
+                  <a:outerShdw blurRad="38100" dist="38100" dir="2700000" algn="tl">
+                    <a:srgbClr val="000000">
+                      <a:alpha val="43137"/>
+                    </a:srgbClr>
+                  </a:outerShdw>
+                </a:effectLst>
+              </a:rPr>
               <a:t> </a:t>
             </a:r>
             <a:r>
-              <a:rPr sz="3600" err="1"/>
+              <a:rPr sz="3600" err="1">
+                <a:solidFill>
+                  <a:srgbClr val="002060"/>
+                </a:solidFill>
+                <a:effectLst>
+                  <a:outerShdw blurRad="38100" dist="38100" dir="2700000" algn="tl">
+                    <a:srgbClr val="000000">
+                      <a:alpha val="43137"/>
+                    </a:srgbClr>
+                  </a:outerShdw>
+                </a:effectLst>
+              </a:rPr>
               <a:t>Arasındaki</a:t>
             </a:r>
             <a:r>
-              <a:rPr sz="3600"/>
+              <a:rPr sz="3600">
+                <a:solidFill>
+                  <a:srgbClr val="002060"/>
+                </a:solidFill>
+                <a:effectLst>
+                  <a:outerShdw blurRad="38100" dist="38100" dir="2700000" algn="tl">
+                    <a:srgbClr val="000000">
+                      <a:alpha val="43137"/>
+                    </a:srgbClr>
+                  </a:outerShdw>
+                </a:effectLst>
+              </a:rPr>
               <a:t> </a:t>
             </a:r>
             <a:r>
-              <a:rPr lang="tr-TR" sz="3600" noProof="0"/>
+              <a:rPr lang="tr-TR" sz="3600" noProof="0">
+                <a:solidFill>
+                  <a:srgbClr val="002060"/>
+                </a:solidFill>
+                <a:effectLst>
+                  <a:outerShdw blurRad="38100" dist="38100" dir="2700000" algn="tl">
+                    <a:srgbClr val="000000">
+                      <a:alpha val="43137"/>
+                    </a:srgbClr>
+                  </a:outerShdw>
+                </a:effectLst>
+              </a:rPr>
               <a:t>İlişkilerin</a:t>
             </a:r>
             <a:r>
-              <a:rPr sz="3600"/>
+              <a:rPr sz="3600">
+                <a:solidFill>
+                  <a:srgbClr val="002060"/>
+                </a:solidFill>
+                <a:effectLst>
+                  <a:outerShdw blurRad="38100" dist="38100" dir="2700000" algn="tl">
+                    <a:srgbClr val="000000">
+                      <a:alpha val="43137"/>
+                    </a:srgbClr>
+                  </a:outerShdw>
+                </a:effectLst>
+              </a:rPr>
               <a:t> </a:t>
             </a:r>
             <a:r>
-              <a:rPr sz="3600" err="1"/>
+              <a:rPr sz="3600" err="1">
+                <a:solidFill>
+                  <a:srgbClr val="002060"/>
+                </a:solidFill>
+                <a:effectLst>
+                  <a:outerShdw blurRad="38100" dist="38100" dir="2700000" algn="tl">
+                    <a:srgbClr val="000000">
+                      <a:alpha val="43137"/>
+                    </a:srgbClr>
+                  </a:outerShdw>
+                </a:effectLst>
+              </a:rPr>
               <a:t>Sosyal</a:t>
             </a:r>
             <a:r>
-              <a:rPr sz="3600"/>
+              <a:rPr sz="3600">
+                <a:solidFill>
+                  <a:srgbClr val="002060"/>
+                </a:solidFill>
+                <a:effectLst>
+                  <a:outerShdw blurRad="38100" dist="38100" dir="2700000" algn="tl">
+                    <a:srgbClr val="000000">
+                      <a:alpha val="43137"/>
+                    </a:srgbClr>
+                  </a:outerShdw>
+                </a:effectLst>
+              </a:rPr>
               <a:t> </a:t>
             </a:r>
             <a:r>
-              <a:rPr sz="3600" err="1"/>
+              <a:rPr sz="3600" err="1">
+                <a:solidFill>
+                  <a:srgbClr val="002060"/>
+                </a:solidFill>
+                <a:effectLst>
+                  <a:outerShdw blurRad="38100" dist="38100" dir="2700000" algn="tl">
+                    <a:srgbClr val="000000">
+                      <a:alpha val="43137"/>
+                    </a:srgbClr>
+                  </a:outerShdw>
+                </a:effectLst>
+              </a:rPr>
               <a:t>Ağ</a:t>
             </a:r>
             <a:r>
-              <a:rPr sz="3600"/>
+              <a:rPr sz="3600">
+                <a:solidFill>
+                  <a:srgbClr val="002060"/>
+                </a:solidFill>
+                <a:effectLst>
+                  <a:outerShdw blurRad="38100" dist="38100" dir="2700000" algn="tl">
+                    <a:srgbClr val="000000">
+                      <a:alpha val="43137"/>
+                    </a:srgbClr>
+                  </a:outerShdw>
+                </a:effectLst>
+              </a:rPr>
               <a:t> </a:t>
             </a:r>
             <a:r>
-              <a:rPr sz="3600" err="1"/>
+              <a:rPr sz="3600" err="1">
+                <a:solidFill>
+                  <a:srgbClr val="002060"/>
+                </a:solidFill>
+                <a:effectLst>
+                  <a:outerShdw blurRad="38100" dist="38100" dir="2700000" algn="tl">
+                    <a:srgbClr val="000000">
+                      <a:alpha val="43137"/>
+                    </a:srgbClr>
+                  </a:outerShdw>
+                </a:effectLst>
+              </a:rPr>
               <a:t>Analizi</a:t>
             </a:r>
-            <a:endParaRPr sz="3600"/>
+            <a:endParaRPr sz="3600">
+              <a:solidFill>
+                <a:srgbClr val="002060"/>
+              </a:solidFill>
+              <a:effectLst>
+                <a:outerShdw blurRad="38100" dist="38100" dir="2700000" algn="tl">
+                  <a:srgbClr val="000000">
+                    <a:alpha val="43137"/>
+                  </a:srgbClr>
+                </a:outerShdw>
+              </a:effectLst>
+            </a:endParaRPr>
           </a:p>
         </p:txBody>
       </p:sp>
@@ -3322,7 +3479,7 @@
               </a:defRPr>
             </a:pPr>
             <a:r>
-              <a:rPr sz="2400"/>
+              <a:rPr sz="2400" b="1"/>
               <a:t>Emir Can Güney</a:t>
             </a:r>
             <a:br>
@@ -4114,14 +4271,6 @@
 <file path=ppt/slides/slide10.xml><?xml version="1.0" encoding="utf-8"?>
 <p:sld xmlns:a="http://schemas.openxmlformats.org/drawingml/2006/main" xmlns:r="http://schemas.openxmlformats.org/officeDocument/2006/relationships" xmlns:p="http://schemas.openxmlformats.org/presentationml/2006/main">
   <p:cSld>
-    <p:bg>
-      <p:bgPr>
-        <a:solidFill>
-          <a:srgbClr val="F8FAFC"/>
-        </a:solidFill>
-        <a:effectLst/>
-      </p:bgPr>
-    </p:bg>
     <p:spTree>
       <p:nvGrpSpPr>
         <p:cNvPr id="1" name=""/>
@@ -4136,860 +4285,15 @@
           <a:chExt cx="0" cy="0"/>
         </a:xfrm>
       </p:grpSpPr>
-      <p:sp>
-        <p:nvSpPr>
-          <p:cNvPr id="2" name="TextBox 1"/>
-          <p:cNvSpPr txBox="1"/>
-          <p:nvPr/>
-        </p:nvSpPr>
-        <p:spPr>
-          <a:xfrm>
-            <a:off x="502920" y="292608"/>
-            <a:ext cx="11155680" cy="502920"/>
-          </a:xfrm>
-          <a:prstGeom prst="rect">
-            <a:avLst/>
-          </a:prstGeom>
-          <a:noFill/>
-        </p:spPr>
-        <p:txBody>
-          <a:bodyPr wrap="square">
-            <a:normAutofit/>
-          </a:bodyPr>
-          <a:lstStyle/>
-          <a:p>
-            <a:pPr algn="l">
-              <a:defRPr sz="2400" b="1">
-                <a:solidFill>
-                  <a:srgbClr val="1F2328"/>
-                </a:solidFill>
-                <a:latin typeface="Aptos"/>
-              </a:defRPr>
-            </a:pPr>
-            <a:r>
-              <a:t>Topluluklar</a:t>
-            </a:r>
-          </a:p>
-        </p:txBody>
-      </p:sp>
-      <p:sp>
-        <p:nvSpPr>
-          <p:cNvPr id="3" name="Rectangle 2"/>
-          <p:cNvSpPr/>
-          <p:nvPr/>
-        </p:nvSpPr>
-        <p:spPr>
-          <a:xfrm>
-            <a:off x="530352" y="1143000"/>
-            <a:ext cx="11109960" cy="13716"/>
-          </a:xfrm>
-          <a:prstGeom prst="rect">
-            <a:avLst/>
-          </a:prstGeom>
-          <a:solidFill>
-            <a:srgbClr val="DCE1E6"/>
-          </a:solidFill>
-          <a:ln>
-            <a:noFill/>
-          </a:ln>
-        </p:spPr>
-        <p:style>
-          <a:lnRef idx="1">
-            <a:schemeClr val="accent1"/>
-          </a:lnRef>
-          <a:fillRef idx="3">
-            <a:schemeClr val="accent1"/>
-          </a:fillRef>
-          <a:effectRef idx="2">
-            <a:schemeClr val="accent1"/>
-          </a:effectRef>
-          <a:fontRef idx="minor">
-            <a:schemeClr val="lt1"/>
-          </a:fontRef>
-        </p:style>
-        <p:txBody>
-          <a:bodyPr rtlCol="0" anchor="ctr"/>
-          <a:lstStyle/>
-          <a:p>
-            <a:pPr algn="ctr"/>
-            <a:endParaRPr/>
-          </a:p>
-        </p:txBody>
-      </p:sp>
-      <p:sp>
-        <p:nvSpPr>
-          <p:cNvPr id="5" name="Rounded Rectangle 4"/>
-          <p:cNvSpPr/>
-          <p:nvPr/>
-        </p:nvSpPr>
-        <p:spPr>
-          <a:xfrm>
-            <a:off x="7406640" y="1504188"/>
-            <a:ext cx="4251960" cy="713232"/>
-          </a:xfrm>
-          <a:prstGeom prst="roundRect">
-            <a:avLst/>
-          </a:prstGeom>
-          <a:solidFill>
-            <a:srgbClr val="FFFFFF"/>
-          </a:solidFill>
-          <a:ln>
-            <a:solidFill>
-              <a:srgbClr val="DCE1E6"/>
-            </a:solidFill>
-          </a:ln>
-        </p:spPr>
-        <p:style>
-          <a:lnRef idx="1">
-            <a:schemeClr val="accent1"/>
-          </a:lnRef>
-          <a:fillRef idx="3">
-            <a:schemeClr val="accent1"/>
-          </a:fillRef>
-          <a:effectRef idx="2">
-            <a:schemeClr val="accent1"/>
-          </a:effectRef>
-          <a:fontRef idx="minor">
-            <a:schemeClr val="lt1"/>
-          </a:fontRef>
-        </p:style>
-        <p:txBody>
-          <a:bodyPr lIns="164592" tIns="64008" rtlCol="0" anchor="ctr"/>
-          <a:lstStyle/>
-          <a:p>
-            <a:pPr algn="ctr">
-              <a:defRPr sz="1900" b="1">
-                <a:solidFill>
-                  <a:srgbClr val="1C5691"/>
-                </a:solidFill>
-                <a:latin typeface="Aptos Display"/>
-              </a:defRPr>
-            </a:pPr>
-            <a:r>
-              <a:t>EUR_TRY, USD_TRY</a:t>
-            </a:r>
-          </a:p>
-          <a:p>
-            <a:pPr>
-              <a:defRPr sz="1000">
-                <a:solidFill>
-                  <a:srgbClr val="5E6670"/>
-                </a:solidFill>
-                <a:latin typeface="Aptos"/>
-              </a:defRPr>
-            </a:pPr>
-            <a:endParaRPr lang="tr-TR"/>
-          </a:p>
-          <a:p>
-            <a:pPr>
-              <a:defRPr sz="1000">
-                <a:solidFill>
-                  <a:srgbClr val="5E6670"/>
-                </a:solidFill>
-                <a:latin typeface="Aptos"/>
-              </a:defRPr>
-            </a:pPr>
-            <a:r>
-              <a:t>Topluluk 0</a:t>
-            </a:r>
-          </a:p>
-        </p:txBody>
-      </p:sp>
-      <p:sp>
-        <p:nvSpPr>
-          <p:cNvPr id="6" name="Rectangle 5"/>
-          <p:cNvSpPr/>
-          <p:nvPr/>
-        </p:nvSpPr>
-        <p:spPr>
-          <a:xfrm>
-            <a:off x="7406640" y="1504188"/>
-            <a:ext cx="64008" cy="713232"/>
-          </a:xfrm>
-          <a:prstGeom prst="rect">
-            <a:avLst/>
-          </a:prstGeom>
-          <a:solidFill>
-            <a:srgbClr val="1C5691"/>
-          </a:solidFill>
-          <a:ln>
-            <a:noFill/>
-          </a:ln>
-        </p:spPr>
-        <p:style>
-          <a:lnRef idx="1">
-            <a:schemeClr val="accent1"/>
-          </a:lnRef>
-          <a:fillRef idx="3">
-            <a:schemeClr val="accent1"/>
-          </a:fillRef>
-          <a:effectRef idx="2">
-            <a:schemeClr val="accent1"/>
-          </a:effectRef>
-          <a:fontRef idx="minor">
-            <a:schemeClr val="lt1"/>
-          </a:fontRef>
-        </p:style>
-        <p:txBody>
-          <a:bodyPr rtlCol="0" anchor="ctr"/>
-          <a:lstStyle/>
-          <a:p>
-            <a:pPr algn="ctr"/>
-            <a:endParaRPr/>
-          </a:p>
-        </p:txBody>
-      </p:sp>
-      <p:sp>
-        <p:nvSpPr>
-          <p:cNvPr id="7" name="Rounded Rectangle 6"/>
-          <p:cNvSpPr/>
-          <p:nvPr/>
-        </p:nvSpPr>
-        <p:spPr>
-          <a:xfrm>
-            <a:off x="7406640" y="2418588"/>
-            <a:ext cx="4251960" cy="713232"/>
-          </a:xfrm>
-          <a:prstGeom prst="roundRect">
-            <a:avLst/>
-          </a:prstGeom>
-          <a:solidFill>
-            <a:srgbClr val="FFFFFF"/>
-          </a:solidFill>
-          <a:ln>
-            <a:solidFill>
-              <a:srgbClr val="DCE1E6"/>
-            </a:solidFill>
-          </a:ln>
-        </p:spPr>
-        <p:style>
-          <a:lnRef idx="1">
-            <a:schemeClr val="accent1"/>
-          </a:lnRef>
-          <a:fillRef idx="3">
-            <a:schemeClr val="accent1"/>
-          </a:fillRef>
-          <a:effectRef idx="2">
-            <a:schemeClr val="accent1"/>
-          </a:effectRef>
-          <a:fontRef idx="minor">
-            <a:schemeClr val="lt1"/>
-          </a:fontRef>
-        </p:style>
-        <p:txBody>
-          <a:bodyPr lIns="164592" tIns="64008" rtlCol="0" anchor="ctr"/>
-          <a:lstStyle/>
-          <a:p>
-            <a:pPr algn="ctr">
-              <a:defRPr sz="1900" b="1">
-                <a:solidFill>
-                  <a:srgbClr val="007E80"/>
-                </a:solidFill>
-                <a:latin typeface="Aptos Display"/>
-              </a:defRPr>
-            </a:pPr>
-            <a:r>
-              <a:t>Dollar_Index, Gold, Silver</a:t>
-            </a:r>
-          </a:p>
-          <a:p>
-            <a:pPr>
-              <a:defRPr sz="1000">
-                <a:solidFill>
-                  <a:srgbClr val="5E6670"/>
-                </a:solidFill>
-                <a:latin typeface="Aptos"/>
-              </a:defRPr>
-            </a:pPr>
-            <a:endParaRPr lang="tr-TR"/>
-          </a:p>
-          <a:p>
-            <a:pPr>
-              <a:defRPr sz="1000">
-                <a:solidFill>
-                  <a:srgbClr val="5E6670"/>
-                </a:solidFill>
-                <a:latin typeface="Aptos"/>
-              </a:defRPr>
-            </a:pPr>
-            <a:r>
-              <a:t>Topluluk 1</a:t>
-            </a:r>
-          </a:p>
-        </p:txBody>
-      </p:sp>
-      <p:sp>
-        <p:nvSpPr>
-          <p:cNvPr id="8" name="Rectangle 7"/>
-          <p:cNvSpPr/>
-          <p:nvPr/>
-        </p:nvSpPr>
-        <p:spPr>
-          <a:xfrm>
-            <a:off x="7406640" y="2418588"/>
-            <a:ext cx="64008" cy="713232"/>
-          </a:xfrm>
-          <a:prstGeom prst="rect">
-            <a:avLst/>
-          </a:prstGeom>
-          <a:solidFill>
-            <a:srgbClr val="007E80"/>
-          </a:solidFill>
-          <a:ln>
-            <a:noFill/>
-          </a:ln>
-        </p:spPr>
-        <p:style>
-          <a:lnRef idx="1">
-            <a:schemeClr val="accent1"/>
-          </a:lnRef>
-          <a:fillRef idx="3">
-            <a:schemeClr val="accent1"/>
-          </a:fillRef>
-          <a:effectRef idx="2">
-            <a:schemeClr val="accent1"/>
-          </a:effectRef>
-          <a:fontRef idx="minor">
-            <a:schemeClr val="lt1"/>
-          </a:fontRef>
-        </p:style>
-        <p:txBody>
-          <a:bodyPr rtlCol="0" anchor="ctr"/>
-          <a:lstStyle/>
-          <a:p>
-            <a:pPr algn="ctr"/>
-            <a:endParaRPr/>
-          </a:p>
-        </p:txBody>
-      </p:sp>
-      <p:sp>
-        <p:nvSpPr>
-          <p:cNvPr id="9" name="Rounded Rectangle 8"/>
-          <p:cNvSpPr/>
-          <p:nvPr/>
-        </p:nvSpPr>
-        <p:spPr>
-          <a:xfrm>
-            <a:off x="7406640" y="3332988"/>
-            <a:ext cx="4251960" cy="713232"/>
-          </a:xfrm>
-          <a:prstGeom prst="roundRect">
-            <a:avLst/>
-          </a:prstGeom>
-          <a:solidFill>
-            <a:srgbClr val="FFFFFF"/>
-          </a:solidFill>
-          <a:ln>
-            <a:solidFill>
-              <a:srgbClr val="DCE1E6"/>
-            </a:solidFill>
-          </a:ln>
-        </p:spPr>
-        <p:style>
-          <a:lnRef idx="1">
-            <a:schemeClr val="accent1"/>
-          </a:lnRef>
-          <a:fillRef idx="3">
-            <a:schemeClr val="accent1"/>
-          </a:fillRef>
-          <a:effectRef idx="2">
-            <a:schemeClr val="accent1"/>
-          </a:effectRef>
-          <a:fontRef idx="minor">
-            <a:schemeClr val="lt1"/>
-          </a:fontRef>
-        </p:style>
-        <p:txBody>
-          <a:bodyPr lIns="164592" tIns="64008" rtlCol="0" anchor="ctr"/>
-          <a:lstStyle/>
-          <a:p>
-            <a:pPr algn="ctr">
-              <a:defRPr sz="1900" b="1">
-                <a:solidFill>
-                  <a:srgbClr val="418456"/>
-                </a:solidFill>
-                <a:latin typeface="Aptos Display"/>
-              </a:defRPr>
-            </a:pPr>
-            <a:r>
-              <a:rPr>
-                <a:solidFill>
-                  <a:schemeClr val="accent6">
-                    <a:lumMod val="75000"/>
-                  </a:schemeClr>
-                </a:solidFill>
-              </a:rPr>
-              <a:t>DAX, Dow_Jones, FTSE100, NASDAQ, SP500, VIX</a:t>
-            </a:r>
-          </a:p>
-          <a:p>
-            <a:pPr>
-              <a:defRPr sz="1000">
-                <a:solidFill>
-                  <a:srgbClr val="5E6670"/>
-                </a:solidFill>
-                <a:latin typeface="Aptos"/>
-              </a:defRPr>
-            </a:pPr>
-            <a:r>
-              <a:t>Topluluk 2</a:t>
-            </a:r>
-          </a:p>
-        </p:txBody>
-      </p:sp>
-      <p:sp>
-        <p:nvSpPr>
-          <p:cNvPr id="10" name="Rectangle 9"/>
-          <p:cNvSpPr/>
-          <p:nvPr/>
-        </p:nvSpPr>
-        <p:spPr>
-          <a:xfrm>
-            <a:off x="7406640" y="3332988"/>
-            <a:ext cx="64008" cy="713232"/>
-          </a:xfrm>
-          <a:prstGeom prst="rect">
-            <a:avLst/>
-          </a:prstGeom>
-          <a:solidFill>
-            <a:srgbClr val="418456"/>
-          </a:solidFill>
-          <a:ln>
-            <a:noFill/>
-          </a:ln>
-        </p:spPr>
-        <p:style>
-          <a:lnRef idx="1">
-            <a:schemeClr val="accent1"/>
-          </a:lnRef>
-          <a:fillRef idx="3">
-            <a:schemeClr val="accent1"/>
-          </a:fillRef>
-          <a:effectRef idx="2">
-            <a:schemeClr val="accent1"/>
-          </a:effectRef>
-          <a:fontRef idx="minor">
-            <a:schemeClr val="lt1"/>
-          </a:fontRef>
-        </p:style>
-        <p:txBody>
-          <a:bodyPr rtlCol="0" anchor="ctr"/>
-          <a:lstStyle/>
-          <a:p>
-            <a:pPr algn="ctr"/>
-            <a:endParaRPr/>
-          </a:p>
-        </p:txBody>
-      </p:sp>
-      <p:sp>
-        <p:nvSpPr>
-          <p:cNvPr id="11" name="Rounded Rectangle 10"/>
-          <p:cNvSpPr/>
-          <p:nvPr/>
-        </p:nvSpPr>
-        <p:spPr>
-          <a:xfrm>
-            <a:off x="7406640" y="4247388"/>
-            <a:ext cx="4251960" cy="713232"/>
-          </a:xfrm>
-          <a:prstGeom prst="roundRect">
-            <a:avLst/>
-          </a:prstGeom>
-          <a:solidFill>
-            <a:srgbClr val="FFFFFF"/>
-          </a:solidFill>
-          <a:ln>
-            <a:solidFill>
-              <a:srgbClr val="DCE1E6"/>
-            </a:solidFill>
-          </a:ln>
-        </p:spPr>
-        <p:style>
-          <a:lnRef idx="1">
-            <a:schemeClr val="accent1"/>
-          </a:lnRef>
-          <a:fillRef idx="3">
-            <a:schemeClr val="accent1"/>
-          </a:fillRef>
-          <a:effectRef idx="2">
-            <a:schemeClr val="accent1"/>
-          </a:effectRef>
-          <a:fontRef idx="minor">
-            <a:schemeClr val="lt1"/>
-          </a:fontRef>
-        </p:style>
-        <p:txBody>
-          <a:bodyPr lIns="164592" tIns="64008" rtlCol="0" anchor="ctr"/>
-          <a:lstStyle/>
-          <a:p>
-            <a:pPr algn="ctr">
-              <a:defRPr sz="1900" b="1">
-                <a:solidFill>
-                  <a:srgbClr val="B94242"/>
-                </a:solidFill>
-                <a:latin typeface="Aptos Display"/>
-              </a:defRPr>
-            </a:pPr>
-            <a:r>
-              <a:t>Brent_Oil, WTI_Oil</a:t>
-            </a:r>
-          </a:p>
-          <a:p>
-            <a:pPr>
-              <a:defRPr sz="1000">
-                <a:solidFill>
-                  <a:srgbClr val="5E6670"/>
-                </a:solidFill>
-                <a:latin typeface="Aptos"/>
-              </a:defRPr>
-            </a:pPr>
-            <a:endParaRPr lang="tr-TR"/>
-          </a:p>
-          <a:p>
-            <a:pPr>
-              <a:defRPr sz="1000">
-                <a:solidFill>
-                  <a:srgbClr val="5E6670"/>
-                </a:solidFill>
-                <a:latin typeface="Aptos"/>
-              </a:defRPr>
-            </a:pPr>
-            <a:r>
-              <a:t>Topluluk 3</a:t>
-            </a:r>
-          </a:p>
-        </p:txBody>
-      </p:sp>
-      <p:sp>
-        <p:nvSpPr>
-          <p:cNvPr id="12" name="Rectangle 11"/>
-          <p:cNvSpPr/>
-          <p:nvPr/>
-        </p:nvSpPr>
-        <p:spPr>
-          <a:xfrm>
-            <a:off x="7406640" y="4247388"/>
-            <a:ext cx="64008" cy="713232"/>
-          </a:xfrm>
-          <a:prstGeom prst="rect">
-            <a:avLst/>
-          </a:prstGeom>
-          <a:solidFill>
-            <a:srgbClr val="B94242"/>
-          </a:solidFill>
-          <a:ln>
-            <a:noFill/>
-          </a:ln>
-        </p:spPr>
-        <p:style>
-          <a:lnRef idx="1">
-            <a:schemeClr val="accent1"/>
-          </a:lnRef>
-          <a:fillRef idx="3">
-            <a:schemeClr val="accent1"/>
-          </a:fillRef>
-          <a:effectRef idx="2">
-            <a:schemeClr val="accent1"/>
-          </a:effectRef>
-          <a:fontRef idx="minor">
-            <a:schemeClr val="lt1"/>
-          </a:fontRef>
-        </p:style>
-        <p:txBody>
-          <a:bodyPr rtlCol="0" anchor="ctr"/>
-          <a:lstStyle/>
-          <a:p>
-            <a:pPr algn="ctr"/>
-            <a:endParaRPr/>
-          </a:p>
-        </p:txBody>
-      </p:sp>
-      <p:sp>
-        <p:nvSpPr>
-          <p:cNvPr id="13" name="TextBox 12"/>
-          <p:cNvSpPr txBox="1"/>
-          <p:nvPr/>
-        </p:nvSpPr>
-        <p:spPr>
-          <a:xfrm>
-            <a:off x="7406640" y="5756148"/>
-            <a:ext cx="4297680" cy="685800"/>
-          </a:xfrm>
-          <a:prstGeom prst="rect">
-            <a:avLst/>
-          </a:prstGeom>
-          <a:noFill/>
-        </p:spPr>
-        <p:txBody>
-          <a:bodyPr wrap="square">
-            <a:normAutofit lnSpcReduction="10000"/>
-          </a:bodyPr>
-          <a:lstStyle/>
-          <a:p>
-            <a:pPr algn="ctr">
-              <a:defRPr sz="1350" b="1">
-                <a:solidFill>
-                  <a:srgbClr val="1F2328"/>
-                </a:solidFill>
-                <a:latin typeface="Aptos"/>
-              </a:defRPr>
-            </a:pPr>
-            <a:r>
-              <a:rPr err="1"/>
-              <a:t>Topluluklar</a:t>
-            </a:r>
-            <a:r>
-              <a:t> </a:t>
-            </a:r>
-            <a:r>
-              <a:rPr err="1"/>
-              <a:t>finansal</a:t>
-            </a:r>
-            <a:r>
-              <a:t> </a:t>
-            </a:r>
-            <a:r>
-              <a:rPr err="1"/>
-              <a:t>segmentlerin</a:t>
-            </a:r>
-            <a:r>
-              <a:t> </a:t>
-            </a:r>
-            <a:r>
-              <a:rPr err="1"/>
-              <a:t>ayrışmasını</a:t>
-            </a:r>
-            <a:r>
-              <a:t> </a:t>
-            </a:r>
-            <a:r>
-              <a:rPr err="1"/>
-              <a:t>gösterir</a:t>
-            </a:r>
-            <a:r>
-              <a:t>: </a:t>
-            </a:r>
-            <a:r>
-              <a:rPr err="1"/>
-              <a:t>hisse</a:t>
-            </a:r>
-            <a:r>
-              <a:t>-risk </a:t>
-            </a:r>
-            <a:r>
-              <a:rPr err="1"/>
-              <a:t>grubu</a:t>
-            </a:r>
-            <a:r>
-              <a:t>, </a:t>
-            </a:r>
-            <a:r>
-              <a:rPr err="1"/>
-              <a:t>değerli</a:t>
-            </a:r>
-            <a:r>
-              <a:t> </a:t>
-            </a:r>
-            <a:r>
-              <a:rPr err="1"/>
-              <a:t>metaller</a:t>
-            </a:r>
-            <a:r>
-              <a:t>, </a:t>
-            </a:r>
-            <a:r>
-              <a:rPr err="1"/>
-              <a:t>döviz</a:t>
-            </a:r>
-            <a:r>
-              <a:t> </a:t>
-            </a:r>
-            <a:r>
-              <a:rPr err="1"/>
-              <a:t>ve</a:t>
-            </a:r>
-            <a:r>
-              <a:t> </a:t>
-            </a:r>
-            <a:r>
-              <a:rPr err="1"/>
-              <a:t>enerji</a:t>
-            </a:r>
-            <a:r>
-              <a:t> </a:t>
-            </a:r>
-            <a:r>
-              <a:rPr err="1"/>
-              <a:t>varlıkları</a:t>
-            </a:r>
-            <a:r>
-              <a:t> </a:t>
-            </a:r>
-            <a:r>
-              <a:rPr err="1"/>
-              <a:t>ayrı</a:t>
-            </a:r>
-            <a:r>
-              <a:t> </a:t>
-            </a:r>
-            <a:r>
-              <a:rPr err="1"/>
-              <a:t>yapılar</a:t>
-            </a:r>
-            <a:r>
-              <a:t> </a:t>
-            </a:r>
-            <a:r>
-              <a:rPr err="1"/>
-              <a:t>oluşturdu</a:t>
-            </a:r>
-            <a:r>
-              <a:t>.</a:t>
-            </a:r>
-          </a:p>
-        </p:txBody>
-      </p:sp>
-      <p:sp>
-        <p:nvSpPr>
-          <p:cNvPr id="14" name="TextBox 13"/>
-          <p:cNvSpPr txBox="1"/>
-          <p:nvPr/>
-        </p:nvSpPr>
-        <p:spPr>
-          <a:xfrm>
-            <a:off x="11155680" y="6446520"/>
-            <a:ext cx="548640" cy="228600"/>
-          </a:xfrm>
-          <a:prstGeom prst="rect">
-            <a:avLst/>
-          </a:prstGeom>
-          <a:noFill/>
-        </p:spPr>
-        <p:txBody>
-          <a:bodyPr wrap="square">
-            <a:normAutofit fontScale="55000" lnSpcReduction="20000"/>
-          </a:bodyPr>
-          <a:lstStyle/>
-          <a:p>
-            <a:r>
-              <a:t>7</a:t>
-            </a:r>
-          </a:p>
-        </p:txBody>
-      </p:sp>
-      <p:sp>
-        <p:nvSpPr>
-          <p:cNvPr id="15" name="TextBox 14"/>
-          <p:cNvSpPr txBox="1"/>
-          <p:nvPr/>
-        </p:nvSpPr>
-        <p:spPr>
-          <a:xfrm>
-            <a:off x="7333129" y="5218624"/>
-            <a:ext cx="4297680" cy="594360"/>
-          </a:xfrm>
-          <a:prstGeom prst="rect">
-            <a:avLst/>
-          </a:prstGeom>
-          <a:noFill/>
-        </p:spPr>
-        <p:txBody>
-          <a:bodyPr wrap="square">
-            <a:normAutofit/>
-          </a:bodyPr>
-          <a:lstStyle/>
-          <a:p>
-            <a:pPr algn="ctr">
-              <a:defRPr sz="1250" b="1">
-                <a:solidFill>
-                  <a:srgbClr val="B94242"/>
-                </a:solidFill>
-                <a:latin typeface="Aptos"/>
-              </a:defRPr>
-            </a:pPr>
-            <a:r>
-              <a:rPr>
-                <a:solidFill>
-                  <a:schemeClr val="accent6">
-                    <a:lumMod val="75000"/>
-                  </a:schemeClr>
-                </a:solidFill>
-              </a:rPr>
-              <a:t>En </a:t>
-            </a:r>
-            <a:r>
-              <a:rPr err="1">
-                <a:solidFill>
-                  <a:schemeClr val="accent6">
-                    <a:lumMod val="75000"/>
-                  </a:schemeClr>
-                </a:solidFill>
-              </a:rPr>
-              <a:t>büyük</a:t>
-            </a:r>
-            <a:r>
-              <a:rPr>
-                <a:solidFill>
-                  <a:schemeClr val="accent6">
-                    <a:lumMod val="75000"/>
-                  </a:schemeClr>
-                </a:solidFill>
-              </a:rPr>
-              <a:t> </a:t>
-            </a:r>
-            <a:r>
-              <a:rPr err="1">
-                <a:solidFill>
-                  <a:schemeClr val="accent6">
-                    <a:lumMod val="75000"/>
-                  </a:schemeClr>
-                </a:solidFill>
-              </a:rPr>
-              <a:t>topluluk</a:t>
-            </a:r>
-            <a:r>
-              <a:rPr>
-                <a:solidFill>
-                  <a:schemeClr val="accent6">
-                    <a:lumMod val="75000"/>
-                  </a:schemeClr>
-                </a:solidFill>
-              </a:rPr>
-              <a:t>: Community 2</a:t>
-            </a:r>
-          </a:p>
-          <a:p>
-            <a:pPr algn="ctr">
-              <a:defRPr sz="1100">
-                <a:solidFill>
-                  <a:srgbClr val="1F2328"/>
-                </a:solidFill>
-                <a:latin typeface="Aptos"/>
-              </a:defRPr>
-            </a:pPr>
-            <a:r>
-              <a:t>SP500, NASDAQ, </a:t>
-            </a:r>
-            <a:r>
-              <a:rPr err="1"/>
-              <a:t>Dow_Jones</a:t>
-            </a:r>
-            <a:r>
-              <a:t>, DAX, FTSE100 </a:t>
-            </a:r>
-            <a:r>
-              <a:rPr err="1"/>
-              <a:t>ve</a:t>
-            </a:r>
-            <a:r>
-              <a:t> VIX</a:t>
-            </a:r>
-          </a:p>
-        </p:txBody>
-      </p:sp>
       <p:pic>
         <p:nvPicPr>
-          <p:cNvPr id="16" name="Picture 15" descr="image.png"/>
+          <p:cNvPr id="3" name="Resim 2">
+            <a:extLst>
+              <a:ext uri="{FF2B5EF4-FFF2-40B4-BE49-F238E27FC236}">
+                <a16:creationId xmlns:a16="http://schemas.microsoft.com/office/drawing/2014/main" id="{80DA6D87-C0B3-A175-5458-BB1ECECB8546}"/>
+              </a:ext>
+            </a:extLst>
+          </p:cNvPr>
           <p:cNvPicPr>
             <a:picLocks noChangeAspect="1"/>
           </p:cNvPicPr>
@@ -5003,15 +4307,150 @@
         </p:blipFill>
         <p:spPr>
           <a:xfrm>
-            <a:off x="134471" y="1358422"/>
-            <a:ext cx="7198658" cy="5206970"/>
+            <a:off x="0" y="-1"/>
+            <a:ext cx="7598852" cy="3965511"/>
           </a:xfrm>
           <a:prstGeom prst="rect">
             <a:avLst/>
           </a:prstGeom>
         </p:spPr>
       </p:pic>
+      <p:pic>
+        <p:nvPicPr>
+          <p:cNvPr id="5" name="Resim 4">
+            <a:extLst>
+              <a:ext uri="{FF2B5EF4-FFF2-40B4-BE49-F238E27FC236}">
+                <a16:creationId xmlns:a16="http://schemas.microsoft.com/office/drawing/2014/main" id="{CEC89A22-4A39-A642-2523-FAA4B5BBC6D8}"/>
+              </a:ext>
+            </a:extLst>
+          </p:cNvPr>
+          <p:cNvPicPr>
+            <a:picLocks noChangeAspect="1"/>
+          </p:cNvPicPr>
+          <p:nvPr/>
+        </p:nvPicPr>
+        <p:blipFill>
+          <a:blip r:embed="rId3"/>
+          <a:stretch>
+            <a:fillRect/>
+          </a:stretch>
+        </p:blipFill>
+        <p:spPr>
+          <a:xfrm>
+            <a:off x="4982547" y="2983121"/>
+            <a:ext cx="7190791" cy="3874880"/>
+          </a:xfrm>
+          <a:prstGeom prst="rect">
+            <a:avLst/>
+          </a:prstGeom>
+        </p:spPr>
+      </p:pic>
+      <p:sp>
+        <p:nvSpPr>
+          <p:cNvPr id="2" name="Rectangle 1">
+            <a:extLst>
+              <a:ext uri="{FF2B5EF4-FFF2-40B4-BE49-F238E27FC236}">
+                <a16:creationId xmlns:a16="http://schemas.microsoft.com/office/drawing/2014/main" id="{8272EF96-DC0A-C07C-FF24-7F2482A3B8DB}"/>
+              </a:ext>
+            </a:extLst>
+          </p:cNvPr>
+          <p:cNvSpPr/>
+          <p:nvPr/>
+        </p:nvSpPr>
+        <p:spPr>
+          <a:xfrm>
+            <a:off x="0" y="0"/>
+            <a:ext cx="164592" cy="6858000"/>
+          </a:xfrm>
+          <a:prstGeom prst="rect">
+            <a:avLst/>
+          </a:prstGeom>
+          <a:solidFill>
+            <a:srgbClr val="007E80"/>
+          </a:solidFill>
+          <a:ln>
+            <a:noFill/>
+          </a:ln>
+        </p:spPr>
+        <p:style>
+          <a:lnRef idx="1">
+            <a:schemeClr val="accent1"/>
+          </a:lnRef>
+          <a:fillRef idx="3">
+            <a:schemeClr val="accent1"/>
+          </a:fillRef>
+          <a:effectRef idx="2">
+            <a:schemeClr val="accent1"/>
+          </a:effectRef>
+          <a:fontRef idx="minor">
+            <a:schemeClr val="lt1"/>
+          </a:fontRef>
+        </p:style>
+        <p:txBody>
+          <a:bodyPr rtlCol="0" anchor="ctr"/>
+          <a:lstStyle/>
+          <a:p>
+            <a:pPr algn="ctr"/>
+            <a:endParaRPr/>
+          </a:p>
+        </p:txBody>
+      </p:sp>
+      <p:sp>
+        <p:nvSpPr>
+          <p:cNvPr id="4" name="Rectangle 1">
+            <a:extLst>
+              <a:ext uri="{FF2B5EF4-FFF2-40B4-BE49-F238E27FC236}">
+                <a16:creationId xmlns:a16="http://schemas.microsoft.com/office/drawing/2014/main" id="{E6D34A2E-00ED-987B-F40A-1A9BF520463F}"/>
+              </a:ext>
+            </a:extLst>
+          </p:cNvPr>
+          <p:cNvSpPr/>
+          <p:nvPr/>
+        </p:nvSpPr>
+        <p:spPr>
+          <a:xfrm>
+            <a:off x="12030705" y="0"/>
+            <a:ext cx="164592" cy="6858000"/>
+          </a:xfrm>
+          <a:prstGeom prst="rect">
+            <a:avLst/>
+          </a:prstGeom>
+          <a:solidFill>
+            <a:srgbClr val="007E80"/>
+          </a:solidFill>
+          <a:ln>
+            <a:noFill/>
+          </a:ln>
+        </p:spPr>
+        <p:style>
+          <a:lnRef idx="1">
+            <a:schemeClr val="accent1"/>
+          </a:lnRef>
+          <a:fillRef idx="3">
+            <a:schemeClr val="accent1"/>
+          </a:fillRef>
+          <a:effectRef idx="2">
+            <a:schemeClr val="accent1"/>
+          </a:effectRef>
+          <a:fontRef idx="minor">
+            <a:schemeClr val="lt1"/>
+          </a:fontRef>
+        </p:style>
+        <p:txBody>
+          <a:bodyPr rtlCol="0" anchor="ctr"/>
+          <a:lstStyle/>
+          <a:p>
+            <a:pPr algn="ctr"/>
+            <a:endParaRPr/>
+          </a:p>
+        </p:txBody>
+      </p:sp>
     </p:spTree>
+    <p:extLst>
+      <p:ext uri="{BB962C8B-B14F-4D97-AF65-F5344CB8AC3E}">
+        <p14:creationId xmlns:p14="http://schemas.microsoft.com/office/powerpoint/2010/main" val="1316107506"/>
+      </p:ext>
+    </p:extLst>
   </p:cSld>
   <p:clrMapOvr>
     <a:masterClrMapping/>
@@ -5066,7 +4505,7 @@
           </a:bodyPr>
           <a:lstStyle/>
           <a:p>
-            <a:pPr>
+            <a:pPr algn="l">
               <a:defRPr sz="2400" b="1">
                 <a:solidFill>
                   <a:srgbClr val="1F2328"/>
@@ -5075,10 +4514,8 @@
               </a:defRPr>
             </a:pPr>
             <a:r>
-              <a:rPr lang="tr-TR"/>
-              <a:t>Merkezi Yapı ve Genel Sonuçlar</a:t>
-            </a:r>
-            <a:endParaRPr/>
+              <a:t>Topluluklar</a:t>
+            </a:r>
           </a:p>
         </p:txBody>
       </p:sp>
@@ -5128,14 +4565,14 @@
       </p:sp>
       <p:sp>
         <p:nvSpPr>
-          <p:cNvPr id="4" name="Rounded Rectangle 3"/>
+          <p:cNvPr id="5" name="Rounded Rectangle 4"/>
           <p:cNvSpPr/>
           <p:nvPr/>
         </p:nvSpPr>
         <p:spPr>
           <a:xfrm>
-            <a:off x="731520" y="1508760"/>
-            <a:ext cx="2057400" cy="822960"/>
+            <a:off x="7406640" y="1504188"/>
+            <a:ext cx="4251960" cy="713232"/>
           </a:xfrm>
           <a:prstGeom prst="roundRect">
             <a:avLst/>
@@ -5176,7 +4613,7 @@
               </a:defRPr>
             </a:pPr>
             <a:r>
-              <a:t>19</a:t>
+              <a:t>EUR_TRY, USD_TRY</a:t>
             </a:r>
           </a:p>
           <a:p>
@@ -5188,22 +4625,33 @@
                 <a:latin typeface="Aptos"/>
               </a:defRPr>
             </a:pPr>
-            <a:r>
-              <a:t>Başlangıç kenar</a:t>
-            </a:r>
-          </a:p>
-        </p:txBody>
-      </p:sp>
-      <p:sp>
-        <p:nvSpPr>
-          <p:cNvPr id="5" name="Rectangle 4"/>
+            <a:endParaRPr lang="tr-TR"/>
+          </a:p>
+          <a:p>
+            <a:pPr>
+              <a:defRPr sz="1000">
+                <a:solidFill>
+                  <a:srgbClr val="5E6670"/>
+                </a:solidFill>
+                <a:latin typeface="Aptos"/>
+              </a:defRPr>
+            </a:pPr>
+            <a:r>
+              <a:t>Topluluk 0</a:t>
+            </a:r>
+          </a:p>
+        </p:txBody>
+      </p:sp>
+      <p:sp>
+        <p:nvSpPr>
+          <p:cNvPr id="6" name="Rectangle 5"/>
           <p:cNvSpPr/>
           <p:nvPr/>
         </p:nvSpPr>
         <p:spPr>
           <a:xfrm>
-            <a:off x="731520" y="1508760"/>
-            <a:ext cx="64008" cy="822960"/>
+            <a:off x="7406640" y="1504188"/>
+            <a:ext cx="64008" cy="713232"/>
           </a:xfrm>
           <a:prstGeom prst="rect">
             <a:avLst/>
@@ -5240,14 +4688,14 @@
       </p:sp>
       <p:sp>
         <p:nvSpPr>
-          <p:cNvPr id="6" name="Rounded Rectangle 5"/>
+          <p:cNvPr id="7" name="Rounded Rectangle 6"/>
           <p:cNvSpPr/>
           <p:nvPr/>
         </p:nvSpPr>
         <p:spPr>
           <a:xfrm>
-            <a:off x="3154680" y="1508760"/>
-            <a:ext cx="2057400" cy="822960"/>
+            <a:off x="7406640" y="2418588"/>
+            <a:ext cx="4251960" cy="713232"/>
           </a:xfrm>
           <a:prstGeom prst="roundRect">
             <a:avLst/>
@@ -5288,7 +4736,7 @@
               </a:defRPr>
             </a:pPr>
             <a:r>
-              <a:t>14</a:t>
+              <a:t>Dollar_Index, Gold, Silver</a:t>
             </a:r>
           </a:p>
           <a:p>
@@ -5300,22 +4748,33 @@
                 <a:latin typeface="Aptos"/>
               </a:defRPr>
             </a:pPr>
-            <a:r>
-              <a:t>SP500 çıkarılınca</a:t>
-            </a:r>
-          </a:p>
-        </p:txBody>
-      </p:sp>
-      <p:sp>
-        <p:nvSpPr>
-          <p:cNvPr id="7" name="Rectangle 6"/>
+            <a:endParaRPr lang="tr-TR"/>
+          </a:p>
+          <a:p>
+            <a:pPr>
+              <a:defRPr sz="1000">
+                <a:solidFill>
+                  <a:srgbClr val="5E6670"/>
+                </a:solidFill>
+                <a:latin typeface="Aptos"/>
+              </a:defRPr>
+            </a:pPr>
+            <a:r>
+              <a:t>Topluluk 1</a:t>
+            </a:r>
+          </a:p>
+        </p:txBody>
+      </p:sp>
+      <p:sp>
+        <p:nvSpPr>
+          <p:cNvPr id="8" name="Rectangle 7"/>
           <p:cNvSpPr/>
           <p:nvPr/>
         </p:nvSpPr>
         <p:spPr>
           <a:xfrm>
-            <a:off x="3154680" y="1508760"/>
-            <a:ext cx="64008" cy="822960"/>
+            <a:off x="7406640" y="2418588"/>
+            <a:ext cx="64008" cy="713232"/>
           </a:xfrm>
           <a:prstGeom prst="rect">
             <a:avLst/>
@@ -5352,14 +4811,14 @@
       </p:sp>
       <p:sp>
         <p:nvSpPr>
-          <p:cNvPr id="8" name="Rounded Rectangle 7"/>
+          <p:cNvPr id="9" name="Rounded Rectangle 8"/>
           <p:cNvSpPr/>
           <p:nvPr/>
         </p:nvSpPr>
         <p:spPr>
           <a:xfrm>
-            <a:off x="5577840" y="1508760"/>
-            <a:ext cx="2057400" cy="822960"/>
+            <a:off x="7406640" y="3332988"/>
+            <a:ext cx="4251960" cy="713232"/>
           </a:xfrm>
           <a:prstGeom prst="roundRect">
             <a:avLst/>
@@ -5394,13 +4853,20 @@
             <a:pPr algn="ctr">
               <a:defRPr sz="1900" b="1">
                 <a:solidFill>
-                  <a:srgbClr val="B94242"/>
+                  <a:srgbClr val="418456"/>
                 </a:solidFill>
                 <a:latin typeface="Aptos Display"/>
               </a:defRPr>
             </a:pPr>
             <a:r>
-              <a:t>14</a:t>
+              <a:rPr>
+                <a:solidFill>
+                  <a:schemeClr val="accent6">
+                    <a:lumMod val="75000"/>
+                  </a:schemeClr>
+                </a:solidFill>
+              </a:rPr>
+              <a:t>DAX, Dow_Jones, FTSE100, NASDAQ, SP500, VIX</a:t>
             </a:r>
           </a:p>
           <a:p>
@@ -5413,21 +4879,144 @@
               </a:defRPr>
             </a:pPr>
             <a:r>
-              <a:t>VIX çıkarılınca</a:t>
-            </a:r>
-          </a:p>
-        </p:txBody>
-      </p:sp>
-      <p:sp>
-        <p:nvSpPr>
-          <p:cNvPr id="9" name="Rectangle 8"/>
+              <a:t>Topluluk 2</a:t>
+            </a:r>
+          </a:p>
+        </p:txBody>
+      </p:sp>
+      <p:sp>
+        <p:nvSpPr>
+          <p:cNvPr id="10" name="Rectangle 9"/>
           <p:cNvSpPr/>
           <p:nvPr/>
         </p:nvSpPr>
         <p:spPr>
           <a:xfrm>
-            <a:off x="5577840" y="1508760"/>
-            <a:ext cx="64008" cy="822960"/>
+            <a:off x="7406640" y="3332988"/>
+            <a:ext cx="64008" cy="713232"/>
+          </a:xfrm>
+          <a:prstGeom prst="rect">
+            <a:avLst/>
+          </a:prstGeom>
+          <a:solidFill>
+            <a:srgbClr val="418456"/>
+          </a:solidFill>
+          <a:ln>
+            <a:noFill/>
+          </a:ln>
+        </p:spPr>
+        <p:style>
+          <a:lnRef idx="1">
+            <a:schemeClr val="accent1"/>
+          </a:lnRef>
+          <a:fillRef idx="3">
+            <a:schemeClr val="accent1"/>
+          </a:fillRef>
+          <a:effectRef idx="2">
+            <a:schemeClr val="accent1"/>
+          </a:effectRef>
+          <a:fontRef idx="minor">
+            <a:schemeClr val="lt1"/>
+          </a:fontRef>
+        </p:style>
+        <p:txBody>
+          <a:bodyPr rtlCol="0" anchor="ctr"/>
+          <a:lstStyle/>
+          <a:p>
+            <a:pPr algn="ctr"/>
+            <a:endParaRPr/>
+          </a:p>
+        </p:txBody>
+      </p:sp>
+      <p:sp>
+        <p:nvSpPr>
+          <p:cNvPr id="11" name="Rounded Rectangle 10"/>
+          <p:cNvSpPr/>
+          <p:nvPr/>
+        </p:nvSpPr>
+        <p:spPr>
+          <a:xfrm>
+            <a:off x="7406640" y="4247388"/>
+            <a:ext cx="4251960" cy="713232"/>
+          </a:xfrm>
+          <a:prstGeom prst="roundRect">
+            <a:avLst/>
+          </a:prstGeom>
+          <a:solidFill>
+            <a:srgbClr val="FFFFFF"/>
+          </a:solidFill>
+          <a:ln>
+            <a:solidFill>
+              <a:srgbClr val="DCE1E6"/>
+            </a:solidFill>
+          </a:ln>
+        </p:spPr>
+        <p:style>
+          <a:lnRef idx="1">
+            <a:schemeClr val="accent1"/>
+          </a:lnRef>
+          <a:fillRef idx="3">
+            <a:schemeClr val="accent1"/>
+          </a:fillRef>
+          <a:effectRef idx="2">
+            <a:schemeClr val="accent1"/>
+          </a:effectRef>
+          <a:fontRef idx="minor">
+            <a:schemeClr val="lt1"/>
+          </a:fontRef>
+        </p:style>
+        <p:txBody>
+          <a:bodyPr lIns="164592" tIns="64008" rtlCol="0" anchor="ctr"/>
+          <a:lstStyle/>
+          <a:p>
+            <a:pPr algn="ctr">
+              <a:defRPr sz="1900" b="1">
+                <a:solidFill>
+                  <a:srgbClr val="B94242"/>
+                </a:solidFill>
+                <a:latin typeface="Aptos Display"/>
+              </a:defRPr>
+            </a:pPr>
+            <a:r>
+              <a:t>Brent_Oil, WTI_Oil</a:t>
+            </a:r>
+          </a:p>
+          <a:p>
+            <a:pPr>
+              <a:defRPr sz="1000">
+                <a:solidFill>
+                  <a:srgbClr val="5E6670"/>
+                </a:solidFill>
+                <a:latin typeface="Aptos"/>
+              </a:defRPr>
+            </a:pPr>
+            <a:endParaRPr lang="tr-TR"/>
+          </a:p>
+          <a:p>
+            <a:pPr>
+              <a:defRPr sz="1000">
+                <a:solidFill>
+                  <a:srgbClr val="5E6670"/>
+                </a:solidFill>
+                <a:latin typeface="Aptos"/>
+              </a:defRPr>
+            </a:pPr>
+            <a:r>
+              <a:t>Topluluk 3</a:t>
+            </a:r>
+          </a:p>
+        </p:txBody>
+      </p:sp>
+      <p:sp>
+        <p:nvSpPr>
+          <p:cNvPr id="12" name="Rectangle 11"/>
+          <p:cNvSpPr/>
+          <p:nvPr/>
+        </p:nvSpPr>
+        <p:spPr>
+          <a:xfrm>
+            <a:off x="7406640" y="4247388"/>
+            <a:ext cx="64008" cy="713232"/>
           </a:xfrm>
           <a:prstGeom prst="rect">
             <a:avLst/>
@@ -5464,14 +5053,187 @@
       </p:sp>
       <p:sp>
         <p:nvSpPr>
-          <p:cNvPr id="12" name="TextBox 11"/>
+          <p:cNvPr id="13" name="TextBox 12"/>
           <p:cNvSpPr txBox="1"/>
           <p:nvPr/>
         </p:nvSpPr>
         <p:spPr>
           <a:xfrm>
-            <a:off x="594360" y="3246120"/>
-            <a:ext cx="5486400" cy="2468880"/>
+            <a:off x="7406640" y="5756148"/>
+            <a:ext cx="4297680" cy="685800"/>
+          </a:xfrm>
+          <a:prstGeom prst="rect">
+            <a:avLst/>
+          </a:prstGeom>
+          <a:noFill/>
+        </p:spPr>
+        <p:txBody>
+          <a:bodyPr wrap="square">
+            <a:normAutofit lnSpcReduction="10000"/>
+          </a:bodyPr>
+          <a:lstStyle/>
+          <a:p>
+            <a:pPr algn="ctr">
+              <a:defRPr sz="1350" b="1">
+                <a:solidFill>
+                  <a:srgbClr val="1F2328"/>
+                </a:solidFill>
+                <a:latin typeface="Aptos"/>
+              </a:defRPr>
+            </a:pPr>
+            <a:r>
+              <a:rPr err="1"/>
+              <a:t>Topluluklar</a:t>
+            </a:r>
+            <a:r>
+              <a:t> </a:t>
+            </a:r>
+            <a:r>
+              <a:rPr err="1"/>
+              <a:t>finansal</a:t>
+            </a:r>
+            <a:r>
+              <a:t> </a:t>
+            </a:r>
+            <a:r>
+              <a:rPr err="1"/>
+              <a:t>segmentlerin</a:t>
+            </a:r>
+            <a:r>
+              <a:t> </a:t>
+            </a:r>
+            <a:r>
+              <a:rPr err="1"/>
+              <a:t>ayrışmasını</a:t>
+            </a:r>
+            <a:r>
+              <a:t> </a:t>
+            </a:r>
+            <a:r>
+              <a:rPr err="1"/>
+              <a:t>gösterir</a:t>
+            </a:r>
+            <a:r>
+              <a:t>: </a:t>
+            </a:r>
+            <a:r>
+              <a:rPr err="1"/>
+              <a:t>hisse</a:t>
+            </a:r>
+            <a:r>
+              <a:t>-risk </a:t>
+            </a:r>
+            <a:r>
+              <a:rPr err="1"/>
+              <a:t>grubu</a:t>
+            </a:r>
+            <a:r>
+              <a:t>, </a:t>
+            </a:r>
+            <a:r>
+              <a:rPr err="1"/>
+              <a:t>değerli</a:t>
+            </a:r>
+            <a:r>
+              <a:t> </a:t>
+            </a:r>
+            <a:r>
+              <a:rPr err="1"/>
+              <a:t>metaller</a:t>
+            </a:r>
+            <a:r>
+              <a:t>, </a:t>
+            </a:r>
+            <a:r>
+              <a:rPr err="1"/>
+              <a:t>döviz</a:t>
+            </a:r>
+            <a:r>
+              <a:t> </a:t>
+            </a:r>
+            <a:r>
+              <a:rPr err="1"/>
+              <a:t>ve</a:t>
+            </a:r>
+            <a:r>
+              <a:t> </a:t>
+            </a:r>
+            <a:r>
+              <a:rPr err="1"/>
+              <a:t>enerji</a:t>
+            </a:r>
+            <a:r>
+              <a:t> </a:t>
+            </a:r>
+            <a:r>
+              <a:rPr err="1"/>
+              <a:t>varlıkları</a:t>
+            </a:r>
+            <a:r>
+              <a:t> </a:t>
+            </a:r>
+            <a:r>
+              <a:rPr err="1"/>
+              <a:t>ayrı</a:t>
+            </a:r>
+            <a:r>
+              <a:t> </a:t>
+            </a:r>
+            <a:r>
+              <a:rPr err="1"/>
+              <a:t>yapılar</a:t>
+            </a:r>
+            <a:r>
+              <a:t> </a:t>
+            </a:r>
+            <a:r>
+              <a:rPr err="1"/>
+              <a:t>oluşturdu</a:t>
+            </a:r>
+            <a:r>
+              <a:t>.</a:t>
+            </a:r>
+          </a:p>
+        </p:txBody>
+      </p:sp>
+      <p:sp>
+        <p:nvSpPr>
+          <p:cNvPr id="14" name="TextBox 13"/>
+          <p:cNvSpPr txBox="1"/>
+          <p:nvPr/>
+        </p:nvSpPr>
+        <p:spPr>
+          <a:xfrm>
+            <a:off x="11155680" y="6446520"/>
+            <a:ext cx="548640" cy="228600"/>
+          </a:xfrm>
+          <a:prstGeom prst="rect">
+            <a:avLst/>
+          </a:prstGeom>
+          <a:noFill/>
+        </p:spPr>
+        <p:txBody>
+          <a:bodyPr wrap="square">
+            <a:normAutofit fontScale="55000" lnSpcReduction="20000"/>
+          </a:bodyPr>
+          <a:lstStyle/>
+          <a:p>
+            <a:r>
+              <a:t>7</a:t>
+            </a:r>
+          </a:p>
+        </p:txBody>
+      </p:sp>
+      <p:sp>
+        <p:nvSpPr>
+          <p:cNvPr id="15" name="TextBox 14"/>
+          <p:cNvSpPr txBox="1"/>
+          <p:nvPr/>
+        </p:nvSpPr>
+        <p:spPr>
+          <a:xfrm>
+            <a:off x="7333129" y="5218624"/>
+            <a:ext cx="4297680" cy="594360"/>
           </a:xfrm>
           <a:prstGeom prst="rect">
             <a:avLst/>
@@ -5484,13 +5246,68 @@
           </a:bodyPr>
           <a:lstStyle/>
           <a:p>
-            <a:pPr marL="285750" indent="-285750">
-              <a:spcAft>
-                <a:spcPts val="800"/>
-              </a:spcAft>
-              <a:buFont typeface="Arial" panose="020B0604020202020204" pitchFamily="34" charset="0"/>
-              <a:buChar char="•"/>
-              <a:defRPr sz="1600">
+            <a:pPr algn="ctr">
+              <a:defRPr sz="1250" b="1">
+                <a:solidFill>
+                  <a:srgbClr val="B94242"/>
+                </a:solidFill>
+                <a:latin typeface="Aptos"/>
+              </a:defRPr>
+            </a:pPr>
+            <a:r>
+              <a:rPr>
+                <a:solidFill>
+                  <a:schemeClr val="accent6">
+                    <a:lumMod val="75000"/>
+                  </a:schemeClr>
+                </a:solidFill>
+              </a:rPr>
+              <a:t>En </a:t>
+            </a:r>
+            <a:r>
+              <a:rPr err="1">
+                <a:solidFill>
+                  <a:schemeClr val="accent6">
+                    <a:lumMod val="75000"/>
+                  </a:schemeClr>
+                </a:solidFill>
+              </a:rPr>
+              <a:t>büyük</a:t>
+            </a:r>
+            <a:r>
+              <a:rPr>
+                <a:solidFill>
+                  <a:schemeClr val="accent6">
+                    <a:lumMod val="75000"/>
+                  </a:schemeClr>
+                </a:solidFill>
+              </a:rPr>
+              <a:t> </a:t>
+            </a:r>
+            <a:r>
+              <a:rPr err="1">
+                <a:solidFill>
+                  <a:schemeClr val="accent6">
+                    <a:lumMod val="75000"/>
+                  </a:schemeClr>
+                </a:solidFill>
+              </a:rPr>
+              <a:t>topluluk</a:t>
+            </a:r>
+            <a:r>
+              <a:rPr>
+                <a:solidFill>
+                  <a:schemeClr val="accent6">
+                    <a:lumMod val="75000"/>
+                  </a:schemeClr>
+                </a:solidFill>
+              </a:rPr>
+              <a:t>: Community 2</a:t>
+            </a:r>
+          </a:p>
+          <a:p>
+            <a:pPr algn="ctr">
+              <a:defRPr sz="1100">
                 <a:solidFill>
                   <a:srgbClr val="1F2328"/>
                 </a:solidFill>
@@ -5498,68 +5315,28 @@
               </a:defRPr>
             </a:pPr>
             <a:r>
-              <a:t>Merkezi düğüm çıkarma kenar sayısını azaltıyor.</a:t>
-            </a:r>
-          </a:p>
-          <a:p>
-            <a:pPr marL="285750" indent="-285750">
-              <a:spcAft>
-                <a:spcPts val="800"/>
-              </a:spcAft>
-              <a:buFont typeface="Arial" panose="020B0604020202020204" pitchFamily="34" charset="0"/>
-              <a:buChar char="•"/>
-              <a:defRPr sz="1600">
-                <a:solidFill>
-                  <a:srgbClr val="1F2328"/>
-                </a:solidFill>
-                <a:latin typeface="Aptos"/>
-              </a:defRPr>
-            </a:pPr>
-            <a:r>
-              <a:t>Ağ tamamen çökmüyor; ancak çekirdek yapı zayıflıyor.</a:t>
-            </a:r>
-          </a:p>
-          <a:p>
-            <a:pPr marL="285750" indent="-285750">
-              <a:spcAft>
-                <a:spcPts val="800"/>
-              </a:spcAft>
-              <a:buFont typeface="Arial" panose="020B0604020202020204" pitchFamily="34" charset="0"/>
-              <a:buChar char="•"/>
-              <a:defRPr sz="1600">
-                <a:solidFill>
-                  <a:srgbClr val="1F2328"/>
-                </a:solidFill>
-                <a:latin typeface="Aptos"/>
-              </a:defRPr>
-            </a:pPr>
-            <a:r>
-              <a:t>Hisse senedi endeksleri ve VIX en dikkat çeken merkez yapıyı oluşturuyor.</a:t>
-            </a:r>
-          </a:p>
-          <a:p>
-            <a:pPr marL="285750" indent="-285750">
-              <a:spcAft>
-                <a:spcPts val="800"/>
-              </a:spcAft>
-              <a:buFont typeface="Arial" panose="020B0604020202020204" pitchFamily="34" charset="0"/>
-              <a:buChar char="•"/>
-              <a:defRPr sz="1600">
-                <a:solidFill>
-                  <a:srgbClr val="1F2328"/>
-                </a:solidFill>
-                <a:latin typeface="Aptos"/>
-              </a:defRPr>
-            </a:pPr>
-            <a:r>
-              <a:t>Sosyal ağ analizi finansal varlıkları sistem olarak okumayı kolaylaştırıyor.</a:t>
+              <a:t>SP500, NASDAQ, </a:t>
+            </a:r>
+            <a:r>
+              <a:rPr err="1"/>
+              <a:t>Dow_Jones</a:t>
+            </a:r>
+            <a:r>
+              <a:t>, DAX, FTSE100 </a:t>
+            </a:r>
+            <a:r>
+              <a:rPr err="1"/>
+              <a:t>ve</a:t>
+            </a:r>
+            <a:r>
+              <a:t> VIX</a:t>
             </a:r>
           </a:p>
         </p:txBody>
       </p:sp>
       <p:pic>
         <p:nvPicPr>
-          <p:cNvPr id="13" name="Picture 12" descr="degree_distribution.png"/>
+          <p:cNvPr id="16" name="Picture 15" descr="image.png"/>
           <p:cNvPicPr>
             <a:picLocks noChangeAspect="1"/>
           </p:cNvPicPr>
@@ -5573,8 +5350,8 @@
         </p:blipFill>
         <p:spPr>
           <a:xfrm>
-            <a:off x="6080760" y="2683763"/>
-            <a:ext cx="5887122" cy="3277765"/>
+            <a:off x="134471" y="1358422"/>
+            <a:ext cx="7198658" cy="5206970"/>
           </a:xfrm>
           <a:prstGeom prst="rect">
             <a:avLst/>
@@ -5583,29 +5360,101 @@
       </p:pic>
       <p:sp>
         <p:nvSpPr>
-          <p:cNvPr id="14" name="TextBox 13"/>
-          <p:cNvSpPr txBox="1"/>
-          <p:nvPr/>
-        </p:nvSpPr>
-        <p:spPr>
-          <a:xfrm>
-            <a:off x="11155680" y="6446520"/>
-            <a:ext cx="548640" cy="228600"/>
-          </a:xfrm>
-          <a:prstGeom prst="rect">
-            <a:avLst/>
-          </a:prstGeom>
-          <a:noFill/>
-        </p:spPr>
-        <p:txBody>
-          <a:bodyPr wrap="square">
-            <a:normAutofit fontScale="55000" lnSpcReduction="20000"/>
-          </a:bodyPr>
-          <a:lstStyle/>
-          <a:p>
-            <a:r>
-              <a:t>8</a:t>
-            </a:r>
+          <p:cNvPr id="4" name="Rectangle 1">
+            <a:extLst>
+              <a:ext uri="{FF2B5EF4-FFF2-40B4-BE49-F238E27FC236}">
+                <a16:creationId xmlns:a16="http://schemas.microsoft.com/office/drawing/2014/main" id="{7B28BC28-C133-7395-1938-16D5846C3179}"/>
+              </a:ext>
+            </a:extLst>
+          </p:cNvPr>
+          <p:cNvSpPr/>
+          <p:nvPr/>
+        </p:nvSpPr>
+        <p:spPr>
+          <a:xfrm>
+            <a:off x="0" y="0"/>
+            <a:ext cx="164592" cy="6858000"/>
+          </a:xfrm>
+          <a:prstGeom prst="rect">
+            <a:avLst/>
+          </a:prstGeom>
+          <a:solidFill>
+            <a:srgbClr val="007E80"/>
+          </a:solidFill>
+          <a:ln>
+            <a:noFill/>
+          </a:ln>
+        </p:spPr>
+        <p:style>
+          <a:lnRef idx="1">
+            <a:schemeClr val="accent1"/>
+          </a:lnRef>
+          <a:fillRef idx="3">
+            <a:schemeClr val="accent1"/>
+          </a:fillRef>
+          <a:effectRef idx="2">
+            <a:schemeClr val="accent1"/>
+          </a:effectRef>
+          <a:fontRef idx="minor">
+            <a:schemeClr val="lt1"/>
+          </a:fontRef>
+        </p:style>
+        <p:txBody>
+          <a:bodyPr rtlCol="0" anchor="ctr"/>
+          <a:lstStyle/>
+          <a:p>
+            <a:pPr algn="ctr"/>
+            <a:endParaRPr/>
+          </a:p>
+        </p:txBody>
+      </p:sp>
+      <p:sp>
+        <p:nvSpPr>
+          <p:cNvPr id="17" name="Rectangle 1">
+            <a:extLst>
+              <a:ext uri="{FF2B5EF4-FFF2-40B4-BE49-F238E27FC236}">
+                <a16:creationId xmlns:a16="http://schemas.microsoft.com/office/drawing/2014/main" id="{A9ECF093-A1BF-FA8D-B6F4-CCBCA5D028F3}"/>
+              </a:ext>
+            </a:extLst>
+          </p:cNvPr>
+          <p:cNvSpPr/>
+          <p:nvPr/>
+        </p:nvSpPr>
+        <p:spPr>
+          <a:xfrm>
+            <a:off x="12030705" y="0"/>
+            <a:ext cx="164592" cy="6858000"/>
+          </a:xfrm>
+          <a:prstGeom prst="rect">
+            <a:avLst/>
+          </a:prstGeom>
+          <a:solidFill>
+            <a:srgbClr val="007E80"/>
+          </a:solidFill>
+          <a:ln>
+            <a:noFill/>
+          </a:ln>
+        </p:spPr>
+        <p:style>
+          <a:lnRef idx="1">
+            <a:schemeClr val="accent1"/>
+          </a:lnRef>
+          <a:fillRef idx="3">
+            <a:schemeClr val="accent1"/>
+          </a:fillRef>
+          <a:effectRef idx="2">
+            <a:schemeClr val="accent1"/>
+          </a:effectRef>
+          <a:fontRef idx="minor">
+            <a:schemeClr val="lt1"/>
+          </a:fontRef>
+        </p:style>
+        <p:txBody>
+          <a:bodyPr rtlCol="0" anchor="ctr"/>
+          <a:lstStyle/>
+          <a:p>
+            <a:pPr algn="ctr"/>
+            <a:endParaRPr/>
           </a:p>
         </p:txBody>
       </p:sp>
@@ -5650,8 +5499,8 @@
         </p:nvSpPr>
         <p:spPr>
           <a:xfrm>
-            <a:off x="502920" y="228600"/>
-            <a:ext cx="11155680" cy="411480"/>
+            <a:off x="502920" y="292608"/>
+            <a:ext cx="11155680" cy="502920"/>
           </a:xfrm>
           <a:prstGeom prst="rect">
             <a:avLst/>
@@ -5660,12 +5509,435 @@
         </p:spPr>
         <p:txBody>
           <a:bodyPr wrap="square">
-            <a:normAutofit lnSpcReduction="10000"/>
+            <a:normAutofit/>
           </a:bodyPr>
           <a:lstStyle/>
           <a:p>
+            <a:pPr>
+              <a:defRPr sz="2400" b="1">
+                <a:solidFill>
+                  <a:srgbClr val="1F2328"/>
+                </a:solidFill>
+                <a:latin typeface="Aptos"/>
+              </a:defRPr>
+            </a:pPr>
+            <a:r>
+              <a:rPr lang="tr-TR"/>
+              <a:t>Merkezi Yapı ve Genel Sonuçlar</a:t>
+            </a:r>
+            <a:endParaRPr/>
+          </a:p>
+        </p:txBody>
+      </p:sp>
+      <p:sp>
+        <p:nvSpPr>
+          <p:cNvPr id="3" name="Rectangle 2"/>
+          <p:cNvSpPr/>
+          <p:nvPr/>
+        </p:nvSpPr>
+        <p:spPr>
+          <a:xfrm>
+            <a:off x="530352" y="1143000"/>
+            <a:ext cx="11109960" cy="13716"/>
+          </a:xfrm>
+          <a:prstGeom prst="rect">
+            <a:avLst/>
+          </a:prstGeom>
+          <a:solidFill>
+            <a:srgbClr val="DCE1E6"/>
+          </a:solidFill>
+          <a:ln>
+            <a:noFill/>
+          </a:ln>
+        </p:spPr>
+        <p:style>
+          <a:lnRef idx="1">
+            <a:schemeClr val="accent1"/>
+          </a:lnRef>
+          <a:fillRef idx="3">
+            <a:schemeClr val="accent1"/>
+          </a:fillRef>
+          <a:effectRef idx="2">
+            <a:schemeClr val="accent1"/>
+          </a:effectRef>
+          <a:fontRef idx="minor">
+            <a:schemeClr val="lt1"/>
+          </a:fontRef>
+        </p:style>
+        <p:txBody>
+          <a:bodyPr rtlCol="0" anchor="ctr"/>
+          <a:lstStyle/>
+          <a:p>
+            <a:pPr algn="ctr"/>
+            <a:endParaRPr/>
+          </a:p>
+        </p:txBody>
+      </p:sp>
+      <p:sp>
+        <p:nvSpPr>
+          <p:cNvPr id="4" name="Rounded Rectangle 3"/>
+          <p:cNvSpPr/>
+          <p:nvPr/>
+        </p:nvSpPr>
+        <p:spPr>
+          <a:xfrm>
+            <a:off x="731520" y="1508760"/>
+            <a:ext cx="2057400" cy="822960"/>
+          </a:xfrm>
+          <a:prstGeom prst="roundRect">
+            <a:avLst/>
+          </a:prstGeom>
+          <a:solidFill>
+            <a:srgbClr val="FFFFFF"/>
+          </a:solidFill>
+          <a:ln>
+            <a:solidFill>
+              <a:srgbClr val="DCE1E6"/>
+            </a:solidFill>
+          </a:ln>
+        </p:spPr>
+        <p:style>
+          <a:lnRef idx="1">
+            <a:schemeClr val="accent1"/>
+          </a:lnRef>
+          <a:fillRef idx="3">
+            <a:schemeClr val="accent1"/>
+          </a:fillRef>
+          <a:effectRef idx="2">
+            <a:schemeClr val="accent1"/>
+          </a:effectRef>
+          <a:fontRef idx="minor">
+            <a:schemeClr val="lt1"/>
+          </a:fontRef>
+        </p:style>
+        <p:txBody>
+          <a:bodyPr lIns="164592" tIns="64008" rtlCol="0" anchor="ctr"/>
+          <a:lstStyle/>
+          <a:p>
             <a:pPr algn="ctr">
-              <a:defRPr sz="2200" b="1">
+              <a:defRPr sz="1900" b="1">
+                <a:solidFill>
+                  <a:srgbClr val="1C5691"/>
+                </a:solidFill>
+                <a:latin typeface="Aptos Display"/>
+              </a:defRPr>
+            </a:pPr>
+            <a:r>
+              <a:t>19</a:t>
+            </a:r>
+          </a:p>
+          <a:p>
+            <a:pPr>
+              <a:defRPr sz="1000">
+                <a:solidFill>
+                  <a:srgbClr val="5E6670"/>
+                </a:solidFill>
+                <a:latin typeface="Aptos"/>
+              </a:defRPr>
+            </a:pPr>
+            <a:r>
+              <a:t>Başlangıç kenar</a:t>
+            </a:r>
+          </a:p>
+        </p:txBody>
+      </p:sp>
+      <p:sp>
+        <p:nvSpPr>
+          <p:cNvPr id="5" name="Rectangle 4"/>
+          <p:cNvSpPr/>
+          <p:nvPr/>
+        </p:nvSpPr>
+        <p:spPr>
+          <a:xfrm>
+            <a:off x="731520" y="1508760"/>
+            <a:ext cx="64008" cy="822960"/>
+          </a:xfrm>
+          <a:prstGeom prst="rect">
+            <a:avLst/>
+          </a:prstGeom>
+          <a:solidFill>
+            <a:srgbClr val="1C5691"/>
+          </a:solidFill>
+          <a:ln>
+            <a:noFill/>
+          </a:ln>
+        </p:spPr>
+        <p:style>
+          <a:lnRef idx="1">
+            <a:schemeClr val="accent1"/>
+          </a:lnRef>
+          <a:fillRef idx="3">
+            <a:schemeClr val="accent1"/>
+          </a:fillRef>
+          <a:effectRef idx="2">
+            <a:schemeClr val="accent1"/>
+          </a:effectRef>
+          <a:fontRef idx="minor">
+            <a:schemeClr val="lt1"/>
+          </a:fontRef>
+        </p:style>
+        <p:txBody>
+          <a:bodyPr rtlCol="0" anchor="ctr"/>
+          <a:lstStyle/>
+          <a:p>
+            <a:pPr algn="ctr"/>
+            <a:endParaRPr/>
+          </a:p>
+        </p:txBody>
+      </p:sp>
+      <p:sp>
+        <p:nvSpPr>
+          <p:cNvPr id="6" name="Rounded Rectangle 5"/>
+          <p:cNvSpPr/>
+          <p:nvPr/>
+        </p:nvSpPr>
+        <p:spPr>
+          <a:xfrm>
+            <a:off x="3154680" y="1508760"/>
+            <a:ext cx="2057400" cy="822960"/>
+          </a:xfrm>
+          <a:prstGeom prst="roundRect">
+            <a:avLst/>
+          </a:prstGeom>
+          <a:solidFill>
+            <a:srgbClr val="FFFFFF"/>
+          </a:solidFill>
+          <a:ln>
+            <a:solidFill>
+              <a:srgbClr val="DCE1E6"/>
+            </a:solidFill>
+          </a:ln>
+        </p:spPr>
+        <p:style>
+          <a:lnRef idx="1">
+            <a:schemeClr val="accent1"/>
+          </a:lnRef>
+          <a:fillRef idx="3">
+            <a:schemeClr val="accent1"/>
+          </a:fillRef>
+          <a:effectRef idx="2">
+            <a:schemeClr val="accent1"/>
+          </a:effectRef>
+          <a:fontRef idx="minor">
+            <a:schemeClr val="lt1"/>
+          </a:fontRef>
+        </p:style>
+        <p:txBody>
+          <a:bodyPr lIns="164592" tIns="64008" rtlCol="0" anchor="ctr"/>
+          <a:lstStyle/>
+          <a:p>
+            <a:pPr algn="ctr">
+              <a:defRPr sz="1900" b="1">
+                <a:solidFill>
+                  <a:srgbClr val="007E80"/>
+                </a:solidFill>
+                <a:latin typeface="Aptos Display"/>
+              </a:defRPr>
+            </a:pPr>
+            <a:r>
+              <a:t>14</a:t>
+            </a:r>
+          </a:p>
+          <a:p>
+            <a:pPr>
+              <a:defRPr sz="1000">
+                <a:solidFill>
+                  <a:srgbClr val="5E6670"/>
+                </a:solidFill>
+                <a:latin typeface="Aptos"/>
+              </a:defRPr>
+            </a:pPr>
+            <a:r>
+              <a:t>SP500 çıkarılınca</a:t>
+            </a:r>
+          </a:p>
+        </p:txBody>
+      </p:sp>
+      <p:sp>
+        <p:nvSpPr>
+          <p:cNvPr id="7" name="Rectangle 6"/>
+          <p:cNvSpPr/>
+          <p:nvPr/>
+        </p:nvSpPr>
+        <p:spPr>
+          <a:xfrm>
+            <a:off x="3154680" y="1508760"/>
+            <a:ext cx="64008" cy="822960"/>
+          </a:xfrm>
+          <a:prstGeom prst="rect">
+            <a:avLst/>
+          </a:prstGeom>
+          <a:solidFill>
+            <a:srgbClr val="007E80"/>
+          </a:solidFill>
+          <a:ln>
+            <a:noFill/>
+          </a:ln>
+        </p:spPr>
+        <p:style>
+          <a:lnRef idx="1">
+            <a:schemeClr val="accent1"/>
+          </a:lnRef>
+          <a:fillRef idx="3">
+            <a:schemeClr val="accent1"/>
+          </a:fillRef>
+          <a:effectRef idx="2">
+            <a:schemeClr val="accent1"/>
+          </a:effectRef>
+          <a:fontRef idx="minor">
+            <a:schemeClr val="lt1"/>
+          </a:fontRef>
+        </p:style>
+        <p:txBody>
+          <a:bodyPr rtlCol="0" anchor="ctr"/>
+          <a:lstStyle/>
+          <a:p>
+            <a:pPr algn="ctr"/>
+            <a:endParaRPr/>
+          </a:p>
+        </p:txBody>
+      </p:sp>
+      <p:sp>
+        <p:nvSpPr>
+          <p:cNvPr id="8" name="Rounded Rectangle 7"/>
+          <p:cNvSpPr/>
+          <p:nvPr/>
+        </p:nvSpPr>
+        <p:spPr>
+          <a:xfrm>
+            <a:off x="5577840" y="1508760"/>
+            <a:ext cx="2057400" cy="822960"/>
+          </a:xfrm>
+          <a:prstGeom prst="roundRect">
+            <a:avLst/>
+          </a:prstGeom>
+          <a:solidFill>
+            <a:srgbClr val="FFFFFF"/>
+          </a:solidFill>
+          <a:ln>
+            <a:solidFill>
+              <a:srgbClr val="DCE1E6"/>
+            </a:solidFill>
+          </a:ln>
+        </p:spPr>
+        <p:style>
+          <a:lnRef idx="1">
+            <a:schemeClr val="accent1"/>
+          </a:lnRef>
+          <a:fillRef idx="3">
+            <a:schemeClr val="accent1"/>
+          </a:fillRef>
+          <a:effectRef idx="2">
+            <a:schemeClr val="accent1"/>
+          </a:effectRef>
+          <a:fontRef idx="minor">
+            <a:schemeClr val="lt1"/>
+          </a:fontRef>
+        </p:style>
+        <p:txBody>
+          <a:bodyPr lIns="164592" tIns="64008" rtlCol="0" anchor="ctr"/>
+          <a:lstStyle/>
+          <a:p>
+            <a:pPr algn="ctr">
+              <a:defRPr sz="1900" b="1">
+                <a:solidFill>
+                  <a:srgbClr val="B94242"/>
+                </a:solidFill>
+                <a:latin typeface="Aptos Display"/>
+              </a:defRPr>
+            </a:pPr>
+            <a:r>
+              <a:t>14</a:t>
+            </a:r>
+          </a:p>
+          <a:p>
+            <a:pPr>
+              <a:defRPr sz="1000">
+                <a:solidFill>
+                  <a:srgbClr val="5E6670"/>
+                </a:solidFill>
+                <a:latin typeface="Aptos"/>
+              </a:defRPr>
+            </a:pPr>
+            <a:r>
+              <a:t>VIX çıkarılınca</a:t>
+            </a:r>
+          </a:p>
+        </p:txBody>
+      </p:sp>
+      <p:sp>
+        <p:nvSpPr>
+          <p:cNvPr id="9" name="Rectangle 8"/>
+          <p:cNvSpPr/>
+          <p:nvPr/>
+        </p:nvSpPr>
+        <p:spPr>
+          <a:xfrm>
+            <a:off x="5577840" y="1508760"/>
+            <a:ext cx="64008" cy="822960"/>
+          </a:xfrm>
+          <a:prstGeom prst="rect">
+            <a:avLst/>
+          </a:prstGeom>
+          <a:solidFill>
+            <a:srgbClr val="B94242"/>
+          </a:solidFill>
+          <a:ln>
+            <a:noFill/>
+          </a:ln>
+        </p:spPr>
+        <p:style>
+          <a:lnRef idx="1">
+            <a:schemeClr val="accent1"/>
+          </a:lnRef>
+          <a:fillRef idx="3">
+            <a:schemeClr val="accent1"/>
+          </a:fillRef>
+          <a:effectRef idx="2">
+            <a:schemeClr val="accent1"/>
+          </a:effectRef>
+          <a:fontRef idx="minor">
+            <a:schemeClr val="lt1"/>
+          </a:fontRef>
+        </p:style>
+        <p:txBody>
+          <a:bodyPr rtlCol="0" anchor="ctr"/>
+          <a:lstStyle/>
+          <a:p>
+            <a:pPr algn="ctr"/>
+            <a:endParaRPr/>
+          </a:p>
+        </p:txBody>
+      </p:sp>
+      <p:sp>
+        <p:nvSpPr>
+          <p:cNvPr id="12" name="TextBox 11"/>
+          <p:cNvSpPr txBox="1"/>
+          <p:nvPr/>
+        </p:nvSpPr>
+        <p:spPr>
+          <a:xfrm>
+            <a:off x="594360" y="3246120"/>
+            <a:ext cx="5486400" cy="2468880"/>
+          </a:xfrm>
+          <a:prstGeom prst="rect">
+            <a:avLst/>
+          </a:prstGeom>
+          <a:noFill/>
+        </p:spPr>
+        <p:txBody>
+          <a:bodyPr wrap="square">
+            <a:normAutofit/>
+          </a:bodyPr>
+          <a:lstStyle/>
+          <a:p>
+            <a:pPr marL="285750" indent="-285750">
+              <a:spcAft>
+                <a:spcPts val="800"/>
+              </a:spcAft>
+              <a:buFont typeface="Arial" panose="020B0604020202020204" pitchFamily="34" charset="0"/>
+              <a:buChar char="•"/>
+              <a:defRPr sz="1600">
                 <a:solidFill>
                   <a:srgbClr val="1F2328"/>
                 </a:solidFill>
@@ -5673,14 +5945,68 @@
               </a:defRPr>
             </a:pPr>
             <a:r>
-              <a:t>Finansal Ağ Analizi Pipeline Akışı</a:t>
+              <a:t>Merkezi düğüm çıkarma kenar sayısını azaltıyor.</a:t>
+            </a:r>
+          </a:p>
+          <a:p>
+            <a:pPr marL="285750" indent="-285750">
+              <a:spcAft>
+                <a:spcPts val="800"/>
+              </a:spcAft>
+              <a:buFont typeface="Arial" panose="020B0604020202020204" pitchFamily="34" charset="0"/>
+              <a:buChar char="•"/>
+              <a:defRPr sz="1600">
+                <a:solidFill>
+                  <a:srgbClr val="1F2328"/>
+                </a:solidFill>
+                <a:latin typeface="Aptos"/>
+              </a:defRPr>
+            </a:pPr>
+            <a:r>
+              <a:t>Ağ tamamen çökmüyor; ancak çekirdek yapı zayıflıyor.</a:t>
+            </a:r>
+          </a:p>
+          <a:p>
+            <a:pPr marL="285750" indent="-285750">
+              <a:spcAft>
+                <a:spcPts val="800"/>
+              </a:spcAft>
+              <a:buFont typeface="Arial" panose="020B0604020202020204" pitchFamily="34" charset="0"/>
+              <a:buChar char="•"/>
+              <a:defRPr sz="1600">
+                <a:solidFill>
+                  <a:srgbClr val="1F2328"/>
+                </a:solidFill>
+                <a:latin typeface="Aptos"/>
+              </a:defRPr>
+            </a:pPr>
+            <a:r>
+              <a:t>Hisse senedi endeksleri ve VIX en dikkat çeken merkez yapıyı oluşturuyor.</a:t>
+            </a:r>
+          </a:p>
+          <a:p>
+            <a:pPr marL="285750" indent="-285750">
+              <a:spcAft>
+                <a:spcPts val="800"/>
+              </a:spcAft>
+              <a:buFont typeface="Arial" panose="020B0604020202020204" pitchFamily="34" charset="0"/>
+              <a:buChar char="•"/>
+              <a:defRPr sz="1600">
+                <a:solidFill>
+                  <a:srgbClr val="1F2328"/>
+                </a:solidFill>
+                <a:latin typeface="Aptos"/>
+              </a:defRPr>
+            </a:pPr>
+            <a:r>
+              <a:t>Sosyal ağ analizi finansal varlıkları sistem olarak okumayı kolaylaştırıyor.</a:t>
             </a:r>
           </a:p>
         </p:txBody>
       </p:sp>
       <p:pic>
         <p:nvPicPr>
-          <p:cNvPr id="3" name="Picture 2" descr="image.png"/>
+          <p:cNvPr id="13" name="Picture 12" descr="degree_distribution.png"/>
           <p:cNvPicPr>
             <a:picLocks noChangeAspect="1"/>
           </p:cNvPicPr>
@@ -5694,6 +6020,227 @@
         </p:blipFill>
         <p:spPr>
           <a:xfrm>
+            <a:off x="6080760" y="2683763"/>
+            <a:ext cx="5887122" cy="3277765"/>
+          </a:xfrm>
+          <a:prstGeom prst="rect">
+            <a:avLst/>
+          </a:prstGeom>
+        </p:spPr>
+      </p:pic>
+      <p:sp>
+        <p:nvSpPr>
+          <p:cNvPr id="14" name="TextBox 13"/>
+          <p:cNvSpPr txBox="1"/>
+          <p:nvPr/>
+        </p:nvSpPr>
+        <p:spPr>
+          <a:xfrm>
+            <a:off x="11155680" y="6446520"/>
+            <a:ext cx="548640" cy="228600"/>
+          </a:xfrm>
+          <a:prstGeom prst="rect">
+            <a:avLst/>
+          </a:prstGeom>
+          <a:noFill/>
+        </p:spPr>
+        <p:txBody>
+          <a:bodyPr wrap="square">
+            <a:normAutofit fontScale="55000" lnSpcReduction="20000"/>
+          </a:bodyPr>
+          <a:lstStyle/>
+          <a:p>
+            <a:r>
+              <a:t>8</a:t>
+            </a:r>
+          </a:p>
+        </p:txBody>
+      </p:sp>
+      <p:sp>
+        <p:nvSpPr>
+          <p:cNvPr id="10" name="Rectangle 1">
+            <a:extLst>
+              <a:ext uri="{FF2B5EF4-FFF2-40B4-BE49-F238E27FC236}">
+                <a16:creationId xmlns:a16="http://schemas.microsoft.com/office/drawing/2014/main" id="{90DC5FDA-960D-1A60-9344-5DA6B030A286}"/>
+              </a:ext>
+            </a:extLst>
+          </p:cNvPr>
+          <p:cNvSpPr/>
+          <p:nvPr/>
+        </p:nvSpPr>
+        <p:spPr>
+          <a:xfrm>
+            <a:off x="0" y="0"/>
+            <a:ext cx="164592" cy="6858000"/>
+          </a:xfrm>
+          <a:prstGeom prst="rect">
+            <a:avLst/>
+          </a:prstGeom>
+          <a:solidFill>
+            <a:srgbClr val="007E80"/>
+          </a:solidFill>
+          <a:ln>
+            <a:noFill/>
+          </a:ln>
+        </p:spPr>
+        <p:style>
+          <a:lnRef idx="1">
+            <a:schemeClr val="accent1"/>
+          </a:lnRef>
+          <a:fillRef idx="3">
+            <a:schemeClr val="accent1"/>
+          </a:fillRef>
+          <a:effectRef idx="2">
+            <a:schemeClr val="accent1"/>
+          </a:effectRef>
+          <a:fontRef idx="minor">
+            <a:schemeClr val="lt1"/>
+          </a:fontRef>
+        </p:style>
+        <p:txBody>
+          <a:bodyPr rtlCol="0" anchor="ctr"/>
+          <a:lstStyle/>
+          <a:p>
+            <a:pPr algn="ctr"/>
+            <a:endParaRPr/>
+          </a:p>
+        </p:txBody>
+      </p:sp>
+      <p:sp>
+        <p:nvSpPr>
+          <p:cNvPr id="11" name="Rectangle 1">
+            <a:extLst>
+              <a:ext uri="{FF2B5EF4-FFF2-40B4-BE49-F238E27FC236}">
+                <a16:creationId xmlns:a16="http://schemas.microsoft.com/office/drawing/2014/main" id="{BBE530BA-4E2C-23EE-D416-415B977295B3}"/>
+              </a:ext>
+            </a:extLst>
+          </p:cNvPr>
+          <p:cNvSpPr/>
+          <p:nvPr/>
+        </p:nvSpPr>
+        <p:spPr>
+          <a:xfrm>
+            <a:off x="12030705" y="0"/>
+            <a:ext cx="164592" cy="6858000"/>
+          </a:xfrm>
+          <a:prstGeom prst="rect">
+            <a:avLst/>
+          </a:prstGeom>
+          <a:solidFill>
+            <a:srgbClr val="007E80"/>
+          </a:solidFill>
+          <a:ln>
+            <a:noFill/>
+          </a:ln>
+        </p:spPr>
+        <p:style>
+          <a:lnRef idx="1">
+            <a:schemeClr val="accent1"/>
+          </a:lnRef>
+          <a:fillRef idx="3">
+            <a:schemeClr val="accent1"/>
+          </a:fillRef>
+          <a:effectRef idx="2">
+            <a:schemeClr val="accent1"/>
+          </a:effectRef>
+          <a:fontRef idx="minor">
+            <a:schemeClr val="lt1"/>
+          </a:fontRef>
+        </p:style>
+        <p:txBody>
+          <a:bodyPr rtlCol="0" anchor="ctr"/>
+          <a:lstStyle/>
+          <a:p>
+            <a:pPr algn="ctr"/>
+            <a:endParaRPr/>
+          </a:p>
+        </p:txBody>
+      </p:sp>
+    </p:spTree>
+  </p:cSld>
+  <p:clrMapOvr>
+    <a:masterClrMapping/>
+  </p:clrMapOvr>
+</p:sld>
+</file>
+
+<file path=ppt/slides/slide13.xml><?xml version="1.0" encoding="utf-8"?>
+<p:sld xmlns:a="http://schemas.openxmlformats.org/drawingml/2006/main" xmlns:r="http://schemas.openxmlformats.org/officeDocument/2006/relationships" xmlns:p="http://schemas.openxmlformats.org/presentationml/2006/main">
+  <p:cSld>
+    <p:bg>
+      <p:bgPr>
+        <a:solidFill>
+          <a:srgbClr val="F8FAFC"/>
+        </a:solidFill>
+        <a:effectLst/>
+      </p:bgPr>
+    </p:bg>
+    <p:spTree>
+      <p:nvGrpSpPr>
+        <p:cNvPr id="1" name=""/>
+        <p:cNvGrpSpPr/>
+        <p:nvPr/>
+      </p:nvGrpSpPr>
+      <p:grpSpPr>
+        <a:xfrm>
+          <a:off x="0" y="0"/>
+          <a:ext cx="0" cy="0"/>
+          <a:chOff x="0" y="0"/>
+          <a:chExt cx="0" cy="0"/>
+        </a:xfrm>
+      </p:grpSpPr>
+      <p:sp>
+        <p:nvSpPr>
+          <p:cNvPr id="2" name="TextBox 1"/>
+          <p:cNvSpPr txBox="1"/>
+          <p:nvPr/>
+        </p:nvSpPr>
+        <p:spPr>
+          <a:xfrm>
+            <a:off x="502920" y="228600"/>
+            <a:ext cx="11155680" cy="411480"/>
+          </a:xfrm>
+          <a:prstGeom prst="rect">
+            <a:avLst/>
+          </a:prstGeom>
+          <a:noFill/>
+        </p:spPr>
+        <p:txBody>
+          <a:bodyPr wrap="square">
+            <a:normAutofit lnSpcReduction="10000"/>
+          </a:bodyPr>
+          <a:lstStyle/>
+          <a:p>
+            <a:pPr algn="ctr">
+              <a:defRPr sz="2200" b="1">
+                <a:solidFill>
+                  <a:srgbClr val="1F2328"/>
+                </a:solidFill>
+                <a:latin typeface="Aptos"/>
+              </a:defRPr>
+            </a:pPr>
+            <a:r>
+              <a:t>Finansal Ağ Analizi Pipeline Akışı</a:t>
+            </a:r>
+          </a:p>
+        </p:txBody>
+      </p:sp>
+      <p:pic>
+        <p:nvPicPr>
+          <p:cNvPr id="3" name="Picture 2" descr="image.png"/>
+          <p:cNvPicPr>
+            <a:picLocks noChangeAspect="1"/>
+          </p:cNvPicPr>
+          <p:nvPr/>
+        </p:nvPicPr>
+        <p:blipFill>
+          <a:blip r:embed="rId2"/>
+          <a:stretch>
+            <a:fillRect/>
+          </a:stretch>
+        </p:blipFill>
+        <p:spPr>
+          <a:xfrm>
             <a:off x="320040" y="713232"/>
             <a:ext cx="11567160" cy="5715000"/>
           </a:xfrm>
@@ -5702,6 +6249,106 @@
           </a:prstGeom>
         </p:spPr>
       </p:pic>
+      <p:sp>
+        <p:nvSpPr>
+          <p:cNvPr id="4" name="Rectangle 1">
+            <a:extLst>
+              <a:ext uri="{FF2B5EF4-FFF2-40B4-BE49-F238E27FC236}">
+                <a16:creationId xmlns:a16="http://schemas.microsoft.com/office/drawing/2014/main" id="{D29F54F6-537C-5445-A528-BA44B3241D9B}"/>
+              </a:ext>
+            </a:extLst>
+          </p:cNvPr>
+          <p:cNvSpPr/>
+          <p:nvPr/>
+        </p:nvSpPr>
+        <p:spPr>
+          <a:xfrm>
+            <a:off x="0" y="0"/>
+            <a:ext cx="164592" cy="6858000"/>
+          </a:xfrm>
+          <a:prstGeom prst="rect">
+            <a:avLst/>
+          </a:prstGeom>
+          <a:solidFill>
+            <a:srgbClr val="007E80"/>
+          </a:solidFill>
+          <a:ln>
+            <a:noFill/>
+          </a:ln>
+        </p:spPr>
+        <p:style>
+          <a:lnRef idx="1">
+            <a:schemeClr val="accent1"/>
+          </a:lnRef>
+          <a:fillRef idx="3">
+            <a:schemeClr val="accent1"/>
+          </a:fillRef>
+          <a:effectRef idx="2">
+            <a:schemeClr val="accent1"/>
+          </a:effectRef>
+          <a:fontRef idx="minor">
+            <a:schemeClr val="lt1"/>
+          </a:fontRef>
+        </p:style>
+        <p:txBody>
+          <a:bodyPr rtlCol="0" anchor="ctr"/>
+          <a:lstStyle/>
+          <a:p>
+            <a:pPr algn="ctr"/>
+            <a:endParaRPr/>
+          </a:p>
+        </p:txBody>
+      </p:sp>
+      <p:sp>
+        <p:nvSpPr>
+          <p:cNvPr id="5" name="Rectangle 1">
+            <a:extLst>
+              <a:ext uri="{FF2B5EF4-FFF2-40B4-BE49-F238E27FC236}">
+                <a16:creationId xmlns:a16="http://schemas.microsoft.com/office/drawing/2014/main" id="{A3656398-868E-CE37-B9BD-DAF4C21C27EE}"/>
+              </a:ext>
+            </a:extLst>
+          </p:cNvPr>
+          <p:cNvSpPr/>
+          <p:nvPr/>
+        </p:nvSpPr>
+        <p:spPr>
+          <a:xfrm>
+            <a:off x="12030705" y="0"/>
+            <a:ext cx="164592" cy="6858000"/>
+          </a:xfrm>
+          <a:prstGeom prst="rect">
+            <a:avLst/>
+          </a:prstGeom>
+          <a:solidFill>
+            <a:srgbClr val="007E80"/>
+          </a:solidFill>
+          <a:ln>
+            <a:noFill/>
+          </a:ln>
+        </p:spPr>
+        <p:style>
+          <a:lnRef idx="1">
+            <a:schemeClr val="accent1"/>
+          </a:lnRef>
+          <a:fillRef idx="3">
+            <a:schemeClr val="accent1"/>
+          </a:fillRef>
+          <a:effectRef idx="2">
+            <a:schemeClr val="accent1"/>
+          </a:effectRef>
+          <a:fontRef idx="minor">
+            <a:schemeClr val="lt1"/>
+          </a:fontRef>
+        </p:style>
+        <p:txBody>
+          <a:bodyPr rtlCol="0" anchor="ctr"/>
+          <a:lstStyle/>
+          <a:p>
+            <a:pPr algn="ctr"/>
+            <a:endParaRPr/>
+          </a:p>
+        </p:txBody>
+      </p:sp>
     </p:spTree>
   </p:cSld>
   <p:clrMapOvr>
@@ -6643,6 +7290,136 @@
           </a:p>
         </p:txBody>
       </p:sp>
+      <p:pic>
+        <p:nvPicPr>
+          <p:cNvPr id="30" name="Resim 29">
+            <a:extLst>
+              <a:ext uri="{FF2B5EF4-FFF2-40B4-BE49-F238E27FC236}">
+                <a16:creationId xmlns:a16="http://schemas.microsoft.com/office/drawing/2014/main" id="{94C4F4B2-38A8-9847-C819-967BDEE1A4A9}"/>
+              </a:ext>
+            </a:extLst>
+          </p:cNvPr>
+          <p:cNvPicPr>
+            <a:picLocks noChangeAspect="1"/>
+          </p:cNvPicPr>
+          <p:nvPr/>
+        </p:nvPicPr>
+        <p:blipFill>
+          <a:blip r:embed="rId2"/>
+          <a:stretch>
+            <a:fillRect/>
+          </a:stretch>
+        </p:blipFill>
+        <p:spPr>
+          <a:xfrm>
+            <a:off x="4627145" y="2674852"/>
+            <a:ext cx="906389" cy="189246"/>
+          </a:xfrm>
+          <a:prstGeom prst="rect">
+            <a:avLst/>
+          </a:prstGeom>
+        </p:spPr>
+      </p:pic>
+      <p:sp>
+        <p:nvSpPr>
+          <p:cNvPr id="16" name="Rectangle 1">
+            <a:extLst>
+              <a:ext uri="{FF2B5EF4-FFF2-40B4-BE49-F238E27FC236}">
+                <a16:creationId xmlns:a16="http://schemas.microsoft.com/office/drawing/2014/main" id="{61A383BF-84E2-74C4-5487-C63C6CEAC3A8}"/>
+              </a:ext>
+            </a:extLst>
+          </p:cNvPr>
+          <p:cNvSpPr/>
+          <p:nvPr/>
+        </p:nvSpPr>
+        <p:spPr>
+          <a:xfrm>
+            <a:off x="0" y="0"/>
+            <a:ext cx="164592" cy="6858000"/>
+          </a:xfrm>
+          <a:prstGeom prst="rect">
+            <a:avLst/>
+          </a:prstGeom>
+          <a:solidFill>
+            <a:srgbClr val="007E80"/>
+          </a:solidFill>
+          <a:ln>
+            <a:noFill/>
+          </a:ln>
+        </p:spPr>
+        <p:style>
+          <a:lnRef idx="1">
+            <a:schemeClr val="accent1"/>
+          </a:lnRef>
+          <a:fillRef idx="3">
+            <a:schemeClr val="accent1"/>
+          </a:fillRef>
+          <a:effectRef idx="2">
+            <a:schemeClr val="accent1"/>
+          </a:effectRef>
+          <a:fontRef idx="minor">
+            <a:schemeClr val="lt1"/>
+          </a:fontRef>
+        </p:style>
+        <p:txBody>
+          <a:bodyPr rtlCol="0" anchor="ctr"/>
+          <a:lstStyle/>
+          <a:p>
+            <a:pPr algn="ctr"/>
+            <a:endParaRPr/>
+          </a:p>
+        </p:txBody>
+      </p:sp>
+      <p:sp>
+        <p:nvSpPr>
+          <p:cNvPr id="19" name="Rectangle 1">
+            <a:extLst>
+              <a:ext uri="{FF2B5EF4-FFF2-40B4-BE49-F238E27FC236}">
+                <a16:creationId xmlns:a16="http://schemas.microsoft.com/office/drawing/2014/main" id="{C10A41B0-0FE7-14B7-79B4-EA2A4CA4C5FC}"/>
+              </a:ext>
+            </a:extLst>
+          </p:cNvPr>
+          <p:cNvSpPr/>
+          <p:nvPr/>
+        </p:nvSpPr>
+        <p:spPr>
+          <a:xfrm>
+            <a:off x="12030705" y="0"/>
+            <a:ext cx="164592" cy="6858000"/>
+          </a:xfrm>
+          <a:prstGeom prst="rect">
+            <a:avLst/>
+          </a:prstGeom>
+          <a:solidFill>
+            <a:srgbClr val="007E80"/>
+          </a:solidFill>
+          <a:ln>
+            <a:noFill/>
+          </a:ln>
+        </p:spPr>
+        <p:style>
+          <a:lnRef idx="1">
+            <a:schemeClr val="accent1"/>
+          </a:lnRef>
+          <a:fillRef idx="3">
+            <a:schemeClr val="accent1"/>
+          </a:fillRef>
+          <a:effectRef idx="2">
+            <a:schemeClr val="accent1"/>
+          </a:effectRef>
+          <a:fontRef idx="minor">
+            <a:schemeClr val="lt1"/>
+          </a:fontRef>
+        </p:style>
+        <p:txBody>
+          <a:bodyPr rtlCol="0" anchor="ctr"/>
+          <a:lstStyle/>
+          <a:p>
+            <a:pPr algn="ctr"/>
+            <a:endParaRPr/>
+          </a:p>
+        </p:txBody>
+      </p:sp>
     </p:spTree>
   </p:cSld>
   <p:clrMapOvr>
@@ -6834,7 +7611,14 @@
               <a:t>Dönem</a:t>
             </a:r>
             <a:r>
-              <a:t>: 2014-2024.</a:t>
+              <a:t>: 2014-202</a:t>
+            </a:r>
+            <a:r>
+              <a:rPr lang="tr-TR"/>
+              <a:t>5</a:t>
+            </a:r>
+            <a:r>
+              <a:t>.</a:t>
             </a:r>
           </a:p>
           <a:p>
@@ -6974,6 +7758,37 @@
             </a:pPr>
             <a:r>
               <a:rPr lang="tr-TR" sz="1700"/>
+              <a:t>Farklı piyasalardaki tatil ve işlem günü farklarına bağlı </a:t>
+            </a:r>
+            <a:r>
+              <a:rPr lang="tr-TR" sz="1700">
+                <a:solidFill>
+                  <a:srgbClr val="FF0000"/>
+                </a:solidFill>
+              </a:rPr>
+              <a:t>eksik tarihler temizlendi </a:t>
+            </a:r>
+            <a:r>
+              <a:rPr lang="tr-TR" sz="1700"/>
+              <a:t>(dropna()).</a:t>
+            </a:r>
+          </a:p>
+          <a:p>
+            <a:pPr marL="285750" indent="-285750">
+              <a:spcAft>
+                <a:spcPts val="800"/>
+              </a:spcAft>
+              <a:buFont typeface="Arial" panose="020B0604020202020204" pitchFamily="34" charset="0"/>
+              <a:buChar char="•"/>
+              <a:defRPr sz="1700">
+                <a:solidFill>
+                  <a:srgbClr val="1F2328"/>
+                </a:solidFill>
+                <a:latin typeface="Aptos"/>
+              </a:defRPr>
+            </a:pPr>
+            <a:r>
+              <a:rPr lang="tr-TR" sz="1700"/>
               <a:t>Finansal varlıklar arasındaki ilişkiler </a:t>
             </a:r>
             <a:r>
@@ -7441,6 +8256,106 @@
             <a:r>
               <a:t>3</a:t>
             </a:r>
+          </a:p>
+        </p:txBody>
+      </p:sp>
+      <p:sp>
+        <p:nvSpPr>
+          <p:cNvPr id="13" name="Rectangle 1">
+            <a:extLst>
+              <a:ext uri="{FF2B5EF4-FFF2-40B4-BE49-F238E27FC236}">
+                <a16:creationId xmlns:a16="http://schemas.microsoft.com/office/drawing/2014/main" id="{34F543A0-C9CE-3938-DEFB-F8F0471C1B84}"/>
+              </a:ext>
+            </a:extLst>
+          </p:cNvPr>
+          <p:cNvSpPr/>
+          <p:nvPr/>
+        </p:nvSpPr>
+        <p:spPr>
+          <a:xfrm>
+            <a:off x="0" y="0"/>
+            <a:ext cx="164592" cy="6858000"/>
+          </a:xfrm>
+          <a:prstGeom prst="rect">
+            <a:avLst/>
+          </a:prstGeom>
+          <a:solidFill>
+            <a:srgbClr val="007E80"/>
+          </a:solidFill>
+          <a:ln>
+            <a:noFill/>
+          </a:ln>
+        </p:spPr>
+        <p:style>
+          <a:lnRef idx="1">
+            <a:schemeClr val="accent1"/>
+          </a:lnRef>
+          <a:fillRef idx="3">
+            <a:schemeClr val="accent1"/>
+          </a:fillRef>
+          <a:effectRef idx="2">
+            <a:schemeClr val="accent1"/>
+          </a:effectRef>
+          <a:fontRef idx="minor">
+            <a:schemeClr val="lt1"/>
+          </a:fontRef>
+        </p:style>
+        <p:txBody>
+          <a:bodyPr rtlCol="0" anchor="ctr"/>
+          <a:lstStyle/>
+          <a:p>
+            <a:pPr algn="ctr"/>
+            <a:endParaRPr/>
+          </a:p>
+        </p:txBody>
+      </p:sp>
+      <p:sp>
+        <p:nvSpPr>
+          <p:cNvPr id="17" name="Rectangle 1">
+            <a:extLst>
+              <a:ext uri="{FF2B5EF4-FFF2-40B4-BE49-F238E27FC236}">
+                <a16:creationId xmlns:a16="http://schemas.microsoft.com/office/drawing/2014/main" id="{7AE0217A-E051-A5FD-7124-DF664FCF78B5}"/>
+              </a:ext>
+            </a:extLst>
+          </p:cNvPr>
+          <p:cNvSpPr/>
+          <p:nvPr/>
+        </p:nvSpPr>
+        <p:spPr>
+          <a:xfrm>
+            <a:off x="12030705" y="0"/>
+            <a:ext cx="164592" cy="6858000"/>
+          </a:xfrm>
+          <a:prstGeom prst="rect">
+            <a:avLst/>
+          </a:prstGeom>
+          <a:solidFill>
+            <a:srgbClr val="007E80"/>
+          </a:solidFill>
+          <a:ln>
+            <a:noFill/>
+          </a:ln>
+        </p:spPr>
+        <p:style>
+          <a:lnRef idx="1">
+            <a:schemeClr val="accent1"/>
+          </a:lnRef>
+          <a:fillRef idx="3">
+            <a:schemeClr val="accent1"/>
+          </a:fillRef>
+          <a:effectRef idx="2">
+            <a:schemeClr val="accent1"/>
+          </a:effectRef>
+          <a:fontRef idx="minor">
+            <a:schemeClr val="lt1"/>
+          </a:fontRef>
+        </p:style>
+        <p:txBody>
+          <a:bodyPr rtlCol="0" anchor="ctr"/>
+          <a:lstStyle/>
+          <a:p>
+            <a:pPr algn="ctr"/>
+            <a:endParaRPr/>
           </a:p>
         </p:txBody>
       </p:sp>
@@ -7623,6 +8538,106 @@
               <a:rPr lang="tr-TR"/>
               <a:t> </a:t>
             </a:r>
+          </a:p>
+        </p:txBody>
+      </p:sp>
+      <p:sp>
+        <p:nvSpPr>
+          <p:cNvPr id="2" name="Rectangle 1">
+            <a:extLst>
+              <a:ext uri="{FF2B5EF4-FFF2-40B4-BE49-F238E27FC236}">
+                <a16:creationId xmlns:a16="http://schemas.microsoft.com/office/drawing/2014/main" id="{3D5860B2-28DC-6E65-5384-5F88C2A31907}"/>
+              </a:ext>
+            </a:extLst>
+          </p:cNvPr>
+          <p:cNvSpPr/>
+          <p:nvPr/>
+        </p:nvSpPr>
+        <p:spPr>
+          <a:xfrm>
+            <a:off x="0" y="0"/>
+            <a:ext cx="164592" cy="6858000"/>
+          </a:xfrm>
+          <a:prstGeom prst="rect">
+            <a:avLst/>
+          </a:prstGeom>
+          <a:solidFill>
+            <a:srgbClr val="007E80"/>
+          </a:solidFill>
+          <a:ln>
+            <a:noFill/>
+          </a:ln>
+        </p:spPr>
+        <p:style>
+          <a:lnRef idx="1">
+            <a:schemeClr val="accent1"/>
+          </a:lnRef>
+          <a:fillRef idx="3">
+            <a:schemeClr val="accent1"/>
+          </a:fillRef>
+          <a:effectRef idx="2">
+            <a:schemeClr val="accent1"/>
+          </a:effectRef>
+          <a:fontRef idx="minor">
+            <a:schemeClr val="lt1"/>
+          </a:fontRef>
+        </p:style>
+        <p:txBody>
+          <a:bodyPr rtlCol="0" anchor="ctr"/>
+          <a:lstStyle/>
+          <a:p>
+            <a:pPr algn="ctr"/>
+            <a:endParaRPr/>
+          </a:p>
+        </p:txBody>
+      </p:sp>
+      <p:sp>
+        <p:nvSpPr>
+          <p:cNvPr id="4" name="Rectangle 1">
+            <a:extLst>
+              <a:ext uri="{FF2B5EF4-FFF2-40B4-BE49-F238E27FC236}">
+                <a16:creationId xmlns:a16="http://schemas.microsoft.com/office/drawing/2014/main" id="{BE8CEB8F-9248-BB4F-2BA6-B3E3DB30C92C}"/>
+              </a:ext>
+            </a:extLst>
+          </p:cNvPr>
+          <p:cNvSpPr/>
+          <p:nvPr/>
+        </p:nvSpPr>
+        <p:spPr>
+          <a:xfrm>
+            <a:off x="12030705" y="0"/>
+            <a:ext cx="164592" cy="6858000"/>
+          </a:xfrm>
+          <a:prstGeom prst="rect">
+            <a:avLst/>
+          </a:prstGeom>
+          <a:solidFill>
+            <a:srgbClr val="007E80"/>
+          </a:solidFill>
+          <a:ln>
+            <a:noFill/>
+          </a:ln>
+        </p:spPr>
+        <p:style>
+          <a:lnRef idx="1">
+            <a:schemeClr val="accent1"/>
+          </a:lnRef>
+          <a:fillRef idx="3">
+            <a:schemeClr val="accent1"/>
+          </a:fillRef>
+          <a:effectRef idx="2">
+            <a:schemeClr val="accent1"/>
+          </a:effectRef>
+          <a:fontRef idx="minor">
+            <a:schemeClr val="lt1"/>
+          </a:fontRef>
+        </p:style>
+        <p:txBody>
+          <a:bodyPr rtlCol="0" anchor="ctr"/>
+          <a:lstStyle/>
+          <a:p>
+            <a:pPr algn="ctr"/>
+            <a:endParaRPr/>
           </a:p>
         </p:txBody>
       </p:sp>
@@ -8389,7 +9404,7 @@
         </p:nvSpPr>
         <p:spPr>
           <a:xfrm>
-            <a:off x="7454960" y="3020993"/>
+            <a:off x="7419933" y="3013284"/>
             <a:ext cx="1874519" cy="777240"/>
           </a:xfrm>
           <a:prstGeom prst="rect">
@@ -8658,6 +9673,166 @@
             <a:r>
               <a:t>4</a:t>
             </a:r>
+          </a:p>
+        </p:txBody>
+      </p:sp>
+      <p:pic>
+        <p:nvPicPr>
+          <p:cNvPr id="32" name="Resim 31">
+            <a:extLst>
+              <a:ext uri="{FF2B5EF4-FFF2-40B4-BE49-F238E27FC236}">
+                <a16:creationId xmlns:a16="http://schemas.microsoft.com/office/drawing/2014/main" id="{90B13A80-478F-D251-7F16-14EEE0932BCD}"/>
+              </a:ext>
+            </a:extLst>
+          </p:cNvPr>
+          <p:cNvPicPr>
+            <a:picLocks noChangeAspect="1"/>
+          </p:cNvPicPr>
+          <p:nvPr/>
+        </p:nvPicPr>
+        <p:blipFill>
+          <a:blip r:embed="rId2"/>
+          <a:stretch>
+            <a:fillRect/>
+          </a:stretch>
+        </p:blipFill>
+        <p:spPr>
+          <a:xfrm>
+            <a:off x="7962847" y="1427355"/>
+            <a:ext cx="707241" cy="386982"/>
+          </a:xfrm>
+          <a:prstGeom prst="rect">
+            <a:avLst/>
+          </a:prstGeom>
+        </p:spPr>
+      </p:pic>
+      <p:pic>
+        <p:nvPicPr>
+          <p:cNvPr id="34" name="Resim 33">
+            <a:extLst>
+              <a:ext uri="{FF2B5EF4-FFF2-40B4-BE49-F238E27FC236}">
+                <a16:creationId xmlns:a16="http://schemas.microsoft.com/office/drawing/2014/main" id="{7039654E-06C6-1C3F-83C4-1045E3EE8FAC}"/>
+              </a:ext>
+            </a:extLst>
+          </p:cNvPr>
+          <p:cNvPicPr>
+            <a:picLocks noChangeAspect="1"/>
+          </p:cNvPicPr>
+          <p:nvPr/>
+        </p:nvPicPr>
+        <p:blipFill>
+          <a:blip r:embed="rId3"/>
+          <a:stretch>
+            <a:fillRect/>
+          </a:stretch>
+        </p:blipFill>
+        <p:spPr>
+          <a:xfrm>
+            <a:off x="7890663" y="3595159"/>
+            <a:ext cx="826061" cy="324524"/>
+          </a:xfrm>
+          <a:prstGeom prst="rect">
+            <a:avLst/>
+          </a:prstGeom>
+        </p:spPr>
+      </p:pic>
+      <p:sp>
+        <p:nvSpPr>
+          <p:cNvPr id="25" name="Rectangle 1">
+            <a:extLst>
+              <a:ext uri="{FF2B5EF4-FFF2-40B4-BE49-F238E27FC236}">
+                <a16:creationId xmlns:a16="http://schemas.microsoft.com/office/drawing/2014/main" id="{836761E0-3FE2-40D2-F58D-C0FB217BBD02}"/>
+              </a:ext>
+            </a:extLst>
+          </p:cNvPr>
+          <p:cNvSpPr/>
+          <p:nvPr/>
+        </p:nvSpPr>
+        <p:spPr>
+          <a:xfrm>
+            <a:off x="0" y="0"/>
+            <a:ext cx="164592" cy="6858000"/>
+          </a:xfrm>
+          <a:prstGeom prst="rect">
+            <a:avLst/>
+          </a:prstGeom>
+          <a:solidFill>
+            <a:srgbClr val="007E80"/>
+          </a:solidFill>
+          <a:ln>
+            <a:noFill/>
+          </a:ln>
+        </p:spPr>
+        <p:style>
+          <a:lnRef idx="1">
+            <a:schemeClr val="accent1"/>
+          </a:lnRef>
+          <a:fillRef idx="3">
+            <a:schemeClr val="accent1"/>
+          </a:fillRef>
+          <a:effectRef idx="2">
+            <a:schemeClr val="accent1"/>
+          </a:effectRef>
+          <a:fontRef idx="minor">
+            <a:schemeClr val="lt1"/>
+          </a:fontRef>
+        </p:style>
+        <p:txBody>
+          <a:bodyPr rtlCol="0" anchor="ctr"/>
+          <a:lstStyle/>
+          <a:p>
+            <a:pPr algn="ctr"/>
+            <a:endParaRPr/>
+          </a:p>
+        </p:txBody>
+      </p:sp>
+      <p:sp>
+        <p:nvSpPr>
+          <p:cNvPr id="26" name="Rectangle 1">
+            <a:extLst>
+              <a:ext uri="{FF2B5EF4-FFF2-40B4-BE49-F238E27FC236}">
+                <a16:creationId xmlns:a16="http://schemas.microsoft.com/office/drawing/2014/main" id="{042A445D-F331-16A0-D2ED-75B29BD64A75}"/>
+              </a:ext>
+            </a:extLst>
+          </p:cNvPr>
+          <p:cNvSpPr/>
+          <p:nvPr/>
+        </p:nvSpPr>
+        <p:spPr>
+          <a:xfrm>
+            <a:off x="12030705" y="0"/>
+            <a:ext cx="164592" cy="6858000"/>
+          </a:xfrm>
+          <a:prstGeom prst="rect">
+            <a:avLst/>
+          </a:prstGeom>
+          <a:solidFill>
+            <a:srgbClr val="007E80"/>
+          </a:solidFill>
+          <a:ln>
+            <a:noFill/>
+          </a:ln>
+        </p:spPr>
+        <p:style>
+          <a:lnRef idx="1">
+            <a:schemeClr val="accent1"/>
+          </a:lnRef>
+          <a:fillRef idx="3">
+            <a:schemeClr val="accent1"/>
+          </a:fillRef>
+          <a:effectRef idx="2">
+            <a:schemeClr val="accent1"/>
+          </a:effectRef>
+          <a:fontRef idx="minor">
+            <a:schemeClr val="lt1"/>
+          </a:fontRef>
+        </p:style>
+        <p:txBody>
+          <a:bodyPr rtlCol="0" anchor="ctr"/>
+          <a:lstStyle/>
+          <a:p>
+            <a:pPr algn="ctr"/>
+            <a:endParaRPr/>
           </a:p>
         </p:txBody>
       </p:sp>
@@ -8670,6 +9845,260 @@
 </file>
 
 <file path=ppt/slides/slide6.xml><?xml version="1.0" encoding="utf-8"?>
+<p:sld xmlns:a="http://schemas.openxmlformats.org/drawingml/2006/main" xmlns:r="http://schemas.openxmlformats.org/officeDocument/2006/relationships" xmlns:p="http://schemas.openxmlformats.org/presentationml/2006/main">
+  <p:cSld>
+    <p:spTree>
+      <p:nvGrpSpPr>
+        <p:cNvPr id="1" name=""/>
+        <p:cNvGrpSpPr/>
+        <p:nvPr/>
+      </p:nvGrpSpPr>
+      <p:grpSpPr>
+        <a:xfrm>
+          <a:off x="0" y="0"/>
+          <a:ext cx="0" cy="0"/>
+          <a:chOff x="0" y="0"/>
+          <a:chExt cx="0" cy="0"/>
+        </a:xfrm>
+      </p:grpSpPr>
+      <p:pic>
+        <p:nvPicPr>
+          <p:cNvPr id="3" name="Resim 2">
+            <a:extLst>
+              <a:ext uri="{FF2B5EF4-FFF2-40B4-BE49-F238E27FC236}">
+                <a16:creationId xmlns:a16="http://schemas.microsoft.com/office/drawing/2014/main" id="{1E288538-5CCB-FFA3-3892-BBEA349D51F8}"/>
+              </a:ext>
+            </a:extLst>
+          </p:cNvPr>
+          <p:cNvPicPr>
+            <a:picLocks noChangeAspect="1"/>
+          </p:cNvPicPr>
+          <p:nvPr/>
+        </p:nvPicPr>
+        <p:blipFill>
+          <a:blip r:embed="rId2"/>
+          <a:stretch>
+            <a:fillRect/>
+          </a:stretch>
+        </p:blipFill>
+        <p:spPr>
+          <a:xfrm>
+            <a:off x="502920" y="1353359"/>
+            <a:ext cx="11137392" cy="4554482"/>
+          </a:xfrm>
+          <a:prstGeom prst="rect">
+            <a:avLst/>
+          </a:prstGeom>
+        </p:spPr>
+      </p:pic>
+      <p:sp>
+        <p:nvSpPr>
+          <p:cNvPr id="4" name="TextBox 1">
+            <a:extLst>
+              <a:ext uri="{FF2B5EF4-FFF2-40B4-BE49-F238E27FC236}">
+                <a16:creationId xmlns:a16="http://schemas.microsoft.com/office/drawing/2014/main" id="{B889332D-7C72-F0C4-70A3-C6CEEB8123D4}"/>
+              </a:ext>
+            </a:extLst>
+          </p:cNvPr>
+          <p:cNvSpPr txBox="1"/>
+          <p:nvPr/>
+        </p:nvSpPr>
+        <p:spPr>
+          <a:xfrm>
+            <a:off x="502920" y="292608"/>
+            <a:ext cx="11155680" cy="502920"/>
+          </a:xfrm>
+          <a:prstGeom prst="rect">
+            <a:avLst/>
+          </a:prstGeom>
+          <a:noFill/>
+        </p:spPr>
+        <p:txBody>
+          <a:bodyPr wrap="square">
+            <a:normAutofit/>
+          </a:bodyPr>
+          <a:lstStyle/>
+          <a:p>
+            <a:pPr algn="l">
+              <a:defRPr sz="2400" b="1">
+                <a:solidFill>
+                  <a:srgbClr val="1F2328"/>
+                </a:solidFill>
+                <a:latin typeface="Aptos"/>
+              </a:defRPr>
+            </a:pPr>
+            <a:r>
+              <a:rPr lang="tr-TR"/>
+              <a:t>MATRİX</a:t>
+            </a:r>
+            <a:endParaRPr/>
+          </a:p>
+        </p:txBody>
+      </p:sp>
+      <p:sp>
+        <p:nvSpPr>
+          <p:cNvPr id="5" name="Rectangle 2">
+            <a:extLst>
+              <a:ext uri="{FF2B5EF4-FFF2-40B4-BE49-F238E27FC236}">
+                <a16:creationId xmlns:a16="http://schemas.microsoft.com/office/drawing/2014/main" id="{4B3EBF98-D623-947D-5C76-A29552DB6959}"/>
+              </a:ext>
+            </a:extLst>
+          </p:cNvPr>
+          <p:cNvSpPr/>
+          <p:nvPr/>
+        </p:nvSpPr>
+        <p:spPr>
+          <a:xfrm>
+            <a:off x="530352" y="1143000"/>
+            <a:ext cx="11109960" cy="13716"/>
+          </a:xfrm>
+          <a:prstGeom prst="rect">
+            <a:avLst/>
+          </a:prstGeom>
+          <a:solidFill>
+            <a:srgbClr val="DCE1E6"/>
+          </a:solidFill>
+          <a:ln>
+            <a:noFill/>
+          </a:ln>
+        </p:spPr>
+        <p:style>
+          <a:lnRef idx="1">
+            <a:schemeClr val="accent1"/>
+          </a:lnRef>
+          <a:fillRef idx="3">
+            <a:schemeClr val="accent1"/>
+          </a:fillRef>
+          <a:effectRef idx="2">
+            <a:schemeClr val="accent1"/>
+          </a:effectRef>
+          <a:fontRef idx="minor">
+            <a:schemeClr val="lt1"/>
+          </a:fontRef>
+        </p:style>
+        <p:txBody>
+          <a:bodyPr rtlCol="0" anchor="ctr"/>
+          <a:lstStyle/>
+          <a:p>
+            <a:pPr algn="ctr"/>
+            <a:endParaRPr/>
+          </a:p>
+        </p:txBody>
+      </p:sp>
+      <p:sp>
+        <p:nvSpPr>
+          <p:cNvPr id="2" name="Rectangle 1">
+            <a:extLst>
+              <a:ext uri="{FF2B5EF4-FFF2-40B4-BE49-F238E27FC236}">
+                <a16:creationId xmlns:a16="http://schemas.microsoft.com/office/drawing/2014/main" id="{C6BA8CB5-B60F-D465-CA25-F206D31E09E8}"/>
+              </a:ext>
+            </a:extLst>
+          </p:cNvPr>
+          <p:cNvSpPr/>
+          <p:nvPr/>
+        </p:nvSpPr>
+        <p:spPr>
+          <a:xfrm>
+            <a:off x="0" y="0"/>
+            <a:ext cx="164592" cy="6858000"/>
+          </a:xfrm>
+          <a:prstGeom prst="rect">
+            <a:avLst/>
+          </a:prstGeom>
+          <a:solidFill>
+            <a:srgbClr val="007E80"/>
+          </a:solidFill>
+          <a:ln>
+            <a:noFill/>
+          </a:ln>
+        </p:spPr>
+        <p:style>
+          <a:lnRef idx="1">
+            <a:schemeClr val="accent1"/>
+          </a:lnRef>
+          <a:fillRef idx="3">
+            <a:schemeClr val="accent1"/>
+          </a:fillRef>
+          <a:effectRef idx="2">
+            <a:schemeClr val="accent1"/>
+          </a:effectRef>
+          <a:fontRef idx="minor">
+            <a:schemeClr val="lt1"/>
+          </a:fontRef>
+        </p:style>
+        <p:txBody>
+          <a:bodyPr rtlCol="0" anchor="ctr"/>
+          <a:lstStyle/>
+          <a:p>
+            <a:pPr algn="ctr"/>
+            <a:endParaRPr/>
+          </a:p>
+        </p:txBody>
+      </p:sp>
+      <p:sp>
+        <p:nvSpPr>
+          <p:cNvPr id="6" name="Rectangle 1">
+            <a:extLst>
+              <a:ext uri="{FF2B5EF4-FFF2-40B4-BE49-F238E27FC236}">
+                <a16:creationId xmlns:a16="http://schemas.microsoft.com/office/drawing/2014/main" id="{A560E4E2-B511-0728-FF76-BFC45E7DAF2B}"/>
+              </a:ext>
+            </a:extLst>
+          </p:cNvPr>
+          <p:cNvSpPr/>
+          <p:nvPr/>
+        </p:nvSpPr>
+        <p:spPr>
+          <a:xfrm>
+            <a:off x="12030705" y="0"/>
+            <a:ext cx="164592" cy="6858000"/>
+          </a:xfrm>
+          <a:prstGeom prst="rect">
+            <a:avLst/>
+          </a:prstGeom>
+          <a:solidFill>
+            <a:srgbClr val="007E80"/>
+          </a:solidFill>
+          <a:ln>
+            <a:noFill/>
+          </a:ln>
+        </p:spPr>
+        <p:style>
+          <a:lnRef idx="1">
+            <a:schemeClr val="accent1"/>
+          </a:lnRef>
+          <a:fillRef idx="3">
+            <a:schemeClr val="accent1"/>
+          </a:fillRef>
+          <a:effectRef idx="2">
+            <a:schemeClr val="accent1"/>
+          </a:effectRef>
+          <a:fontRef idx="minor">
+            <a:schemeClr val="lt1"/>
+          </a:fontRef>
+        </p:style>
+        <p:txBody>
+          <a:bodyPr rtlCol="0" anchor="ctr"/>
+          <a:lstStyle/>
+          <a:p>
+            <a:pPr algn="ctr"/>
+            <a:endParaRPr/>
+          </a:p>
+        </p:txBody>
+      </p:sp>
+    </p:spTree>
+    <p:extLst>
+      <p:ext uri="{BB962C8B-B14F-4D97-AF65-F5344CB8AC3E}">
+        <p14:creationId xmlns:p14="http://schemas.microsoft.com/office/powerpoint/2010/main" val="2614959310"/>
+      </p:ext>
+    </p:extLst>
+  </p:cSld>
+  <p:clrMapOvr>
+    <a:masterClrMapping/>
+  </p:clrMapOvr>
+</p:sld>
+</file>
+
+<file path=ppt/slides/slide7.xml><?xml version="1.0" encoding="utf-8"?>
 <p:sld xmlns:a="http://schemas.openxmlformats.org/drawingml/2006/main" xmlns:r="http://schemas.openxmlformats.org/officeDocument/2006/relationships" xmlns:p="http://schemas.openxmlformats.org/presentationml/2006/main">
   <p:cSld>
     <p:bg>
@@ -8702,7 +10131,7 @@
         </p:nvSpPr>
         <p:spPr>
           <a:xfrm>
-            <a:off x="502920" y="292608"/>
+            <a:off x="530352" y="292608"/>
             <a:ext cx="11155680" cy="502920"/>
           </a:xfrm>
           <a:prstGeom prst="rect">
@@ -9052,8 +10481,10 @@
               </a:defRPr>
             </a:pPr>
             <a:r>
+              <a:rPr lang="tr-TR"/>
               <a:t>9</a:t>
             </a:r>
+            <a:endParaRPr/>
           </a:p>
           <a:p>
             <a:pPr>
@@ -9354,13 +10785,143 @@
         <p:spPr>
           <a:xfrm>
             <a:off x="502920" y="1389888"/>
-            <a:ext cx="6263640" cy="4892040"/>
+            <a:ext cx="6263640" cy="4469295"/>
           </a:xfrm>
           <a:prstGeom prst="rect">
             <a:avLst/>
           </a:prstGeom>
         </p:spPr>
       </p:pic>
+      <p:pic>
+        <p:nvPicPr>
+          <p:cNvPr id="16" name="Resim 15">
+            <a:extLst>
+              <a:ext uri="{FF2B5EF4-FFF2-40B4-BE49-F238E27FC236}">
+                <a16:creationId xmlns:a16="http://schemas.microsoft.com/office/drawing/2014/main" id="{D2E89764-F171-4C57-C02B-7BA98F8533FB}"/>
+              </a:ext>
+            </a:extLst>
+          </p:cNvPr>
+          <p:cNvPicPr>
+            <a:picLocks noChangeAspect="1"/>
+          </p:cNvPicPr>
+          <p:nvPr/>
+        </p:nvPicPr>
+        <p:blipFill>
+          <a:blip r:embed="rId3"/>
+          <a:stretch>
+            <a:fillRect/>
+          </a:stretch>
+        </p:blipFill>
+        <p:spPr>
+          <a:xfrm>
+            <a:off x="502920" y="5936484"/>
+            <a:ext cx="11137392" cy="654311"/>
+          </a:xfrm>
+          <a:prstGeom prst="rect">
+            <a:avLst/>
+          </a:prstGeom>
+        </p:spPr>
+      </p:pic>
+      <p:sp>
+        <p:nvSpPr>
+          <p:cNvPr id="4" name="Rectangle 1">
+            <a:extLst>
+              <a:ext uri="{FF2B5EF4-FFF2-40B4-BE49-F238E27FC236}">
+                <a16:creationId xmlns:a16="http://schemas.microsoft.com/office/drawing/2014/main" id="{F65CDA55-054B-4ACB-93A0-FE844633C244}"/>
+              </a:ext>
+            </a:extLst>
+          </p:cNvPr>
+          <p:cNvSpPr/>
+          <p:nvPr/>
+        </p:nvSpPr>
+        <p:spPr>
+          <a:xfrm>
+            <a:off x="0" y="0"/>
+            <a:ext cx="164592" cy="6858000"/>
+          </a:xfrm>
+          <a:prstGeom prst="rect">
+            <a:avLst/>
+          </a:prstGeom>
+          <a:solidFill>
+            <a:srgbClr val="007E80"/>
+          </a:solidFill>
+          <a:ln>
+            <a:noFill/>
+          </a:ln>
+        </p:spPr>
+        <p:style>
+          <a:lnRef idx="1">
+            <a:schemeClr val="accent1"/>
+          </a:lnRef>
+          <a:fillRef idx="3">
+            <a:schemeClr val="accent1"/>
+          </a:fillRef>
+          <a:effectRef idx="2">
+            <a:schemeClr val="accent1"/>
+          </a:effectRef>
+          <a:fontRef idx="minor">
+            <a:schemeClr val="lt1"/>
+          </a:fontRef>
+        </p:style>
+        <p:txBody>
+          <a:bodyPr rtlCol="0" anchor="ctr"/>
+          <a:lstStyle/>
+          <a:p>
+            <a:pPr algn="ctr"/>
+            <a:endParaRPr/>
+          </a:p>
+        </p:txBody>
+      </p:sp>
+      <p:sp>
+        <p:nvSpPr>
+          <p:cNvPr id="17" name="Rectangle 1">
+            <a:extLst>
+              <a:ext uri="{FF2B5EF4-FFF2-40B4-BE49-F238E27FC236}">
+                <a16:creationId xmlns:a16="http://schemas.microsoft.com/office/drawing/2014/main" id="{E4378CB5-823C-A957-B728-D667C07489C0}"/>
+              </a:ext>
+            </a:extLst>
+          </p:cNvPr>
+          <p:cNvSpPr/>
+          <p:nvPr/>
+        </p:nvSpPr>
+        <p:spPr>
+          <a:xfrm>
+            <a:off x="12030705" y="0"/>
+            <a:ext cx="164592" cy="6858000"/>
+          </a:xfrm>
+          <a:prstGeom prst="rect">
+            <a:avLst/>
+          </a:prstGeom>
+          <a:solidFill>
+            <a:srgbClr val="007E80"/>
+          </a:solidFill>
+          <a:ln>
+            <a:noFill/>
+          </a:ln>
+        </p:spPr>
+        <p:style>
+          <a:lnRef idx="1">
+            <a:schemeClr val="accent1"/>
+          </a:lnRef>
+          <a:fillRef idx="3">
+            <a:schemeClr val="accent1"/>
+          </a:fillRef>
+          <a:effectRef idx="2">
+            <a:schemeClr val="accent1"/>
+          </a:effectRef>
+          <a:fontRef idx="minor">
+            <a:schemeClr val="lt1"/>
+          </a:fontRef>
+        </p:style>
+        <p:txBody>
+          <a:bodyPr rtlCol="0" anchor="ctr"/>
+          <a:lstStyle/>
+          <a:p>
+            <a:pPr algn="ctr"/>
+            <a:endParaRPr/>
+          </a:p>
+        </p:txBody>
+      </p:sp>
     </p:spTree>
   </p:cSld>
   <p:clrMapOvr>
@@ -9369,7 +10930,7 @@
 </p:sld>
 </file>
 
-<file path=ppt/slides/slide7.xml><?xml version="1.0" encoding="utf-8"?>
+<file path=ppt/slides/slide8.xml><?xml version="1.0" encoding="utf-8"?>
 <p:sld xmlns:a="http://schemas.openxmlformats.org/drawingml/2006/main" xmlns:r="http://schemas.openxmlformats.org/officeDocument/2006/relationships" xmlns:p="http://schemas.openxmlformats.org/presentationml/2006/main">
   <p:cSld>
     <p:spTree>
@@ -9416,6 +10977,168 @@
           </a:prstGeom>
         </p:spPr>
       </p:pic>
+      <p:sp>
+        <p:nvSpPr>
+          <p:cNvPr id="3" name="Metin kutusu 2">
+            <a:extLst>
+              <a:ext uri="{FF2B5EF4-FFF2-40B4-BE49-F238E27FC236}">
+                <a16:creationId xmlns:a16="http://schemas.microsoft.com/office/drawing/2014/main" id="{0231920A-6B2C-B918-D4EC-3A277E5E8F4B}"/>
+              </a:ext>
+            </a:extLst>
+          </p:cNvPr>
+          <p:cNvSpPr txBox="1"/>
+          <p:nvPr/>
+        </p:nvSpPr>
+        <p:spPr>
+          <a:xfrm>
+            <a:off x="239828" y="6108556"/>
+            <a:ext cx="3016577" cy="923330"/>
+          </a:xfrm>
+          <a:prstGeom prst="rect">
+            <a:avLst/>
+          </a:prstGeom>
+          <a:noFill/>
+        </p:spPr>
+        <p:txBody>
+          <a:bodyPr wrap="square" rtlCol="0">
+            <a:spAutoFit/>
+          </a:bodyPr>
+          <a:lstStyle/>
+          <a:p>
+            <a:pPr marL="285750" indent="-285750">
+              <a:buFont typeface="Arial" panose="020B0604020202020204" pitchFamily="34" charset="0"/>
+              <a:buChar char="•"/>
+            </a:pPr>
+            <a:r>
+              <a:rPr lang="tr-TR" sz="1200"/>
+              <a:t>renk/boyut -- node degree</a:t>
+            </a:r>
+          </a:p>
+          <a:p>
+            <a:pPr marL="285750" indent="-285750">
+              <a:buFont typeface="Arial" panose="020B0604020202020204" pitchFamily="34" charset="0"/>
+              <a:buChar char="•"/>
+            </a:pPr>
+            <a:r>
+              <a:rPr lang="tr-TR" sz="1200"/>
+              <a:t>kenar kalınlığı -- korelasyon boyutu</a:t>
+            </a:r>
+          </a:p>
+          <a:p>
+            <a:pPr marL="285750" indent="-285750">
+              <a:buFont typeface="Arial" panose="020B0604020202020204" pitchFamily="34" charset="0"/>
+              <a:buChar char="•"/>
+            </a:pPr>
+            <a:r>
+              <a:rPr lang="tr-TR" sz="1200"/>
+              <a:t>kenar rengi -- korelasyon(+,-)</a:t>
+            </a:r>
+          </a:p>
+          <a:p>
+            <a:endParaRPr lang="tr-TR"/>
+          </a:p>
+        </p:txBody>
+      </p:sp>
+      <p:sp>
+        <p:nvSpPr>
+          <p:cNvPr id="4" name="Rectangle 1">
+            <a:extLst>
+              <a:ext uri="{FF2B5EF4-FFF2-40B4-BE49-F238E27FC236}">
+                <a16:creationId xmlns:a16="http://schemas.microsoft.com/office/drawing/2014/main" id="{BE6EE02D-9EAB-ECC4-1653-D620C2AE7777}"/>
+              </a:ext>
+            </a:extLst>
+          </p:cNvPr>
+          <p:cNvSpPr/>
+          <p:nvPr/>
+        </p:nvSpPr>
+        <p:spPr>
+          <a:xfrm>
+            <a:off x="0" y="0"/>
+            <a:ext cx="164592" cy="6858000"/>
+          </a:xfrm>
+          <a:prstGeom prst="rect">
+            <a:avLst/>
+          </a:prstGeom>
+          <a:solidFill>
+            <a:srgbClr val="007E80"/>
+          </a:solidFill>
+          <a:ln>
+            <a:noFill/>
+          </a:ln>
+        </p:spPr>
+        <p:style>
+          <a:lnRef idx="1">
+            <a:schemeClr val="accent1"/>
+          </a:lnRef>
+          <a:fillRef idx="3">
+            <a:schemeClr val="accent1"/>
+          </a:fillRef>
+          <a:effectRef idx="2">
+            <a:schemeClr val="accent1"/>
+          </a:effectRef>
+          <a:fontRef idx="minor">
+            <a:schemeClr val="lt1"/>
+          </a:fontRef>
+        </p:style>
+        <p:txBody>
+          <a:bodyPr rtlCol="0" anchor="ctr"/>
+          <a:lstStyle/>
+          <a:p>
+            <a:pPr algn="ctr"/>
+            <a:endParaRPr/>
+          </a:p>
+        </p:txBody>
+      </p:sp>
+      <p:sp>
+        <p:nvSpPr>
+          <p:cNvPr id="5" name="Rectangle 1">
+            <a:extLst>
+              <a:ext uri="{FF2B5EF4-FFF2-40B4-BE49-F238E27FC236}">
+                <a16:creationId xmlns:a16="http://schemas.microsoft.com/office/drawing/2014/main" id="{A98773BD-DEED-97D5-CD86-234060DA34A6}"/>
+              </a:ext>
+            </a:extLst>
+          </p:cNvPr>
+          <p:cNvSpPr/>
+          <p:nvPr/>
+        </p:nvSpPr>
+        <p:spPr>
+          <a:xfrm>
+            <a:off x="12030705" y="0"/>
+            <a:ext cx="164592" cy="6858000"/>
+          </a:xfrm>
+          <a:prstGeom prst="rect">
+            <a:avLst/>
+          </a:prstGeom>
+          <a:solidFill>
+            <a:srgbClr val="007E80"/>
+          </a:solidFill>
+          <a:ln>
+            <a:noFill/>
+          </a:ln>
+        </p:spPr>
+        <p:style>
+          <a:lnRef idx="1">
+            <a:schemeClr val="accent1"/>
+          </a:lnRef>
+          <a:fillRef idx="3">
+            <a:schemeClr val="accent1"/>
+          </a:fillRef>
+          <a:effectRef idx="2">
+            <a:schemeClr val="accent1"/>
+          </a:effectRef>
+          <a:fontRef idx="minor">
+            <a:schemeClr val="lt1"/>
+          </a:fontRef>
+        </p:style>
+        <p:txBody>
+          <a:bodyPr rtlCol="0" anchor="ctr"/>
+          <a:lstStyle/>
+          <a:p>
+            <a:pPr algn="ctr"/>
+            <a:endParaRPr/>
+          </a:p>
+        </p:txBody>
+      </p:sp>
     </p:spTree>
     <p:extLst>
       <p:ext uri="{BB962C8B-B14F-4D97-AF65-F5344CB8AC3E}">
@@ -9429,7 +11152,7 @@
 </p:sld>
 </file>
 
-<file path=ppt/slides/slide8.xml><?xml version="1.0" encoding="utf-8"?>
+<file path=ppt/slides/slide9.xml><?xml version="1.0" encoding="utf-8"?>
 <p:sld xmlns:a="http://schemas.openxmlformats.org/drawingml/2006/main" xmlns:r="http://schemas.openxmlformats.org/officeDocument/2006/relationships" xmlns:p="http://schemas.openxmlformats.org/presentationml/2006/main">
   <p:cSld>
     <p:bg>
@@ -10387,97 +12110,107 @@
           </a:p>
         </p:txBody>
       </p:sp>
-    </p:spTree>
-  </p:cSld>
-  <p:clrMapOvr>
-    <a:masterClrMapping/>
-  </p:clrMapOvr>
-</p:sld>
-</file>
-
-<file path=ppt/slides/slide9.xml><?xml version="1.0" encoding="utf-8"?>
-<p:sld xmlns:a="http://schemas.openxmlformats.org/drawingml/2006/main" xmlns:r="http://schemas.openxmlformats.org/officeDocument/2006/relationships" xmlns:p="http://schemas.openxmlformats.org/presentationml/2006/main">
-  <p:cSld>
-    <p:spTree>
-      <p:nvGrpSpPr>
-        <p:cNvPr id="1" name=""/>
-        <p:cNvGrpSpPr/>
-        <p:nvPr/>
-      </p:nvGrpSpPr>
-      <p:grpSpPr>
-        <a:xfrm>
-          <a:off x="0" y="0"/>
-          <a:ext cx="0" cy="0"/>
-          <a:chOff x="0" y="0"/>
-          <a:chExt cx="0" cy="0"/>
-        </a:xfrm>
-      </p:grpSpPr>
-      <p:pic>
-        <p:nvPicPr>
-          <p:cNvPr id="3" name="Resim 2">
+      <p:sp>
+        <p:nvSpPr>
+          <p:cNvPr id="25" name="Rectangle 1">
             <a:extLst>
               <a:ext uri="{FF2B5EF4-FFF2-40B4-BE49-F238E27FC236}">
-                <a16:creationId xmlns:a16="http://schemas.microsoft.com/office/drawing/2014/main" id="{80DA6D87-C0B3-A175-5458-BB1ECECB8546}"/>
+                <a16:creationId xmlns:a16="http://schemas.microsoft.com/office/drawing/2014/main" id="{259FC58A-8A48-7A96-F379-400FED4DC80C}"/>
               </a:ext>
             </a:extLst>
           </p:cNvPr>
-          <p:cNvPicPr>
-            <a:picLocks noChangeAspect="1"/>
-          </p:cNvPicPr>
-          <p:nvPr/>
-        </p:nvPicPr>
-        <p:blipFill>
-          <a:blip r:embed="rId2"/>
-          <a:stretch>
-            <a:fillRect/>
-          </a:stretch>
-        </p:blipFill>
-        <p:spPr>
-          <a:xfrm>
-            <a:off x="0" y="-1"/>
-            <a:ext cx="7598852" cy="3965511"/>
-          </a:xfrm>
-          <a:prstGeom prst="rect">
-            <a:avLst/>
-          </a:prstGeom>
-        </p:spPr>
-      </p:pic>
-      <p:pic>
-        <p:nvPicPr>
-          <p:cNvPr id="5" name="Resim 4">
+          <p:cNvSpPr/>
+          <p:nvPr/>
+        </p:nvSpPr>
+        <p:spPr>
+          <a:xfrm>
+            <a:off x="0" y="0"/>
+            <a:ext cx="164592" cy="6858000"/>
+          </a:xfrm>
+          <a:prstGeom prst="rect">
+            <a:avLst/>
+          </a:prstGeom>
+          <a:solidFill>
+            <a:srgbClr val="007E80"/>
+          </a:solidFill>
+          <a:ln>
+            <a:noFill/>
+          </a:ln>
+        </p:spPr>
+        <p:style>
+          <a:lnRef idx="1">
+            <a:schemeClr val="accent1"/>
+          </a:lnRef>
+          <a:fillRef idx="3">
+            <a:schemeClr val="accent1"/>
+          </a:fillRef>
+          <a:effectRef idx="2">
+            <a:schemeClr val="accent1"/>
+          </a:effectRef>
+          <a:fontRef idx="minor">
+            <a:schemeClr val="lt1"/>
+          </a:fontRef>
+        </p:style>
+        <p:txBody>
+          <a:bodyPr rtlCol="0" anchor="ctr"/>
+          <a:lstStyle/>
+          <a:p>
+            <a:pPr algn="ctr"/>
+            <a:endParaRPr/>
+          </a:p>
+        </p:txBody>
+      </p:sp>
+      <p:sp>
+        <p:nvSpPr>
+          <p:cNvPr id="26" name="Rectangle 1">
             <a:extLst>
               <a:ext uri="{FF2B5EF4-FFF2-40B4-BE49-F238E27FC236}">
-                <a16:creationId xmlns:a16="http://schemas.microsoft.com/office/drawing/2014/main" id="{CEC89A22-4A39-A642-2523-FAA4B5BBC6D8}"/>
+                <a16:creationId xmlns:a16="http://schemas.microsoft.com/office/drawing/2014/main" id="{860E3E55-C6C5-84F5-23AA-73FD5804DF5B}"/>
               </a:ext>
             </a:extLst>
           </p:cNvPr>
-          <p:cNvPicPr>
-            <a:picLocks noChangeAspect="1"/>
-          </p:cNvPicPr>
-          <p:nvPr/>
-        </p:nvPicPr>
-        <p:blipFill>
-          <a:blip r:embed="rId3"/>
-          <a:stretch>
-            <a:fillRect/>
-          </a:stretch>
-        </p:blipFill>
-        <p:spPr>
-          <a:xfrm>
-            <a:off x="4982547" y="2983121"/>
-            <a:ext cx="7190791" cy="3874880"/>
-          </a:xfrm>
-          <a:prstGeom prst="rect">
-            <a:avLst/>
-          </a:prstGeom>
-        </p:spPr>
-      </p:pic>
+          <p:cNvSpPr/>
+          <p:nvPr/>
+        </p:nvSpPr>
+        <p:spPr>
+          <a:xfrm>
+            <a:off x="12030705" y="0"/>
+            <a:ext cx="164592" cy="6858000"/>
+          </a:xfrm>
+          <a:prstGeom prst="rect">
+            <a:avLst/>
+          </a:prstGeom>
+          <a:solidFill>
+            <a:srgbClr val="007E80"/>
+          </a:solidFill>
+          <a:ln>
+            <a:noFill/>
+          </a:ln>
+        </p:spPr>
+        <p:style>
+          <a:lnRef idx="1">
+            <a:schemeClr val="accent1"/>
+          </a:lnRef>
+          <a:fillRef idx="3">
+            <a:schemeClr val="accent1"/>
+          </a:fillRef>
+          <a:effectRef idx="2">
+            <a:schemeClr val="accent1"/>
+          </a:effectRef>
+          <a:fontRef idx="minor">
+            <a:schemeClr val="lt1"/>
+          </a:fontRef>
+        </p:style>
+        <p:txBody>
+          <a:bodyPr rtlCol="0" anchor="ctr"/>
+          <a:lstStyle/>
+          <a:p>
+            <a:pPr algn="ctr"/>
+            <a:endParaRPr/>
+          </a:p>
+        </p:txBody>
+      </p:sp>
     </p:spTree>
-    <p:extLst>
-      <p:ext uri="{BB962C8B-B14F-4D97-AF65-F5344CB8AC3E}">
-        <p14:creationId xmlns:p14="http://schemas.microsoft.com/office/powerpoint/2010/main" val="1316107506"/>
-      </p:ext>
-    </p:extLst>
   </p:cSld>
   <p:clrMapOvr>
     <a:masterClrMapping/>
